--- a/docs/pitch_deck/HIPAApotamus_Pitch_Deck.pptx
+++ b/docs/pitch_deck/HIPAApotamus_Pitch_Deck.pptx
@@ -19,6 +19,7 @@
     <p:sldId id="267" r:id="rId18"/>
     <p:sldId id="268" r:id="rId19"/>
     <p:sldId id="269" r:id="rId20"/>
+    <p:sldId id="270" r:id="rId21"/>
   </p:sldIdLst>
   <p:sldSz cx="12191695" cy="6858000" type="screen4x3"/>
   <p:notesSz cx="6858000" cy="9144000"/>
@@ -3585,7 +3586,7 @@
                 </a:solidFill>
                 <a:latin typeface="Courier New"/>
               </a:rPr>
-              <a:t>10 / 14</a:t>
+              <a:t>10 / 15</a:t>
             </a:r>
           </a:p>
         </p:txBody>
@@ -3620,7 +3621,7 @@
                 </a:solidFill>
                 <a:latin typeface="Georgia"/>
               </a:rPr>
-              <a:t>Reminders</a:t>
+              <a:t>Audit</a:t>
             </a:r>
           </a:p>
         </p:txBody>
@@ -3699,7 +3700,7 @@
                 </a:solidFill>
                 <a:latin typeface="Helvetica"/>
               </a:rPr>
-              <a:t>Every status change sends a purpose-built email — and every email stays inside the AWS BAA perimeter.</a:t>
+              <a:t>One ledger, surfaced three ways — for the operator, the auditor, and the regulator.</a:t>
             </a:r>
           </a:p>
         </p:txBody>
@@ -3778,45 +3779,21 @@
                 </a:solidFill>
                 <a:latin typeface="Helvetica"/>
               </a:rPr>
-              <a:t>Every status change sends a purpose-built email — and every email stays inside the AWS BAA perimeter.</a:t>
+              <a:t>One ledger, surfaced three ways — for the operator, the auditor, and the regulator.</a:t>
             </a:r>
           </a:p>
         </p:txBody>
       </p:sp>
-      <p:pic>
-        <p:nvPicPr>
-          <p:cNvPr id="10" name="Picture 9" descr="verification_code.png"/>
-          <p:cNvPicPr>
-            <a:picLocks noChangeAspect="1"/>
-          </p:cNvPicPr>
-          <p:nvPr/>
-        </p:nvPicPr>
-        <p:blipFill>
-          <a:blip r:embed="rId2"/>
-          <a:stretch>
-            <a:fillRect/>
-          </a:stretch>
-        </p:blipFill>
-        <p:spPr>
-          <a:xfrm>
-            <a:off x="749808" y="2057400"/>
-            <a:ext cx="2467279" cy="1645920"/>
-          </a:xfrm>
-          <a:prstGeom prst="rect">
-            <a:avLst/>
-          </a:prstGeom>
-        </p:spPr>
-      </p:pic>
-      <p:sp>
-        <p:nvSpPr>
-          <p:cNvPr id="11" name="TextBox 10"/>
+      <p:sp>
+        <p:nvSpPr>
+          <p:cNvPr id="10" name="TextBox 9"/>
           <p:cNvSpPr txBox="1"/>
           <p:nvPr/>
         </p:nvSpPr>
         <p:spPr>
           <a:xfrm>
-            <a:off x="749808" y="3904487"/>
-            <a:ext cx="2467279" cy="320040"/>
+            <a:off x="749808" y="1783080"/>
+            <a:ext cx="10698480" cy="411480"/>
           </a:xfrm>
           <a:prstGeom prst="rect">
             <a:avLst/>
@@ -3831,27 +3808,27 @@
           <a:p>
             <a:pPr algn="l"/>
             <a:r>
-              <a:rPr sz="1400" b="1" i="0">
+              <a:rPr sz="2200" b="1" i="0">
                 <a:solidFill>
                   <a:srgbClr val="ECE6DA"/>
                 </a:solidFill>
                 <a:latin typeface="Helvetica"/>
               </a:rPr>
-              <a:t>Verification code.</a:t>
+              <a:t>Agency view.</a:t>
             </a:r>
           </a:p>
         </p:txBody>
       </p:sp>
       <p:sp>
         <p:nvSpPr>
-          <p:cNvPr id="12" name="TextBox 11"/>
+          <p:cNvPr id="11" name="TextBox 10"/>
           <p:cNvSpPr txBox="1"/>
           <p:nvPr/>
         </p:nvSpPr>
         <p:spPr>
           <a:xfrm>
-            <a:off x="749808" y="4251959"/>
-            <a:ext cx="2467279" cy="822960"/>
+            <a:off x="749808" y="2240280"/>
+            <a:ext cx="10698480" cy="548640"/>
           </a:xfrm>
           <a:prstGeom prst="rect">
             <a:avLst/>
@@ -3866,31 +3843,31 @@
           <a:p>
             <a:pPr algn="l">
               <a:lnSpc>
-                <a:spcPct val="120000"/>
+                <a:spcPct val="125000"/>
               </a:lnSpc>
             </a:pPr>
             <a:r>
-              <a:rPr sz="1100" b="0" i="0">
+              <a:rPr sz="1300" b="0" i="0">
                 <a:solidFill>
                   <a:srgbClr val="C7C0B2"/>
                 </a:solidFill>
                 <a:latin typeface="Helvetica"/>
               </a:rPr>
-              <a:t>10-minute OTP sent to the signer's registered email.</a:t>
+              <a:t>Every audit event across every vendor in one filterable table — action, vendor, timestamp, performer. Filter by date range, action type, or free-text search.</a:t>
             </a:r>
           </a:p>
         </p:txBody>
       </p:sp>
       <p:sp>
         <p:nvSpPr>
-          <p:cNvPr id="13" name="TextBox 12"/>
+          <p:cNvPr id="12" name="TextBox 11"/>
           <p:cNvSpPr txBox="1"/>
           <p:nvPr/>
         </p:nvSpPr>
         <p:spPr>
           <a:xfrm>
-            <a:off x="749808" y="5047488"/>
-            <a:ext cx="2467279" cy="274320"/>
+            <a:off x="749808" y="2715768"/>
+            <a:ext cx="10698480" cy="274320"/>
           </a:xfrm>
           <a:prstGeom prst="rect">
             <a:avLst/>
@@ -3905,51 +3882,27 @@
           <a:p>
             <a:pPr algn="l"/>
             <a:r>
-              <a:rPr sz="900" b="0" i="1">
+              <a:rPr sz="1000" b="0" i="1">
                 <a:solidFill>
                   <a:srgbClr val="C99856"/>
                 </a:solidFill>
                 <a:latin typeface="Courier New"/>
               </a:rPr>
-              <a:t>ESIGN §7001(c) — attribution</a:t>
+              <a:t>src/app/dashboard/history/page.tsx  ·  getRecentAuditLogs()</a:t>
             </a:r>
           </a:p>
         </p:txBody>
       </p:sp>
-      <p:pic>
-        <p:nvPicPr>
-          <p:cNvPr id="14" name="Picture 13" descr="signature_reminder.png"/>
-          <p:cNvPicPr>
-            <a:picLocks noChangeAspect="1"/>
-          </p:cNvPicPr>
-          <p:nvPr/>
-        </p:nvPicPr>
-        <p:blipFill>
-          <a:blip r:embed="rId3"/>
-          <a:stretch>
-            <a:fillRect/>
-          </a:stretch>
-        </p:blipFill>
-        <p:spPr>
-          <a:xfrm>
-            <a:off x="3491407" y="2057400"/>
-            <a:ext cx="2467279" cy="1645920"/>
-          </a:xfrm>
-          <a:prstGeom prst="rect">
-            <a:avLst/>
-          </a:prstGeom>
-        </p:spPr>
-      </p:pic>
-      <p:sp>
-        <p:nvSpPr>
-          <p:cNvPr id="15" name="TextBox 14"/>
+      <p:sp>
+        <p:nvSpPr>
+          <p:cNvPr id="13" name="TextBox 12"/>
           <p:cNvSpPr txBox="1"/>
           <p:nvPr/>
         </p:nvSpPr>
         <p:spPr>
           <a:xfrm>
-            <a:off x="3491407" y="3904487"/>
-            <a:ext cx="2467279" cy="320040"/>
+            <a:off x="749808" y="3200400"/>
+            <a:ext cx="10698480" cy="411480"/>
           </a:xfrm>
           <a:prstGeom prst="rect">
             <a:avLst/>
@@ -3964,27 +3917,27 @@
           <a:p>
             <a:pPr algn="l"/>
             <a:r>
-              <a:rPr sz="1400" b="1" i="0">
+              <a:rPr sz="2200" b="1" i="0">
                 <a:solidFill>
                   <a:srgbClr val="ECE6DA"/>
                 </a:solidFill>
                 <a:latin typeface="Helvetica"/>
               </a:rPr>
-              <a:t>Signature reminder.</a:t>
+              <a:t>Vendor drill-down.</a:t>
             </a:r>
           </a:p>
         </p:txBody>
       </p:sp>
       <p:sp>
         <p:nvSpPr>
-          <p:cNvPr id="16" name="TextBox 15"/>
+          <p:cNvPr id="14" name="TextBox 13"/>
           <p:cNvSpPr txBox="1"/>
           <p:nvPr/>
         </p:nvSpPr>
         <p:spPr>
           <a:xfrm>
-            <a:off x="3491407" y="4251959"/>
-            <a:ext cx="2467279" cy="822960"/>
+            <a:off x="749808" y="3657600"/>
+            <a:ext cx="10698480" cy="548640"/>
           </a:xfrm>
           <a:prstGeom prst="rect">
             <a:avLst/>
@@ -3999,31 +3952,31 @@
           <a:p>
             <a:pPr algn="l">
               <a:lnSpc>
-                <a:spcPct val="120000"/>
+                <a:spcPct val="125000"/>
               </a:lnSpc>
             </a:pPr>
             <a:r>
-              <a:rPr sz="1100" b="0" i="0">
+              <a:rPr sz="1300" b="0" i="0">
                 <a:solidFill>
                   <a:srgbClr val="C7C0B2"/>
                 </a:solidFill>
                 <a:latin typeface="Helvetica"/>
               </a:rPr>
-              <a:t>Automatic nudges at 7 / 14 / 29 days since invitation.</a:t>
+              <a:t>Click any vendor and the full chronological history opens — invitation, OTP, consent, signature, counter-sign, every reminder that ever went out.</a:t>
             </a:r>
           </a:p>
         </p:txBody>
       </p:sp>
       <p:sp>
         <p:nvSpPr>
-          <p:cNvPr id="17" name="TextBox 16"/>
+          <p:cNvPr id="15" name="TextBox 14"/>
           <p:cNvSpPr txBox="1"/>
           <p:nvPr/>
         </p:nvSpPr>
         <p:spPr>
           <a:xfrm>
-            <a:off x="3491407" y="5047488"/>
-            <a:ext cx="2467279" cy="274320"/>
+            <a:off x="749808" y="4133087"/>
+            <a:ext cx="10698480" cy="274320"/>
           </a:xfrm>
           <a:prstGeom prst="rect">
             <a:avLst/>
@@ -4038,51 +3991,27 @@
           <a:p>
             <a:pPr algn="l"/>
             <a:r>
-              <a:rPr sz="900" b="0" i="1">
+              <a:rPr sz="1000" b="0" i="1">
                 <a:solidFill>
                   <a:srgbClr val="C99856"/>
                 </a:solidFill>
                 <a:latin typeface="Courier New"/>
               </a:rPr>
-              <a:t>src/lib/reminders/policy.ts</a:t>
+              <a:t>src/components/dashboard/BAADetailsModal.tsx  ·  getAuditLogsByVendor()</a:t>
             </a:r>
           </a:p>
         </p:txBody>
       </p:sp>
-      <p:pic>
-        <p:nvPicPr>
-          <p:cNvPr id="18" name="Picture 17" descr="executed_confirmation.png"/>
-          <p:cNvPicPr>
-            <a:picLocks noChangeAspect="1"/>
-          </p:cNvPicPr>
-          <p:nvPr/>
-        </p:nvPicPr>
-        <p:blipFill>
-          <a:blip r:embed="rId4"/>
-          <a:stretch>
-            <a:fillRect/>
-          </a:stretch>
-        </p:blipFill>
-        <p:spPr>
-          <a:xfrm>
-            <a:off x="6233007" y="2057400"/>
-            <a:ext cx="2467279" cy="1645920"/>
-          </a:xfrm>
-          <a:prstGeom prst="rect">
-            <a:avLst/>
-          </a:prstGeom>
-        </p:spPr>
-      </p:pic>
-      <p:sp>
-        <p:nvSpPr>
-          <p:cNvPr id="19" name="TextBox 18"/>
+      <p:sp>
+        <p:nvSpPr>
+          <p:cNvPr id="16" name="TextBox 15"/>
           <p:cNvSpPr txBox="1"/>
           <p:nvPr/>
         </p:nvSpPr>
         <p:spPr>
           <a:xfrm>
-            <a:off x="6233007" y="3904487"/>
-            <a:ext cx="2467279" cy="320040"/>
+            <a:off x="749808" y="4617720"/>
+            <a:ext cx="10698480" cy="411480"/>
           </a:xfrm>
           <a:prstGeom prst="rect">
             <a:avLst/>
@@ -4097,27 +4026,27 @@
           <a:p>
             <a:pPr algn="l"/>
             <a:r>
-              <a:rPr sz="1400" b="1" i="0">
+              <a:rPr sz="2200" b="1" i="0">
                 <a:solidFill>
                   <a:srgbClr val="ECE6DA"/>
                 </a:solidFill>
                 <a:latin typeface="Helvetica"/>
               </a:rPr>
-              <a:t>Executed confirmation.</a:t>
+              <a:t>Audit packet.</a:t>
             </a:r>
           </a:p>
         </p:txBody>
       </p:sp>
       <p:sp>
         <p:nvSpPr>
-          <p:cNvPr id="20" name="TextBox 19"/>
+          <p:cNvPr id="17" name="TextBox 16"/>
           <p:cNvSpPr txBox="1"/>
           <p:nvPr/>
         </p:nvSpPr>
         <p:spPr>
           <a:xfrm>
-            <a:off x="6233007" y="4251959"/>
-            <a:ext cx="2467279" cy="822960"/>
+            <a:off x="749808" y="5074920"/>
+            <a:ext cx="10698480" cy="548640"/>
           </a:xfrm>
           <a:prstGeom prst="rect">
             <a:avLst/>
@@ -4132,31 +4061,31 @@
           <a:p>
             <a:pPr algn="l">
               <a:lnSpc>
-                <a:spcPct val="120000"/>
+                <a:spcPct val="125000"/>
               </a:lnSpc>
             </a:pPr>
             <a:r>
-              <a:rPr sz="1100" b="0" i="0">
+              <a:rPr sz="1300" b="0" i="0">
                 <a:solidFill>
                   <a:srgbClr val="C7C0B2"/>
                 </a:solidFill>
                 <a:latin typeface="Helvetica"/>
               </a:rPr>
-              <a:t>Delivered to both parties when the clinic counter-signs.</a:t>
+              <a:t>One-click ZIP export: Executive Summary + signed BAA + Audit Trail PDF + Compliance Matrix. Hand it to OCR, the state health department, or a prospect's security review.</a:t>
             </a:r>
           </a:p>
         </p:txBody>
       </p:sp>
       <p:sp>
         <p:nvSpPr>
-          <p:cNvPr id="21" name="TextBox 20"/>
+          <p:cNvPr id="18" name="TextBox 17"/>
           <p:cNvSpPr txBox="1"/>
           <p:nvPr/>
         </p:nvSpPr>
         <p:spPr>
           <a:xfrm>
-            <a:off x="6233007" y="5047488"/>
-            <a:ext cx="2467279" cy="274320"/>
+            <a:off x="749808" y="5550408"/>
+            <a:ext cx="10698480" cy="274320"/>
           </a:xfrm>
           <a:prstGeom prst="rect">
             <a:avLst/>
@@ -4171,146 +4100,13 @@
           <a:p>
             <a:pPr algn="l"/>
             <a:r>
-              <a:rPr sz="900" b="0" i="1">
+              <a:rPr sz="1000" b="0" i="1">
                 <a:solidFill>
                   <a:srgbClr val="C99856"/>
                 </a:solidFill>
                 <a:latin typeface="Courier New"/>
               </a:rPr>
-              <a:t>45 CFR §164.504(e) — fully executed</a:t>
-            </a:r>
-          </a:p>
-        </p:txBody>
-      </p:sp>
-      <p:pic>
-        <p:nvPicPr>
-          <p:cNvPr id="22" name="Picture 21" descr="expiration_notice.png"/>
-          <p:cNvPicPr>
-            <a:picLocks noChangeAspect="1"/>
-          </p:cNvPicPr>
-          <p:nvPr/>
-        </p:nvPicPr>
-        <p:blipFill>
-          <a:blip r:embed="rId5"/>
-          <a:stretch>
-            <a:fillRect/>
-          </a:stretch>
-        </p:blipFill>
-        <p:spPr>
-          <a:xfrm>
-            <a:off x="8974607" y="2057400"/>
-            <a:ext cx="2467279" cy="1645920"/>
-          </a:xfrm>
-          <a:prstGeom prst="rect">
-            <a:avLst/>
-          </a:prstGeom>
-        </p:spPr>
-      </p:pic>
-      <p:sp>
-        <p:nvSpPr>
-          <p:cNvPr id="23" name="TextBox 22"/>
-          <p:cNvSpPr txBox="1"/>
-          <p:nvPr/>
-        </p:nvSpPr>
-        <p:spPr>
-          <a:xfrm>
-            <a:off x="8974607" y="3904487"/>
-            <a:ext cx="2467279" cy="320040"/>
-          </a:xfrm>
-          <a:prstGeom prst="rect">
-            <a:avLst/>
-          </a:prstGeom>
-          <a:noFill/>
-        </p:spPr>
-        <p:txBody>
-          <a:bodyPr wrap="square" lIns="0" rIns="0" tIns="0" bIns="0" anchor="t">
-            <a:spAutoFit/>
-          </a:bodyPr>
-          <a:lstStyle/>
-          <a:p>
-            <a:pPr algn="l"/>
-            <a:r>
-              <a:rPr sz="1400" b="1" i="0">
-                <a:solidFill>
-                  <a:srgbClr val="ECE6DA"/>
-                </a:solidFill>
-                <a:latin typeface="Helvetica"/>
-              </a:rPr>
-              <a:t>Expiration notice.</a:t>
-            </a:r>
-          </a:p>
-        </p:txBody>
-      </p:sp>
-      <p:sp>
-        <p:nvSpPr>
-          <p:cNvPr id="24" name="TextBox 23"/>
-          <p:cNvSpPr txBox="1"/>
-          <p:nvPr/>
-        </p:nvSpPr>
-        <p:spPr>
-          <a:xfrm>
-            <a:off x="8974607" y="4251959"/>
-            <a:ext cx="2467279" cy="822960"/>
-          </a:xfrm>
-          <a:prstGeom prst="rect">
-            <a:avLst/>
-          </a:prstGeom>
-          <a:noFill/>
-        </p:spPr>
-        <p:txBody>
-          <a:bodyPr wrap="square" lIns="0" rIns="0" tIns="0" bIns="0" anchor="t">
-            <a:spAutoFit/>
-          </a:bodyPr>
-          <a:lstStyle/>
-          <a:p>
-            <a:pPr algn="l">
-              <a:lnSpc>
-                <a:spcPct val="120000"/>
-              </a:lnSpc>
-            </a:pPr>
-            <a:r>
-              <a:rPr sz="1100" b="0" i="0">
-                <a:solidFill>
-                  <a:srgbClr val="C7C0B2"/>
-                </a:solidFill>
-                <a:latin typeface="Helvetica"/>
-              </a:rPr>
-              <a:t>30 / 7 / 0-day warnings with a one-click renewal link.</a:t>
-            </a:r>
-          </a:p>
-        </p:txBody>
-      </p:sp>
-      <p:sp>
-        <p:nvSpPr>
-          <p:cNvPr id="25" name="TextBox 24"/>
-          <p:cNvSpPr txBox="1"/>
-          <p:nvPr/>
-        </p:nvSpPr>
-        <p:spPr>
-          <a:xfrm>
-            <a:off x="8974607" y="5047488"/>
-            <a:ext cx="2467279" cy="274320"/>
-          </a:xfrm>
-          <a:prstGeom prst="rect">
-            <a:avLst/>
-          </a:prstGeom>
-          <a:noFill/>
-        </p:spPr>
-        <p:txBody>
-          <a:bodyPr wrap="square" lIns="0" rIns="0" tIns="0" bIns="0" anchor="t">
-            <a:spAutoFit/>
-          </a:bodyPr>
-          <a:lstStyle/>
-          <a:p>
-            <a:pPr algn="l"/>
-            <a:r>
-              <a:rPr sz="900" b="0" i="1">
-                <a:solidFill>
-                  <a:srgbClr val="C99856"/>
-                </a:solidFill>
-                <a:latin typeface="Courier New"/>
-              </a:rPr>
-              <a:t>45 CFR §164.502(e)(1)(i)</a:t>
+              <a:t>src/lib/pdf/generator.ts  ·  AuditTrailPDF.tsx  ·  §164.312(b) evidence</a:t>
             </a:r>
           </a:p>
         </p:txBody>
@@ -4639,14 +4435,39 @@
                                 </p:cTn>
                               </p:par>
                               <p:par>
-                                <p:cTn id="24" presetID="10" presetClass="entr" presetSubtype="0" fill="hold" grpId="0" nodeType="withEffect">
+                                <p:cTn id="24" presetID="42" presetClass="path" presetSubtype="0" fill="hold" grpId="0" nodeType="withEffect">
                                   <p:stCondLst>
                                     <p:cond delay="700"/>
                                   </p:stCondLst>
                                   <p:childTnLst>
+                                    <p:animMotion origin="layout" path="M 0 0 L 0.0000 -0.0200 E" pathEditMode="relative" rAng="0" ptsTypes="">
+                                      <p:cBhvr>
+                                        <p:cTn id="25" dur="450" fill="hold" accel="50000" decel="50000">
+                                          <p:stCondLst>
+                                            <p:cond delay="0"/>
+                                          </p:stCondLst>
+                                        </p:cTn>
+                                        <p:tgtEl>
+                                          <p:spTgt spid="10"/>
+                                        </p:tgtEl>
+                                        <p:attrNameLst>
+                                          <p:attrName>ppt_x</p:attrName>
+                                          <p:attrName>ppt_y</p:attrName>
+                                        </p:attrNameLst>
+                                      </p:cBhvr>
+                                    </p:animMotion>
+                                  </p:childTnLst>
+                                </p:cTn>
+                              </p:par>
+                              <p:par>
+                                <p:cTn id="26" presetID="10" presetClass="entr" presetSubtype="0" fill="hold" grpId="0" nodeType="withEffect">
+                                  <p:stCondLst>
+                                    <p:cond delay="700"/>
+                                  </p:stCondLst>
+                                  <p:childTnLst>
                                     <p:set>
                                       <p:cBhvr>
-                                        <p:cTn id="25" dur="1" fill="hold">
+                                        <p:cTn id="27" dur="1" fill="hold">
                                           <p:stCondLst>
                                             <p:cond delay="0"/>
                                           </p:stCondLst>
@@ -4664,7 +4485,7 @@
                                     </p:set>
                                     <p:anim calcmode="lin" valueType="num">
                                       <p:cBhvr additive="base">
-                                        <p:cTn id="26" dur="450" fill="hold"/>
+                                        <p:cTn id="28" dur="450" fill="hold"/>
                                         <p:tgtEl>
                                           <p:spTgt spid="11"/>
                                         </p:tgtEl>
@@ -4689,14 +4510,39 @@
                                 </p:cTn>
                               </p:par>
                               <p:par>
-                                <p:cTn id="27" presetID="10" presetClass="entr" presetSubtype="0" fill="hold" grpId="0" nodeType="withEffect">
+                                <p:cTn id="29" presetID="42" presetClass="path" presetSubtype="0" fill="hold" grpId="0" nodeType="withEffect">
                                   <p:stCondLst>
                                     <p:cond delay="700"/>
                                   </p:stCondLst>
                                   <p:childTnLst>
+                                    <p:animMotion origin="layout" path="M 0 0 L 0.0000 -0.0200 E" pathEditMode="relative" rAng="0" ptsTypes="">
+                                      <p:cBhvr>
+                                        <p:cTn id="30" dur="450" fill="hold" accel="50000" decel="50000">
+                                          <p:stCondLst>
+                                            <p:cond delay="0"/>
+                                          </p:stCondLst>
+                                        </p:cTn>
+                                        <p:tgtEl>
+                                          <p:spTgt spid="11"/>
+                                        </p:tgtEl>
+                                        <p:attrNameLst>
+                                          <p:attrName>ppt_x</p:attrName>
+                                          <p:attrName>ppt_y</p:attrName>
+                                        </p:attrNameLst>
+                                      </p:cBhvr>
+                                    </p:animMotion>
+                                  </p:childTnLst>
+                                </p:cTn>
+                              </p:par>
+                              <p:par>
+                                <p:cTn id="31" presetID="10" presetClass="entr" presetSubtype="0" fill="hold" grpId="0" nodeType="withEffect">
+                                  <p:stCondLst>
+                                    <p:cond delay="700"/>
+                                  </p:stCondLst>
+                                  <p:childTnLst>
                                     <p:set>
                                       <p:cBhvr>
-                                        <p:cTn id="28" dur="1" fill="hold">
+                                        <p:cTn id="32" dur="1" fill="hold">
                                           <p:stCondLst>
                                             <p:cond delay="0"/>
                                           </p:stCondLst>
@@ -4714,7 +4560,7 @@
                                     </p:set>
                                     <p:anim calcmode="lin" valueType="num">
                                       <p:cBhvr additive="base">
-                                        <p:cTn id="29" dur="450" fill="hold"/>
+                                        <p:cTn id="33" dur="450" fill="hold"/>
                                         <p:tgtEl>
                                           <p:spTgt spid="12"/>
                                         </p:tgtEl>
@@ -4739,52 +4585,27 @@
                                 </p:cTn>
                               </p:par>
                               <p:par>
-                                <p:cTn id="30" presetID="10" presetClass="entr" presetSubtype="0" fill="hold" grpId="0" nodeType="withEffect">
+                                <p:cTn id="34" presetID="42" presetClass="path" presetSubtype="0" fill="hold" grpId="0" nodeType="withEffect">
                                   <p:stCondLst>
                                     <p:cond delay="700"/>
                                   </p:stCondLst>
                                   <p:childTnLst>
-                                    <p:set>
-                                      <p:cBhvr>
-                                        <p:cTn id="31" dur="1" fill="hold">
-                                          <p:stCondLst>
-                                            <p:cond delay="0"/>
-                                          </p:stCondLst>
-                                        </p:cTn>
-                                        <p:tgtEl>
-                                          <p:spTgt spid="13"/>
-                                        </p:tgtEl>
-                                        <p:attrNameLst>
-                                          <p:attrName>style.visibility</p:attrName>
-                                        </p:attrNameLst>
-                                      </p:cBhvr>
-                                      <p:to>
-                                        <p:strVal val="visible"/>
-                                      </p:to>
-                                    </p:set>
-                                    <p:anim calcmode="lin" valueType="num">
-                                      <p:cBhvr additive="base">
-                                        <p:cTn id="32" dur="450" fill="hold"/>
-                                        <p:tgtEl>
-                                          <p:spTgt spid="13"/>
-                                        </p:tgtEl>
-                                        <p:attrNameLst>
-                                          <p:attrName>style.opacity</p:attrName>
-                                        </p:attrNameLst>
-                                      </p:cBhvr>
-                                      <p:tavLst>
-                                        <p:tav tm="0">
-                                          <p:val>
-                                            <p:fltVal val="0"/>
-                                          </p:val>
-                                        </p:tav>
-                                        <p:tav tm="100000">
-                                          <p:val>
-                                            <p:fltVal val="1"/>
-                                          </p:val>
-                                        </p:tav>
-                                      </p:tavLst>
-                                    </p:anim>
+                                    <p:animMotion origin="layout" path="M 0 0 L 0.0000 -0.0200 E" pathEditMode="relative" rAng="0" ptsTypes="">
+                                      <p:cBhvr>
+                                        <p:cTn id="35" dur="450" fill="hold" accel="50000" decel="50000">
+                                          <p:stCondLst>
+                                            <p:cond delay="0"/>
+                                          </p:stCondLst>
+                                        </p:cTn>
+                                        <p:tgtEl>
+                                          <p:spTgt spid="12"/>
+                                        </p:tgtEl>
+                                        <p:attrNameLst>
+                                          <p:attrName>ppt_x</p:attrName>
+                                          <p:attrName>ppt_y</p:attrName>
+                                        </p:attrNameLst>
+                                      </p:cBhvr>
+                                    </p:animMotion>
                                   </p:childTnLst>
                                 </p:cTn>
                               </p:par>
@@ -4795,82 +4616,32 @@
                     </p:cTn>
                   </p:par>
                   <p:par>
-                    <p:cTn id="33" fill="hold">
+                    <p:cTn id="36" fill="hold">
                       <p:stCondLst>
                         <p:cond delay="indefinite"/>
                       </p:stCondLst>
                       <p:childTnLst>
                         <p:par>
-                          <p:cTn id="34" fill="hold">
+                          <p:cTn id="37" fill="hold">
                             <p:stCondLst>
                               <p:cond delay="0"/>
                             </p:stCondLst>
                             <p:childTnLst>
                               <p:par>
-                                <p:cTn id="35" presetID="10" presetClass="entr" presetSubtype="0" fill="hold" grpId="0" nodeType="clickEffect">
+                                <p:cTn id="38" presetID="10" presetClass="entr" presetSubtype="0" fill="hold" grpId="0" nodeType="clickEffect">
                                   <p:stCondLst>
                                     <p:cond delay="0"/>
                                   </p:stCondLst>
                                   <p:childTnLst>
                                     <p:set>
                                       <p:cBhvr>
-                                        <p:cTn id="36" dur="1" fill="hold">
-                                          <p:stCondLst>
-                                            <p:cond delay="0"/>
-                                          </p:stCondLst>
-                                        </p:cTn>
-                                        <p:tgtEl>
-                                          <p:spTgt spid="14"/>
-                                        </p:tgtEl>
-                                        <p:attrNameLst>
-                                          <p:attrName>style.visibility</p:attrName>
-                                        </p:attrNameLst>
-                                      </p:cBhvr>
-                                      <p:to>
-                                        <p:strVal val="visible"/>
-                                      </p:to>
-                                    </p:set>
-                                    <p:anim calcmode="lin" valueType="num">
-                                      <p:cBhvr additive="base">
-                                        <p:cTn id="37" dur="450" fill="hold"/>
-                                        <p:tgtEl>
-                                          <p:spTgt spid="14"/>
-                                        </p:tgtEl>
-                                        <p:attrNameLst>
-                                          <p:attrName>style.opacity</p:attrName>
-                                        </p:attrNameLst>
-                                      </p:cBhvr>
-                                      <p:tavLst>
-                                        <p:tav tm="0">
-                                          <p:val>
-                                            <p:fltVal val="0"/>
-                                          </p:val>
-                                        </p:tav>
-                                        <p:tav tm="100000">
-                                          <p:val>
-                                            <p:fltVal val="1"/>
-                                          </p:val>
-                                        </p:tav>
-                                      </p:tavLst>
-                                    </p:anim>
-                                  </p:childTnLst>
-                                </p:cTn>
-                              </p:par>
-                              <p:par>
-                                <p:cTn id="38" presetID="10" presetClass="entr" presetSubtype="0" fill="hold" grpId="0" nodeType="withEffect">
-                                  <p:stCondLst>
-                                    <p:cond delay="0"/>
-                                  </p:stCondLst>
-                                  <p:childTnLst>
-                                    <p:set>
-                                      <p:cBhvr>
                                         <p:cTn id="39" dur="1" fill="hold">
                                           <p:stCondLst>
                                             <p:cond delay="0"/>
                                           </p:stCondLst>
                                         </p:cTn>
                                         <p:tgtEl>
-                                          <p:spTgt spid="15"/>
+                                          <p:spTgt spid="13"/>
                                         </p:tgtEl>
                                         <p:attrNameLst>
                                           <p:attrName>style.visibility</p:attrName>
@@ -4884,7 +4655,7 @@
                                       <p:cBhvr additive="base">
                                         <p:cTn id="40" dur="450" fill="hold"/>
                                         <p:tgtEl>
-                                          <p:spTgt spid="15"/>
+                                          <p:spTgt spid="13"/>
                                         </p:tgtEl>
                                         <p:attrNameLst>
                                           <p:attrName>style.opacity</p:attrName>
@@ -4907,20 +4678,45 @@
                                 </p:cTn>
                               </p:par>
                               <p:par>
-                                <p:cTn id="41" presetID="10" presetClass="entr" presetSubtype="0" fill="hold" grpId="0" nodeType="withEffect">
+                                <p:cTn id="41" presetID="42" presetClass="path" presetSubtype="0" fill="hold" grpId="0" nodeType="withEffect">
                                   <p:stCondLst>
                                     <p:cond delay="0"/>
                                   </p:stCondLst>
                                   <p:childTnLst>
+                                    <p:animMotion origin="layout" path="M 0 0 L 0.0000 -0.0200 E" pathEditMode="relative" rAng="0" ptsTypes="">
+                                      <p:cBhvr>
+                                        <p:cTn id="42" dur="450" fill="hold" accel="50000" decel="50000">
+                                          <p:stCondLst>
+                                            <p:cond delay="0"/>
+                                          </p:stCondLst>
+                                        </p:cTn>
+                                        <p:tgtEl>
+                                          <p:spTgt spid="13"/>
+                                        </p:tgtEl>
+                                        <p:attrNameLst>
+                                          <p:attrName>ppt_x</p:attrName>
+                                          <p:attrName>ppt_y</p:attrName>
+                                        </p:attrNameLst>
+                                      </p:cBhvr>
+                                    </p:animMotion>
+                                  </p:childTnLst>
+                                </p:cTn>
+                              </p:par>
+                              <p:par>
+                                <p:cTn id="43" presetID="10" presetClass="entr" presetSubtype="0" fill="hold" grpId="0" nodeType="withEffect">
+                                  <p:stCondLst>
+                                    <p:cond delay="0"/>
+                                  </p:stCondLst>
+                                  <p:childTnLst>
                                     <p:set>
                                       <p:cBhvr>
-                                        <p:cTn id="42" dur="1" fill="hold">
-                                          <p:stCondLst>
-                                            <p:cond delay="0"/>
-                                          </p:stCondLst>
-                                        </p:cTn>
-                                        <p:tgtEl>
-                                          <p:spTgt spid="16"/>
+                                        <p:cTn id="44" dur="1" fill="hold">
+                                          <p:stCondLst>
+                                            <p:cond delay="0"/>
+                                          </p:stCondLst>
+                                        </p:cTn>
+                                        <p:tgtEl>
+                                          <p:spTgt spid="14"/>
                                         </p:tgtEl>
                                         <p:attrNameLst>
                                           <p:attrName>style.visibility</p:attrName>
@@ -4932,9 +4728,9 @@
                                     </p:set>
                                     <p:anim calcmode="lin" valueType="num">
                                       <p:cBhvr additive="base">
-                                        <p:cTn id="43" dur="450" fill="hold"/>
-                                        <p:tgtEl>
-                                          <p:spTgt spid="16"/>
+                                        <p:cTn id="45" dur="450" fill="hold"/>
+                                        <p:tgtEl>
+                                          <p:spTgt spid="14"/>
                                         </p:tgtEl>
                                         <p:attrNameLst>
                                           <p:attrName>style.opacity</p:attrName>
@@ -4957,20 +4753,45 @@
                                 </p:cTn>
                               </p:par>
                               <p:par>
-                                <p:cTn id="44" presetID="10" presetClass="entr" presetSubtype="0" fill="hold" grpId="0" nodeType="withEffect">
+                                <p:cTn id="46" presetID="42" presetClass="path" presetSubtype="0" fill="hold" grpId="0" nodeType="withEffect">
                                   <p:stCondLst>
                                     <p:cond delay="0"/>
                                   </p:stCondLst>
                                   <p:childTnLst>
+                                    <p:animMotion origin="layout" path="M 0 0 L 0.0000 -0.0200 E" pathEditMode="relative" rAng="0" ptsTypes="">
+                                      <p:cBhvr>
+                                        <p:cTn id="47" dur="450" fill="hold" accel="50000" decel="50000">
+                                          <p:stCondLst>
+                                            <p:cond delay="0"/>
+                                          </p:stCondLst>
+                                        </p:cTn>
+                                        <p:tgtEl>
+                                          <p:spTgt spid="14"/>
+                                        </p:tgtEl>
+                                        <p:attrNameLst>
+                                          <p:attrName>ppt_x</p:attrName>
+                                          <p:attrName>ppt_y</p:attrName>
+                                        </p:attrNameLst>
+                                      </p:cBhvr>
+                                    </p:animMotion>
+                                  </p:childTnLst>
+                                </p:cTn>
+                              </p:par>
+                              <p:par>
+                                <p:cTn id="48" presetID="10" presetClass="entr" presetSubtype="0" fill="hold" grpId="0" nodeType="withEffect">
+                                  <p:stCondLst>
+                                    <p:cond delay="0"/>
+                                  </p:stCondLst>
+                                  <p:childTnLst>
                                     <p:set>
                                       <p:cBhvr>
-                                        <p:cTn id="45" dur="1" fill="hold">
-                                          <p:stCondLst>
-                                            <p:cond delay="0"/>
-                                          </p:stCondLst>
-                                        </p:cTn>
-                                        <p:tgtEl>
-                                          <p:spTgt spid="17"/>
+                                        <p:cTn id="49" dur="1" fill="hold">
+                                          <p:stCondLst>
+                                            <p:cond delay="0"/>
+                                          </p:stCondLst>
+                                        </p:cTn>
+                                        <p:tgtEl>
+                                          <p:spTgt spid="15"/>
                                         </p:tgtEl>
                                         <p:attrNameLst>
                                           <p:attrName>style.visibility</p:attrName>
@@ -4982,9 +4803,9 @@
                                     </p:set>
                                     <p:anim calcmode="lin" valueType="num">
                                       <p:cBhvr additive="base">
-                                        <p:cTn id="46" dur="450" fill="hold"/>
-                                        <p:tgtEl>
-                                          <p:spTgt spid="17"/>
+                                        <p:cTn id="50" dur="450" fill="hold"/>
+                                        <p:tgtEl>
+                                          <p:spTgt spid="15"/>
                                         </p:tgtEl>
                                         <p:attrNameLst>
                                           <p:attrName>style.opacity</p:attrName>
@@ -5003,6 +4824,31 @@
                                         </p:tav>
                                       </p:tavLst>
                                     </p:anim>
+                                  </p:childTnLst>
+                                </p:cTn>
+                              </p:par>
+                              <p:par>
+                                <p:cTn id="51" presetID="42" presetClass="path" presetSubtype="0" fill="hold" grpId="0" nodeType="withEffect">
+                                  <p:stCondLst>
+                                    <p:cond delay="0"/>
+                                  </p:stCondLst>
+                                  <p:childTnLst>
+                                    <p:animMotion origin="layout" path="M 0 0 L 0.0000 -0.0200 E" pathEditMode="relative" rAng="0" ptsTypes="">
+                                      <p:cBhvr>
+                                        <p:cTn id="52" dur="450" fill="hold" accel="50000" decel="50000">
+                                          <p:stCondLst>
+                                            <p:cond delay="0"/>
+                                          </p:stCondLst>
+                                        </p:cTn>
+                                        <p:tgtEl>
+                                          <p:spTgt spid="15"/>
+                                        </p:tgtEl>
+                                        <p:attrNameLst>
+                                          <p:attrName>ppt_x</p:attrName>
+                                          <p:attrName>ppt_y</p:attrName>
+                                        </p:attrNameLst>
+                                      </p:cBhvr>
+                                    </p:animMotion>
                                   </p:childTnLst>
                                 </p:cTn>
                               </p:par>
@@ -5013,132 +4859,32 @@
                     </p:cTn>
                   </p:par>
                   <p:par>
-                    <p:cTn id="47" fill="hold">
+                    <p:cTn id="53" fill="hold">
                       <p:stCondLst>
                         <p:cond delay="indefinite"/>
                       </p:stCondLst>
                       <p:childTnLst>
                         <p:par>
-                          <p:cTn id="48" fill="hold">
+                          <p:cTn id="54" fill="hold">
                             <p:stCondLst>
                               <p:cond delay="0"/>
                             </p:stCondLst>
                             <p:childTnLst>
                               <p:par>
-                                <p:cTn id="49" presetID="10" presetClass="entr" presetSubtype="0" fill="hold" grpId="0" nodeType="clickEffect">
+                                <p:cTn id="55" presetID="10" presetClass="entr" presetSubtype="0" fill="hold" grpId="0" nodeType="clickEffect">
                                   <p:stCondLst>
                                     <p:cond delay="0"/>
                                   </p:stCondLst>
                                   <p:childTnLst>
                                     <p:set>
                                       <p:cBhvr>
-                                        <p:cTn id="50" dur="1" fill="hold">
-                                          <p:stCondLst>
-                                            <p:cond delay="0"/>
-                                          </p:stCondLst>
-                                        </p:cTn>
-                                        <p:tgtEl>
-                                          <p:spTgt spid="18"/>
-                                        </p:tgtEl>
-                                        <p:attrNameLst>
-                                          <p:attrName>style.visibility</p:attrName>
-                                        </p:attrNameLst>
-                                      </p:cBhvr>
-                                      <p:to>
-                                        <p:strVal val="visible"/>
-                                      </p:to>
-                                    </p:set>
-                                    <p:anim calcmode="lin" valueType="num">
-                                      <p:cBhvr additive="base">
-                                        <p:cTn id="51" dur="450" fill="hold"/>
-                                        <p:tgtEl>
-                                          <p:spTgt spid="18"/>
-                                        </p:tgtEl>
-                                        <p:attrNameLst>
-                                          <p:attrName>style.opacity</p:attrName>
-                                        </p:attrNameLst>
-                                      </p:cBhvr>
-                                      <p:tavLst>
-                                        <p:tav tm="0">
-                                          <p:val>
-                                            <p:fltVal val="0"/>
-                                          </p:val>
-                                        </p:tav>
-                                        <p:tav tm="100000">
-                                          <p:val>
-                                            <p:fltVal val="1"/>
-                                          </p:val>
-                                        </p:tav>
-                                      </p:tavLst>
-                                    </p:anim>
-                                  </p:childTnLst>
-                                </p:cTn>
-                              </p:par>
-                              <p:par>
-                                <p:cTn id="52" presetID="10" presetClass="entr" presetSubtype="0" fill="hold" grpId="0" nodeType="withEffect">
-                                  <p:stCondLst>
-                                    <p:cond delay="0"/>
-                                  </p:stCondLst>
-                                  <p:childTnLst>
-                                    <p:set>
-                                      <p:cBhvr>
-                                        <p:cTn id="53" dur="1" fill="hold">
-                                          <p:stCondLst>
-                                            <p:cond delay="0"/>
-                                          </p:stCondLst>
-                                        </p:cTn>
-                                        <p:tgtEl>
-                                          <p:spTgt spid="19"/>
-                                        </p:tgtEl>
-                                        <p:attrNameLst>
-                                          <p:attrName>style.visibility</p:attrName>
-                                        </p:attrNameLst>
-                                      </p:cBhvr>
-                                      <p:to>
-                                        <p:strVal val="visible"/>
-                                      </p:to>
-                                    </p:set>
-                                    <p:anim calcmode="lin" valueType="num">
-                                      <p:cBhvr additive="base">
-                                        <p:cTn id="54" dur="450" fill="hold"/>
-                                        <p:tgtEl>
-                                          <p:spTgt spid="19"/>
-                                        </p:tgtEl>
-                                        <p:attrNameLst>
-                                          <p:attrName>style.opacity</p:attrName>
-                                        </p:attrNameLst>
-                                      </p:cBhvr>
-                                      <p:tavLst>
-                                        <p:tav tm="0">
-                                          <p:val>
-                                            <p:fltVal val="0"/>
-                                          </p:val>
-                                        </p:tav>
-                                        <p:tav tm="100000">
-                                          <p:val>
-                                            <p:fltVal val="1"/>
-                                          </p:val>
-                                        </p:tav>
-                                      </p:tavLst>
-                                    </p:anim>
-                                  </p:childTnLst>
-                                </p:cTn>
-                              </p:par>
-                              <p:par>
-                                <p:cTn id="55" presetID="10" presetClass="entr" presetSubtype="0" fill="hold" grpId="0" nodeType="withEffect">
-                                  <p:stCondLst>
-                                    <p:cond delay="0"/>
-                                  </p:stCondLst>
-                                  <p:childTnLst>
-                                    <p:set>
-                                      <p:cBhvr>
                                         <p:cTn id="56" dur="1" fill="hold">
                                           <p:stCondLst>
                                             <p:cond delay="0"/>
                                           </p:stCondLst>
                                         </p:cTn>
                                         <p:tgtEl>
-                                          <p:spTgt spid="20"/>
+                                          <p:spTgt spid="16"/>
                                         </p:tgtEl>
                                         <p:attrNameLst>
                                           <p:attrName>style.visibility</p:attrName>
@@ -5152,7 +4898,7 @@
                                       <p:cBhvr additive="base">
                                         <p:cTn id="57" dur="450" fill="hold"/>
                                         <p:tgtEl>
-                                          <p:spTgt spid="20"/>
+                                          <p:spTgt spid="16"/>
                                         </p:tgtEl>
                                         <p:attrNameLst>
                                           <p:attrName>style.opacity</p:attrName>
@@ -5175,20 +4921,45 @@
                                 </p:cTn>
                               </p:par>
                               <p:par>
-                                <p:cTn id="58" presetID="10" presetClass="entr" presetSubtype="0" fill="hold" grpId="0" nodeType="withEffect">
+                                <p:cTn id="58" presetID="42" presetClass="path" presetSubtype="0" fill="hold" grpId="0" nodeType="withEffect">
                                   <p:stCondLst>
                                     <p:cond delay="0"/>
                                   </p:stCondLst>
                                   <p:childTnLst>
+                                    <p:animMotion origin="layout" path="M 0 0 L 0.0000 -0.0200 E" pathEditMode="relative" rAng="0" ptsTypes="">
+                                      <p:cBhvr>
+                                        <p:cTn id="59" dur="450" fill="hold" accel="50000" decel="50000">
+                                          <p:stCondLst>
+                                            <p:cond delay="0"/>
+                                          </p:stCondLst>
+                                        </p:cTn>
+                                        <p:tgtEl>
+                                          <p:spTgt spid="16"/>
+                                        </p:tgtEl>
+                                        <p:attrNameLst>
+                                          <p:attrName>ppt_x</p:attrName>
+                                          <p:attrName>ppt_y</p:attrName>
+                                        </p:attrNameLst>
+                                      </p:cBhvr>
+                                    </p:animMotion>
+                                  </p:childTnLst>
+                                </p:cTn>
+                              </p:par>
+                              <p:par>
+                                <p:cTn id="60" presetID="10" presetClass="entr" presetSubtype="0" fill="hold" grpId="0" nodeType="withEffect">
+                                  <p:stCondLst>
+                                    <p:cond delay="0"/>
+                                  </p:stCondLst>
+                                  <p:childTnLst>
                                     <p:set>
                                       <p:cBhvr>
-                                        <p:cTn id="59" dur="1" fill="hold">
-                                          <p:stCondLst>
-                                            <p:cond delay="0"/>
-                                          </p:stCondLst>
-                                        </p:cTn>
-                                        <p:tgtEl>
-                                          <p:spTgt spid="21"/>
+                                        <p:cTn id="61" dur="1" fill="hold">
+                                          <p:stCondLst>
+                                            <p:cond delay="0"/>
+                                          </p:stCondLst>
+                                        </p:cTn>
+                                        <p:tgtEl>
+                                          <p:spTgt spid="17"/>
                                         </p:tgtEl>
                                         <p:attrNameLst>
                                           <p:attrName>style.visibility</p:attrName>
@@ -5200,9 +4971,9 @@
                                     </p:set>
                                     <p:anim calcmode="lin" valueType="num">
                                       <p:cBhvr additive="base">
-                                        <p:cTn id="60" dur="450" fill="hold"/>
-                                        <p:tgtEl>
-                                          <p:spTgt spid="21"/>
+                                        <p:cTn id="62" dur="450" fill="hold"/>
+                                        <p:tgtEl>
+                                          <p:spTgt spid="17"/>
                                         </p:tgtEl>
                                         <p:attrNameLst>
                                           <p:attrName>style.opacity</p:attrName>
@@ -5224,39 +4995,46 @@
                                   </p:childTnLst>
                                 </p:cTn>
                               </p:par>
-                            </p:childTnLst>
-                          </p:cTn>
-                        </p:par>
-                      </p:childTnLst>
-                    </p:cTn>
-                  </p:par>
-                  <p:par>
-                    <p:cTn id="61" fill="hold">
-                      <p:stCondLst>
-                        <p:cond delay="indefinite"/>
-                      </p:stCondLst>
-                      <p:childTnLst>
-                        <p:par>
-                          <p:cTn id="62" fill="hold">
-                            <p:stCondLst>
-                              <p:cond delay="0"/>
-                            </p:stCondLst>
-                            <p:childTnLst>
-                              <p:par>
-                                <p:cTn id="63" presetID="10" presetClass="entr" presetSubtype="0" fill="hold" grpId="0" nodeType="clickEffect">
+                              <p:par>
+                                <p:cTn id="63" presetID="42" presetClass="path" presetSubtype="0" fill="hold" grpId="0" nodeType="withEffect">
                                   <p:stCondLst>
                                     <p:cond delay="0"/>
                                   </p:stCondLst>
                                   <p:childTnLst>
+                                    <p:animMotion origin="layout" path="M 0 0 L 0.0000 -0.0200 E" pathEditMode="relative" rAng="0" ptsTypes="">
+                                      <p:cBhvr>
+                                        <p:cTn id="64" dur="450" fill="hold" accel="50000" decel="50000">
+                                          <p:stCondLst>
+                                            <p:cond delay="0"/>
+                                          </p:stCondLst>
+                                        </p:cTn>
+                                        <p:tgtEl>
+                                          <p:spTgt spid="17"/>
+                                        </p:tgtEl>
+                                        <p:attrNameLst>
+                                          <p:attrName>ppt_x</p:attrName>
+                                          <p:attrName>ppt_y</p:attrName>
+                                        </p:attrNameLst>
+                                      </p:cBhvr>
+                                    </p:animMotion>
+                                  </p:childTnLst>
+                                </p:cTn>
+                              </p:par>
+                              <p:par>
+                                <p:cTn id="65" presetID="10" presetClass="entr" presetSubtype="0" fill="hold" grpId="0" nodeType="withEffect">
+                                  <p:stCondLst>
+                                    <p:cond delay="0"/>
+                                  </p:stCondLst>
+                                  <p:childTnLst>
                                     <p:set>
                                       <p:cBhvr>
-                                        <p:cTn id="64" dur="1" fill="hold">
-                                          <p:stCondLst>
-                                            <p:cond delay="0"/>
-                                          </p:stCondLst>
-                                        </p:cTn>
-                                        <p:tgtEl>
-                                          <p:spTgt spid="22"/>
+                                        <p:cTn id="66" dur="1" fill="hold">
+                                          <p:stCondLst>
+                                            <p:cond delay="0"/>
+                                          </p:stCondLst>
+                                        </p:cTn>
+                                        <p:tgtEl>
+                                          <p:spTgt spid="18"/>
                                         </p:tgtEl>
                                         <p:attrNameLst>
                                           <p:attrName>style.visibility</p:attrName>
@@ -5268,9 +5046,9 @@
                                     </p:set>
                                     <p:anim calcmode="lin" valueType="num">
                                       <p:cBhvr additive="base">
-                                        <p:cTn id="65" dur="450" fill="hold"/>
-                                        <p:tgtEl>
-                                          <p:spTgt spid="22"/>
+                                        <p:cTn id="67" dur="450" fill="hold"/>
+                                        <p:tgtEl>
+                                          <p:spTgt spid="18"/>
                                         </p:tgtEl>
                                         <p:attrNameLst>
                                           <p:attrName>style.opacity</p:attrName>
@@ -5293,152 +5071,27 @@
                                 </p:cTn>
                               </p:par>
                               <p:par>
-                                <p:cTn id="66" presetID="10" presetClass="entr" presetSubtype="0" fill="hold" grpId="0" nodeType="withEffect">
+                                <p:cTn id="68" presetID="42" presetClass="path" presetSubtype="0" fill="hold" grpId="0" nodeType="withEffect">
                                   <p:stCondLst>
                                     <p:cond delay="0"/>
                                   </p:stCondLst>
                                   <p:childTnLst>
-                                    <p:set>
-                                      <p:cBhvr>
-                                        <p:cTn id="67" dur="1" fill="hold">
-                                          <p:stCondLst>
-                                            <p:cond delay="0"/>
-                                          </p:stCondLst>
-                                        </p:cTn>
-                                        <p:tgtEl>
-                                          <p:spTgt spid="23"/>
-                                        </p:tgtEl>
-                                        <p:attrNameLst>
-                                          <p:attrName>style.visibility</p:attrName>
-                                        </p:attrNameLst>
-                                      </p:cBhvr>
-                                      <p:to>
-                                        <p:strVal val="visible"/>
-                                      </p:to>
-                                    </p:set>
-                                    <p:anim calcmode="lin" valueType="num">
-                                      <p:cBhvr additive="base">
-                                        <p:cTn id="68" dur="450" fill="hold"/>
-                                        <p:tgtEl>
-                                          <p:spTgt spid="23"/>
-                                        </p:tgtEl>
-                                        <p:attrNameLst>
-                                          <p:attrName>style.opacity</p:attrName>
-                                        </p:attrNameLst>
-                                      </p:cBhvr>
-                                      <p:tavLst>
-                                        <p:tav tm="0">
-                                          <p:val>
-                                            <p:fltVal val="0"/>
-                                          </p:val>
-                                        </p:tav>
-                                        <p:tav tm="100000">
-                                          <p:val>
-                                            <p:fltVal val="1"/>
-                                          </p:val>
-                                        </p:tav>
-                                      </p:tavLst>
-                                    </p:anim>
-                                  </p:childTnLst>
-                                </p:cTn>
-                              </p:par>
-                              <p:par>
-                                <p:cTn id="69" presetID="10" presetClass="entr" presetSubtype="0" fill="hold" grpId="0" nodeType="withEffect">
-                                  <p:stCondLst>
-                                    <p:cond delay="0"/>
-                                  </p:stCondLst>
-                                  <p:childTnLst>
-                                    <p:set>
-                                      <p:cBhvr>
-                                        <p:cTn id="70" dur="1" fill="hold">
-                                          <p:stCondLst>
-                                            <p:cond delay="0"/>
-                                          </p:stCondLst>
-                                        </p:cTn>
-                                        <p:tgtEl>
-                                          <p:spTgt spid="24"/>
-                                        </p:tgtEl>
-                                        <p:attrNameLst>
-                                          <p:attrName>style.visibility</p:attrName>
-                                        </p:attrNameLst>
-                                      </p:cBhvr>
-                                      <p:to>
-                                        <p:strVal val="visible"/>
-                                      </p:to>
-                                    </p:set>
-                                    <p:anim calcmode="lin" valueType="num">
-                                      <p:cBhvr additive="base">
-                                        <p:cTn id="71" dur="450" fill="hold"/>
-                                        <p:tgtEl>
-                                          <p:spTgt spid="24"/>
-                                        </p:tgtEl>
-                                        <p:attrNameLst>
-                                          <p:attrName>style.opacity</p:attrName>
-                                        </p:attrNameLst>
-                                      </p:cBhvr>
-                                      <p:tavLst>
-                                        <p:tav tm="0">
-                                          <p:val>
-                                            <p:fltVal val="0"/>
-                                          </p:val>
-                                        </p:tav>
-                                        <p:tav tm="100000">
-                                          <p:val>
-                                            <p:fltVal val="1"/>
-                                          </p:val>
-                                        </p:tav>
-                                      </p:tavLst>
-                                    </p:anim>
-                                  </p:childTnLst>
-                                </p:cTn>
-                              </p:par>
-                              <p:par>
-                                <p:cTn id="72" presetID="10" presetClass="entr" presetSubtype="0" fill="hold" grpId="0" nodeType="withEffect">
-                                  <p:stCondLst>
-                                    <p:cond delay="0"/>
-                                  </p:stCondLst>
-                                  <p:childTnLst>
-                                    <p:set>
-                                      <p:cBhvr>
-                                        <p:cTn id="73" dur="1" fill="hold">
-                                          <p:stCondLst>
-                                            <p:cond delay="0"/>
-                                          </p:stCondLst>
-                                        </p:cTn>
-                                        <p:tgtEl>
-                                          <p:spTgt spid="25"/>
-                                        </p:tgtEl>
-                                        <p:attrNameLst>
-                                          <p:attrName>style.visibility</p:attrName>
-                                        </p:attrNameLst>
-                                      </p:cBhvr>
-                                      <p:to>
-                                        <p:strVal val="visible"/>
-                                      </p:to>
-                                    </p:set>
-                                    <p:anim calcmode="lin" valueType="num">
-                                      <p:cBhvr additive="base">
-                                        <p:cTn id="74" dur="450" fill="hold"/>
-                                        <p:tgtEl>
-                                          <p:spTgt spid="25"/>
-                                        </p:tgtEl>
-                                        <p:attrNameLst>
-                                          <p:attrName>style.opacity</p:attrName>
-                                        </p:attrNameLst>
-                                      </p:cBhvr>
-                                      <p:tavLst>
-                                        <p:tav tm="0">
-                                          <p:val>
-                                            <p:fltVal val="0"/>
-                                          </p:val>
-                                        </p:tav>
-                                        <p:tav tm="100000">
-                                          <p:val>
-                                            <p:fltVal val="1"/>
-                                          </p:val>
-                                        </p:tav>
-                                      </p:tavLst>
-                                    </p:anim>
+                                    <p:animMotion origin="layout" path="M 0 0 L 0.0000 -0.0200 E" pathEditMode="relative" rAng="0" ptsTypes="">
+                                      <p:cBhvr>
+                                        <p:cTn id="69" dur="450" fill="hold" accel="50000" decel="50000">
+                                          <p:stCondLst>
+                                            <p:cond delay="0"/>
+                                          </p:stCondLst>
+                                        </p:cTn>
+                                        <p:tgtEl>
+                                          <p:spTgt spid="18"/>
+                                        </p:tgtEl>
+                                        <p:attrNameLst>
+                                          <p:attrName>ppt_x</p:attrName>
+                                          <p:attrName>ppt_y</p:attrName>
+                                        </p:attrNameLst>
+                                      </p:cBhvr>
+                                    </p:animMotion>
                                   </p:childTnLst>
                                 </p:cTn>
                               </p:par>
@@ -5600,7 +5253,7 @@
                 </a:solidFill>
                 <a:latin typeface="Courier New"/>
               </a:rPr>
-              <a:t>11 / 14</a:t>
+              <a:t>11 / 15</a:t>
             </a:r>
           </a:p>
         </p:txBody>
@@ -5635,7 +5288,7 @@
                 </a:solidFill>
                 <a:latin typeface="Georgia"/>
               </a:rPr>
-              <a:t>Matrix</a:t>
+              <a:t>Reminders</a:t>
             </a:r>
           </a:p>
         </p:txBody>
@@ -5714,7 +5367,7 @@
                 </a:solidFill>
                 <a:latin typeface="Helvetica"/>
               </a:rPr>
-              <a:t>Every BAA clause is mapped to the regulation it satisfies — on the record, on the page.</a:t>
+              <a:t>Every status change sends a purpose-built email — and every email stays inside the AWS BAA perimeter.</a:t>
             </a:r>
           </a:p>
         </p:txBody>
@@ -5793,21 +5446,45 @@
                 </a:solidFill>
                 <a:latin typeface="Helvetica"/>
               </a:rPr>
-              <a:t>Every BAA clause is mapped to the regulation it satisfies — on the record, on the page.</a:t>
+              <a:t>Every status change sends a purpose-built email — and every email stays inside the AWS BAA perimeter.</a:t>
             </a:r>
           </a:p>
         </p:txBody>
       </p:sp>
-      <p:sp>
-        <p:nvSpPr>
-          <p:cNvPr id="10" name="TextBox 9"/>
+      <p:pic>
+        <p:nvPicPr>
+          <p:cNvPr id="10" name="Picture 9" descr="verification_code.png"/>
+          <p:cNvPicPr>
+            <a:picLocks noChangeAspect="1"/>
+          </p:cNvPicPr>
+          <p:nvPr/>
+        </p:nvPicPr>
+        <p:blipFill>
+          <a:blip r:embed="rId2"/>
+          <a:stretch>
+            <a:fillRect/>
+          </a:stretch>
+        </p:blipFill>
+        <p:spPr>
+          <a:xfrm>
+            <a:off x="749808" y="2057400"/>
+            <a:ext cx="2467279" cy="1645920"/>
+          </a:xfrm>
+          <a:prstGeom prst="rect">
+            <a:avLst/>
+          </a:prstGeom>
+        </p:spPr>
+      </p:pic>
+      <p:sp>
+        <p:nvSpPr>
+          <p:cNvPr id="11" name="TextBox 10"/>
           <p:cNvSpPr txBox="1"/>
           <p:nvPr/>
         </p:nvSpPr>
         <p:spPr>
           <a:xfrm>
-            <a:off x="749808" y="1828800"/>
-            <a:ext cx="4937760" cy="411480"/>
+            <a:off x="749808" y="3904487"/>
+            <a:ext cx="2467279" cy="320040"/>
           </a:xfrm>
           <a:prstGeom prst="rect">
             <a:avLst/>
@@ -5822,27 +5499,27 @@
           <a:p>
             <a:pPr algn="l"/>
             <a:r>
-              <a:rPr sz="2200" b="1" i="0">
+              <a:rPr sz="1400" b="1" i="0">
                 <a:solidFill>
                   <a:srgbClr val="ECE6DA"/>
                 </a:solidFill>
                 <a:latin typeface="Helvetica"/>
               </a:rPr>
-              <a:t>45 CFR §164.504(e)(2).</a:t>
+              <a:t>Verification code.</a:t>
             </a:r>
           </a:p>
         </p:txBody>
       </p:sp>
       <p:sp>
         <p:nvSpPr>
-          <p:cNvPr id="11" name="TextBox 10"/>
+          <p:cNvPr id="12" name="TextBox 11"/>
           <p:cNvSpPr txBox="1"/>
           <p:nvPr/>
         </p:nvSpPr>
         <p:spPr>
           <a:xfrm>
-            <a:off x="749808" y="2286000"/>
-            <a:ext cx="4937760" cy="548640"/>
+            <a:off x="749808" y="4251959"/>
+            <a:ext cx="2467279" cy="822960"/>
           </a:xfrm>
           <a:prstGeom prst="rect">
             <a:avLst/>
@@ -5857,31 +5534,31 @@
           <a:p>
             <a:pPr algn="l">
               <a:lnSpc>
-                <a:spcPct val="125000"/>
+                <a:spcPct val="120000"/>
               </a:lnSpc>
             </a:pPr>
             <a:r>
-              <a:rPr sz="1300" b="0" i="0">
+              <a:rPr sz="1100" b="0" i="0">
                 <a:solidFill>
                   <a:srgbClr val="C7C0B2"/>
                 </a:solidFill>
                 <a:latin typeface="Helvetica"/>
               </a:rPr>
-              <a:t>The required-elements checklist, mapped section by section.</a:t>
+              <a:t>10-minute OTP sent to the signer's registered email.</a:t>
             </a:r>
           </a:p>
         </p:txBody>
       </p:sp>
       <p:sp>
         <p:nvSpPr>
-          <p:cNvPr id="12" name="TextBox 11"/>
+          <p:cNvPr id="13" name="TextBox 12"/>
           <p:cNvSpPr txBox="1"/>
           <p:nvPr/>
         </p:nvSpPr>
         <p:spPr>
           <a:xfrm>
-            <a:off x="749808" y="2761488"/>
-            <a:ext cx="4937760" cy="274320"/>
+            <a:off x="749808" y="5047488"/>
+            <a:ext cx="2467279" cy="274320"/>
           </a:xfrm>
           <a:prstGeom prst="rect">
             <a:avLst/>
@@ -5896,27 +5573,51 @@
           <a:p>
             <a:pPr algn="l"/>
             <a:r>
-              <a:rPr sz="1000" b="0" i="1">
+              <a:rPr sz="900" b="0" i="1">
                 <a:solidFill>
                   <a:srgbClr val="C99856"/>
                 </a:solidFill>
                 <a:latin typeface="Courier New"/>
               </a:rPr>
-              <a:t>src/lib/baa/cfrMappings.ts</a:t>
+              <a:t>ESIGN §7001(c) — attribution</a:t>
             </a:r>
           </a:p>
         </p:txBody>
       </p:sp>
-      <p:sp>
-        <p:nvSpPr>
-          <p:cNvPr id="13" name="TextBox 12"/>
+      <p:pic>
+        <p:nvPicPr>
+          <p:cNvPr id="14" name="Picture 13" descr="signature_reminder.png"/>
+          <p:cNvPicPr>
+            <a:picLocks noChangeAspect="1"/>
+          </p:cNvPicPr>
+          <p:nvPr/>
+        </p:nvPicPr>
+        <p:blipFill>
+          <a:blip r:embed="rId3"/>
+          <a:stretch>
+            <a:fillRect/>
+          </a:stretch>
+        </p:blipFill>
+        <p:spPr>
+          <a:xfrm>
+            <a:off x="3491407" y="2057400"/>
+            <a:ext cx="2467279" cy="1645920"/>
+          </a:xfrm>
+          <a:prstGeom prst="rect">
+            <a:avLst/>
+          </a:prstGeom>
+        </p:spPr>
+      </p:pic>
+      <p:sp>
+        <p:nvSpPr>
+          <p:cNvPr id="15" name="TextBox 14"/>
           <p:cNvSpPr txBox="1"/>
           <p:nvPr/>
         </p:nvSpPr>
         <p:spPr>
           <a:xfrm>
-            <a:off x="6504127" y="2148840"/>
-            <a:ext cx="4937760" cy="411480"/>
+            <a:off x="3491407" y="3904487"/>
+            <a:ext cx="2467279" cy="320040"/>
           </a:xfrm>
           <a:prstGeom prst="rect">
             <a:avLst/>
@@ -5929,29 +5630,29 @@
           </a:bodyPr>
           <a:lstStyle/>
           <a:p>
-            <a:pPr algn="r"/>
+            <a:pPr algn="l"/>
             <a:r>
-              <a:rPr sz="2200" b="1" i="0">
+              <a:rPr sz="1400" b="1" i="0">
                 <a:solidFill>
                   <a:srgbClr val="ECE6DA"/>
                 </a:solidFill>
                 <a:latin typeface="Helvetica"/>
               </a:rPr>
-              <a:t>MSDH sections.</a:t>
+              <a:t>Signature reminder.</a:t>
             </a:r>
           </a:p>
         </p:txBody>
       </p:sp>
       <p:sp>
         <p:nvSpPr>
-          <p:cNvPr id="14" name="TextBox 13"/>
+          <p:cNvPr id="16" name="TextBox 15"/>
           <p:cNvSpPr txBox="1"/>
           <p:nvPr/>
         </p:nvSpPr>
         <p:spPr>
           <a:xfrm>
-            <a:off x="6504127" y="2606040"/>
-            <a:ext cx="4937760" cy="548640"/>
+            <a:off x="3491407" y="4251959"/>
+            <a:ext cx="2467279" cy="822960"/>
           </a:xfrm>
           <a:prstGeom prst="rect">
             <a:avLst/>
@@ -5964,33 +5665,33 @@
           </a:bodyPr>
           <a:lstStyle/>
           <a:p>
-            <a:pPr algn="r">
+            <a:pPr algn="l">
               <a:lnSpc>
-                <a:spcPct val="125000"/>
+                <a:spcPct val="120000"/>
               </a:lnSpc>
             </a:pPr>
             <a:r>
-              <a:rPr sz="1300" b="0" i="0">
+              <a:rPr sz="1100" b="0" i="0">
                 <a:solidFill>
                   <a:srgbClr val="C7C0B2"/>
                 </a:solidFill>
                 <a:latin typeface="Helvetica"/>
               </a:rPr>
-              <a:t>Mississippi-specific provisions cross-walked against state requirements.</a:t>
+              <a:t>Automatic nudges at 7 / 14 / 29 days since invitation.</a:t>
             </a:r>
           </a:p>
         </p:txBody>
       </p:sp>
       <p:sp>
         <p:nvSpPr>
-          <p:cNvPr id="15" name="TextBox 14"/>
+          <p:cNvPr id="17" name="TextBox 16"/>
           <p:cNvSpPr txBox="1"/>
           <p:nvPr/>
         </p:nvSpPr>
         <p:spPr>
           <a:xfrm>
-            <a:off x="6504127" y="3081528"/>
-            <a:ext cx="4937760" cy="274320"/>
+            <a:off x="3491407" y="5047488"/>
+            <a:ext cx="2467279" cy="274320"/>
           </a:xfrm>
           <a:prstGeom prst="rect">
             <a:avLst/>
@@ -6003,29 +5704,53 @@
           </a:bodyPr>
           <a:lstStyle/>
           <a:p>
-            <a:pPr algn="r"/>
+            <a:pPr algn="l"/>
             <a:r>
-              <a:rPr sz="1000" b="0" i="1">
+              <a:rPr sz="900" b="0" i="1">
                 <a:solidFill>
                   <a:srgbClr val="C99856"/>
                 </a:solidFill>
                 <a:latin typeface="Courier New"/>
               </a:rPr>
-              <a:t>Compliance Matrix PDF — generated per BAA</a:t>
+              <a:t>src/lib/reminders/policy.ts</a:t>
             </a:r>
           </a:p>
         </p:txBody>
       </p:sp>
-      <p:sp>
-        <p:nvSpPr>
-          <p:cNvPr id="16" name="TextBox 15"/>
+      <p:pic>
+        <p:nvPicPr>
+          <p:cNvPr id="18" name="Picture 17" descr="executed_confirmation.png"/>
+          <p:cNvPicPr>
+            <a:picLocks noChangeAspect="1"/>
+          </p:cNvPicPr>
+          <p:nvPr/>
+        </p:nvPicPr>
+        <p:blipFill>
+          <a:blip r:embed="rId4"/>
+          <a:stretch>
+            <a:fillRect/>
+          </a:stretch>
+        </p:blipFill>
+        <p:spPr>
+          <a:xfrm>
+            <a:off x="6233007" y="2057400"/>
+            <a:ext cx="2467279" cy="1645920"/>
+          </a:xfrm>
+          <a:prstGeom prst="rect">
+            <a:avLst/>
+          </a:prstGeom>
+        </p:spPr>
+      </p:pic>
+      <p:sp>
+        <p:nvSpPr>
+          <p:cNvPr id="19" name="TextBox 18"/>
           <p:cNvSpPr txBox="1"/>
           <p:nvPr/>
         </p:nvSpPr>
         <p:spPr>
           <a:xfrm>
-            <a:off x="749808" y="3429000"/>
-            <a:ext cx="4937760" cy="411480"/>
+            <a:off x="6233007" y="3904487"/>
+            <a:ext cx="2467279" cy="320040"/>
           </a:xfrm>
           <a:prstGeom prst="rect">
             <a:avLst/>
@@ -6040,27 +5765,27 @@
           <a:p>
             <a:pPr algn="l"/>
             <a:r>
-              <a:rPr sz="2200" b="1" i="0">
+              <a:rPr sz="1400" b="1" i="0">
                 <a:solidFill>
                   <a:srgbClr val="ECE6DA"/>
                 </a:solidFill>
                 <a:latin typeface="Helvetica"/>
               </a:rPr>
-              <a:t>Evidence on demand.</a:t>
+              <a:t>Executed confirmation.</a:t>
             </a:r>
           </a:p>
         </p:txBody>
       </p:sp>
       <p:sp>
         <p:nvSpPr>
-          <p:cNvPr id="17" name="TextBox 16"/>
+          <p:cNvPr id="20" name="TextBox 19"/>
           <p:cNvSpPr txBox="1"/>
           <p:nvPr/>
         </p:nvSpPr>
         <p:spPr>
           <a:xfrm>
-            <a:off x="749808" y="3886200"/>
-            <a:ext cx="4937760" cy="548640"/>
+            <a:off x="6233007" y="4251959"/>
+            <a:ext cx="2467279" cy="822960"/>
           </a:xfrm>
           <a:prstGeom prst="rect">
             <a:avLst/>
@@ -6075,31 +5800,31 @@
           <a:p>
             <a:pPr algn="l">
               <a:lnSpc>
-                <a:spcPct val="125000"/>
+                <a:spcPct val="120000"/>
               </a:lnSpc>
             </a:pPr>
             <a:r>
-              <a:rPr sz="1300" b="0" i="0">
+              <a:rPr sz="1100" b="0" i="0">
                 <a:solidFill>
                   <a:srgbClr val="C7C0B2"/>
                 </a:solidFill>
                 <a:latin typeface="Helvetica"/>
               </a:rPr>
-              <a:t>One export — ready for OCR, the state health department, or a prospect's security review.</a:t>
+              <a:t>Delivered to both parties when the clinic counter-signs.</a:t>
             </a:r>
           </a:p>
         </p:txBody>
       </p:sp>
       <p:sp>
         <p:nvSpPr>
-          <p:cNvPr id="18" name="TextBox 17"/>
+          <p:cNvPr id="21" name="TextBox 20"/>
           <p:cNvSpPr txBox="1"/>
           <p:nvPr/>
         </p:nvSpPr>
         <p:spPr>
           <a:xfrm>
-            <a:off x="749808" y="4361688"/>
-            <a:ext cx="4937760" cy="274320"/>
+            <a:off x="6233007" y="5047488"/>
+            <a:ext cx="2467279" cy="274320"/>
           </a:xfrm>
           <a:prstGeom prst="rect">
             <a:avLst/>
@@ -6114,13 +5839,146 @@
           <a:p>
             <a:pPr algn="l"/>
             <a:r>
-              <a:rPr sz="1000" b="0" i="1">
+              <a:rPr sz="900" b="0" i="1">
                 <a:solidFill>
                   <a:srgbClr val="C99856"/>
                 </a:solidFill>
                 <a:latin typeface="Courier New"/>
               </a:rPr>
-              <a:t>src/lib/pdf/ComplianceMatrixPDF.tsx</a:t>
+              <a:t>45 CFR §164.504(e) — fully executed</a:t>
+            </a:r>
+          </a:p>
+        </p:txBody>
+      </p:sp>
+      <p:pic>
+        <p:nvPicPr>
+          <p:cNvPr id="22" name="Picture 21" descr="expiration_notice.png"/>
+          <p:cNvPicPr>
+            <a:picLocks noChangeAspect="1"/>
+          </p:cNvPicPr>
+          <p:nvPr/>
+        </p:nvPicPr>
+        <p:blipFill>
+          <a:blip r:embed="rId5"/>
+          <a:stretch>
+            <a:fillRect/>
+          </a:stretch>
+        </p:blipFill>
+        <p:spPr>
+          <a:xfrm>
+            <a:off x="8974607" y="2057400"/>
+            <a:ext cx="2467279" cy="1645920"/>
+          </a:xfrm>
+          <a:prstGeom prst="rect">
+            <a:avLst/>
+          </a:prstGeom>
+        </p:spPr>
+      </p:pic>
+      <p:sp>
+        <p:nvSpPr>
+          <p:cNvPr id="23" name="TextBox 22"/>
+          <p:cNvSpPr txBox="1"/>
+          <p:nvPr/>
+        </p:nvSpPr>
+        <p:spPr>
+          <a:xfrm>
+            <a:off x="8974607" y="3904487"/>
+            <a:ext cx="2467279" cy="320040"/>
+          </a:xfrm>
+          <a:prstGeom prst="rect">
+            <a:avLst/>
+          </a:prstGeom>
+          <a:noFill/>
+        </p:spPr>
+        <p:txBody>
+          <a:bodyPr wrap="square" lIns="0" rIns="0" tIns="0" bIns="0" anchor="t">
+            <a:spAutoFit/>
+          </a:bodyPr>
+          <a:lstStyle/>
+          <a:p>
+            <a:pPr algn="l"/>
+            <a:r>
+              <a:rPr sz="1400" b="1" i="0">
+                <a:solidFill>
+                  <a:srgbClr val="ECE6DA"/>
+                </a:solidFill>
+                <a:latin typeface="Helvetica"/>
+              </a:rPr>
+              <a:t>Expiration notice.</a:t>
+            </a:r>
+          </a:p>
+        </p:txBody>
+      </p:sp>
+      <p:sp>
+        <p:nvSpPr>
+          <p:cNvPr id="24" name="TextBox 23"/>
+          <p:cNvSpPr txBox="1"/>
+          <p:nvPr/>
+        </p:nvSpPr>
+        <p:spPr>
+          <a:xfrm>
+            <a:off x="8974607" y="4251959"/>
+            <a:ext cx="2467279" cy="822960"/>
+          </a:xfrm>
+          <a:prstGeom prst="rect">
+            <a:avLst/>
+          </a:prstGeom>
+          <a:noFill/>
+        </p:spPr>
+        <p:txBody>
+          <a:bodyPr wrap="square" lIns="0" rIns="0" tIns="0" bIns="0" anchor="t">
+            <a:spAutoFit/>
+          </a:bodyPr>
+          <a:lstStyle/>
+          <a:p>
+            <a:pPr algn="l">
+              <a:lnSpc>
+                <a:spcPct val="120000"/>
+              </a:lnSpc>
+            </a:pPr>
+            <a:r>
+              <a:rPr sz="1100" b="0" i="0">
+                <a:solidFill>
+                  <a:srgbClr val="C7C0B2"/>
+                </a:solidFill>
+                <a:latin typeface="Helvetica"/>
+              </a:rPr>
+              <a:t>30 / 7 / 0-day warnings with a one-click renewal link.</a:t>
+            </a:r>
+          </a:p>
+        </p:txBody>
+      </p:sp>
+      <p:sp>
+        <p:nvSpPr>
+          <p:cNvPr id="25" name="TextBox 24"/>
+          <p:cNvSpPr txBox="1"/>
+          <p:nvPr/>
+        </p:nvSpPr>
+        <p:spPr>
+          <a:xfrm>
+            <a:off x="8974607" y="5047488"/>
+            <a:ext cx="2467279" cy="274320"/>
+          </a:xfrm>
+          <a:prstGeom prst="rect">
+            <a:avLst/>
+          </a:prstGeom>
+          <a:noFill/>
+        </p:spPr>
+        <p:txBody>
+          <a:bodyPr wrap="square" lIns="0" rIns="0" tIns="0" bIns="0" anchor="t">
+            <a:spAutoFit/>
+          </a:bodyPr>
+          <a:lstStyle/>
+          <a:p>
+            <a:pPr algn="l"/>
+            <a:r>
+              <a:rPr sz="900" b="0" i="1">
+                <a:solidFill>
+                  <a:srgbClr val="C99856"/>
+                </a:solidFill>
+                <a:latin typeface="Courier New"/>
+              </a:rPr>
+              <a:t>45 CFR §164.502(e)(1)(i)</a:t>
             </a:r>
           </a:p>
         </p:txBody>
@@ -6548,6 +6406,56 @@
                                   </p:childTnLst>
                                 </p:cTn>
                               </p:par>
+                              <p:par>
+                                <p:cTn id="30" presetID="10" presetClass="entr" presetSubtype="0" fill="hold" grpId="0" nodeType="withEffect">
+                                  <p:stCondLst>
+                                    <p:cond delay="700"/>
+                                  </p:stCondLst>
+                                  <p:childTnLst>
+                                    <p:set>
+                                      <p:cBhvr>
+                                        <p:cTn id="31" dur="1" fill="hold">
+                                          <p:stCondLst>
+                                            <p:cond delay="0"/>
+                                          </p:stCondLst>
+                                        </p:cTn>
+                                        <p:tgtEl>
+                                          <p:spTgt spid="13"/>
+                                        </p:tgtEl>
+                                        <p:attrNameLst>
+                                          <p:attrName>style.visibility</p:attrName>
+                                        </p:attrNameLst>
+                                      </p:cBhvr>
+                                      <p:to>
+                                        <p:strVal val="visible"/>
+                                      </p:to>
+                                    </p:set>
+                                    <p:anim calcmode="lin" valueType="num">
+                                      <p:cBhvr additive="base">
+                                        <p:cTn id="32" dur="450" fill="hold"/>
+                                        <p:tgtEl>
+                                          <p:spTgt spid="13"/>
+                                        </p:tgtEl>
+                                        <p:attrNameLst>
+                                          <p:attrName>style.opacity</p:attrName>
+                                        </p:attrNameLst>
+                                      </p:cBhvr>
+                                      <p:tavLst>
+                                        <p:tav tm="0">
+                                          <p:val>
+                                            <p:fltVal val="0"/>
+                                          </p:val>
+                                        </p:tav>
+                                        <p:tav tm="100000">
+                                          <p:val>
+                                            <p:fltVal val="1"/>
+                                          </p:val>
+                                        </p:tav>
+                                      </p:tavLst>
+                                    </p:anim>
+                                  </p:childTnLst>
+                                </p:cTn>
+                              </p:par>
                             </p:childTnLst>
                           </p:cTn>
                         </p:par>
@@ -6555,69 +6463,19 @@
                     </p:cTn>
                   </p:par>
                   <p:par>
-                    <p:cTn id="30" fill="hold">
+                    <p:cTn id="33" fill="hold">
                       <p:stCondLst>
                         <p:cond delay="indefinite"/>
                       </p:stCondLst>
                       <p:childTnLst>
                         <p:par>
-                          <p:cTn id="31" fill="hold">
+                          <p:cTn id="34" fill="hold">
                             <p:stCondLst>
                               <p:cond delay="0"/>
                             </p:stCondLst>
                             <p:childTnLst>
                               <p:par>
-                                <p:cTn id="32" presetID="10" presetClass="entr" presetSubtype="0" fill="hold" grpId="0" nodeType="clickEffect">
-                                  <p:stCondLst>
-                                    <p:cond delay="0"/>
-                                  </p:stCondLst>
-                                  <p:childTnLst>
-                                    <p:set>
-                                      <p:cBhvr>
-                                        <p:cTn id="33" dur="1" fill="hold">
-                                          <p:stCondLst>
-                                            <p:cond delay="0"/>
-                                          </p:stCondLst>
-                                        </p:cTn>
-                                        <p:tgtEl>
-                                          <p:spTgt spid="13"/>
-                                        </p:tgtEl>
-                                        <p:attrNameLst>
-                                          <p:attrName>style.visibility</p:attrName>
-                                        </p:attrNameLst>
-                                      </p:cBhvr>
-                                      <p:to>
-                                        <p:strVal val="visible"/>
-                                      </p:to>
-                                    </p:set>
-                                    <p:anim calcmode="lin" valueType="num">
-                                      <p:cBhvr additive="base">
-                                        <p:cTn id="34" dur="450" fill="hold"/>
-                                        <p:tgtEl>
-                                          <p:spTgt spid="13"/>
-                                        </p:tgtEl>
-                                        <p:attrNameLst>
-                                          <p:attrName>style.opacity</p:attrName>
-                                        </p:attrNameLst>
-                                      </p:cBhvr>
-                                      <p:tavLst>
-                                        <p:tav tm="0">
-                                          <p:val>
-                                            <p:fltVal val="0"/>
-                                          </p:val>
-                                        </p:tav>
-                                        <p:tav tm="100000">
-                                          <p:val>
-                                            <p:fltVal val="1"/>
-                                          </p:val>
-                                        </p:tav>
-                                      </p:tavLst>
-                                    </p:anim>
-                                  </p:childTnLst>
-                                </p:cTn>
-                              </p:par>
-                              <p:par>
-                                <p:cTn id="35" presetID="10" presetClass="entr" presetSubtype="0" fill="hold" grpId="0" nodeType="withEffect">
+                                <p:cTn id="35" presetID="10" presetClass="entr" presetSubtype="0" fill="hold" grpId="0" nodeType="clickEffect">
                                   <p:stCondLst>
                                     <p:cond delay="0"/>
                                   </p:stCondLst>
@@ -6716,6 +6574,106 @@
                                   </p:childTnLst>
                                 </p:cTn>
                               </p:par>
+                              <p:par>
+                                <p:cTn id="41" presetID="10" presetClass="entr" presetSubtype="0" fill="hold" grpId="0" nodeType="withEffect">
+                                  <p:stCondLst>
+                                    <p:cond delay="0"/>
+                                  </p:stCondLst>
+                                  <p:childTnLst>
+                                    <p:set>
+                                      <p:cBhvr>
+                                        <p:cTn id="42" dur="1" fill="hold">
+                                          <p:stCondLst>
+                                            <p:cond delay="0"/>
+                                          </p:stCondLst>
+                                        </p:cTn>
+                                        <p:tgtEl>
+                                          <p:spTgt spid="16"/>
+                                        </p:tgtEl>
+                                        <p:attrNameLst>
+                                          <p:attrName>style.visibility</p:attrName>
+                                        </p:attrNameLst>
+                                      </p:cBhvr>
+                                      <p:to>
+                                        <p:strVal val="visible"/>
+                                      </p:to>
+                                    </p:set>
+                                    <p:anim calcmode="lin" valueType="num">
+                                      <p:cBhvr additive="base">
+                                        <p:cTn id="43" dur="450" fill="hold"/>
+                                        <p:tgtEl>
+                                          <p:spTgt spid="16"/>
+                                        </p:tgtEl>
+                                        <p:attrNameLst>
+                                          <p:attrName>style.opacity</p:attrName>
+                                        </p:attrNameLst>
+                                      </p:cBhvr>
+                                      <p:tavLst>
+                                        <p:tav tm="0">
+                                          <p:val>
+                                            <p:fltVal val="0"/>
+                                          </p:val>
+                                        </p:tav>
+                                        <p:tav tm="100000">
+                                          <p:val>
+                                            <p:fltVal val="1"/>
+                                          </p:val>
+                                        </p:tav>
+                                      </p:tavLst>
+                                    </p:anim>
+                                  </p:childTnLst>
+                                </p:cTn>
+                              </p:par>
+                              <p:par>
+                                <p:cTn id="44" presetID="10" presetClass="entr" presetSubtype="0" fill="hold" grpId="0" nodeType="withEffect">
+                                  <p:stCondLst>
+                                    <p:cond delay="0"/>
+                                  </p:stCondLst>
+                                  <p:childTnLst>
+                                    <p:set>
+                                      <p:cBhvr>
+                                        <p:cTn id="45" dur="1" fill="hold">
+                                          <p:stCondLst>
+                                            <p:cond delay="0"/>
+                                          </p:stCondLst>
+                                        </p:cTn>
+                                        <p:tgtEl>
+                                          <p:spTgt spid="17"/>
+                                        </p:tgtEl>
+                                        <p:attrNameLst>
+                                          <p:attrName>style.visibility</p:attrName>
+                                        </p:attrNameLst>
+                                      </p:cBhvr>
+                                      <p:to>
+                                        <p:strVal val="visible"/>
+                                      </p:to>
+                                    </p:set>
+                                    <p:anim calcmode="lin" valueType="num">
+                                      <p:cBhvr additive="base">
+                                        <p:cTn id="46" dur="450" fill="hold"/>
+                                        <p:tgtEl>
+                                          <p:spTgt spid="17"/>
+                                        </p:tgtEl>
+                                        <p:attrNameLst>
+                                          <p:attrName>style.opacity</p:attrName>
+                                        </p:attrNameLst>
+                                      </p:cBhvr>
+                                      <p:tavLst>
+                                        <p:tav tm="0">
+                                          <p:val>
+                                            <p:fltVal val="0"/>
+                                          </p:val>
+                                        </p:tav>
+                                        <p:tav tm="100000">
+                                          <p:val>
+                                            <p:fltVal val="1"/>
+                                          </p:val>
+                                        </p:tav>
+                                      </p:tavLst>
+                                    </p:anim>
+                                  </p:childTnLst>
+                                </p:cTn>
+                              </p:par>
                             </p:childTnLst>
                           </p:cTn>
                         </p:par>
@@ -6723,119 +6681,19 @@
                     </p:cTn>
                   </p:par>
                   <p:par>
-                    <p:cTn id="41" fill="hold">
+                    <p:cTn id="47" fill="hold">
                       <p:stCondLst>
                         <p:cond delay="indefinite"/>
                       </p:stCondLst>
                       <p:childTnLst>
                         <p:par>
-                          <p:cTn id="42" fill="hold">
+                          <p:cTn id="48" fill="hold">
                             <p:stCondLst>
                               <p:cond delay="0"/>
                             </p:stCondLst>
                             <p:childTnLst>
                               <p:par>
-                                <p:cTn id="43" presetID="10" presetClass="entr" presetSubtype="0" fill="hold" grpId="0" nodeType="clickEffect">
-                                  <p:stCondLst>
-                                    <p:cond delay="0"/>
-                                  </p:stCondLst>
-                                  <p:childTnLst>
-                                    <p:set>
-                                      <p:cBhvr>
-                                        <p:cTn id="44" dur="1" fill="hold">
-                                          <p:stCondLst>
-                                            <p:cond delay="0"/>
-                                          </p:stCondLst>
-                                        </p:cTn>
-                                        <p:tgtEl>
-                                          <p:spTgt spid="16"/>
-                                        </p:tgtEl>
-                                        <p:attrNameLst>
-                                          <p:attrName>style.visibility</p:attrName>
-                                        </p:attrNameLst>
-                                      </p:cBhvr>
-                                      <p:to>
-                                        <p:strVal val="visible"/>
-                                      </p:to>
-                                    </p:set>
-                                    <p:anim calcmode="lin" valueType="num">
-                                      <p:cBhvr additive="base">
-                                        <p:cTn id="45" dur="450" fill="hold"/>
-                                        <p:tgtEl>
-                                          <p:spTgt spid="16"/>
-                                        </p:tgtEl>
-                                        <p:attrNameLst>
-                                          <p:attrName>style.opacity</p:attrName>
-                                        </p:attrNameLst>
-                                      </p:cBhvr>
-                                      <p:tavLst>
-                                        <p:tav tm="0">
-                                          <p:val>
-                                            <p:fltVal val="0"/>
-                                          </p:val>
-                                        </p:tav>
-                                        <p:tav tm="100000">
-                                          <p:val>
-                                            <p:fltVal val="1"/>
-                                          </p:val>
-                                        </p:tav>
-                                      </p:tavLst>
-                                    </p:anim>
-                                  </p:childTnLst>
-                                </p:cTn>
-                              </p:par>
-                              <p:par>
-                                <p:cTn id="46" presetID="10" presetClass="entr" presetSubtype="0" fill="hold" grpId="0" nodeType="withEffect">
-                                  <p:stCondLst>
-                                    <p:cond delay="0"/>
-                                  </p:stCondLst>
-                                  <p:childTnLst>
-                                    <p:set>
-                                      <p:cBhvr>
-                                        <p:cTn id="47" dur="1" fill="hold">
-                                          <p:stCondLst>
-                                            <p:cond delay="0"/>
-                                          </p:stCondLst>
-                                        </p:cTn>
-                                        <p:tgtEl>
-                                          <p:spTgt spid="17"/>
-                                        </p:tgtEl>
-                                        <p:attrNameLst>
-                                          <p:attrName>style.visibility</p:attrName>
-                                        </p:attrNameLst>
-                                      </p:cBhvr>
-                                      <p:to>
-                                        <p:strVal val="visible"/>
-                                      </p:to>
-                                    </p:set>
-                                    <p:anim calcmode="lin" valueType="num">
-                                      <p:cBhvr additive="base">
-                                        <p:cTn id="48" dur="450" fill="hold"/>
-                                        <p:tgtEl>
-                                          <p:spTgt spid="17"/>
-                                        </p:tgtEl>
-                                        <p:attrNameLst>
-                                          <p:attrName>style.opacity</p:attrName>
-                                        </p:attrNameLst>
-                                      </p:cBhvr>
-                                      <p:tavLst>
-                                        <p:tav tm="0">
-                                          <p:val>
-                                            <p:fltVal val="0"/>
-                                          </p:val>
-                                        </p:tav>
-                                        <p:tav tm="100000">
-                                          <p:val>
-                                            <p:fltVal val="1"/>
-                                          </p:val>
-                                        </p:tav>
-                                      </p:tavLst>
-                                    </p:anim>
-                                  </p:childTnLst>
-                                </p:cTn>
-                              </p:par>
-                              <p:par>
-                                <p:cTn id="49" presetID="10" presetClass="entr" presetSubtype="0" fill="hold" grpId="0" nodeType="withEffect">
+                                <p:cTn id="49" presetID="10" presetClass="entr" presetSubtype="0" fill="hold" grpId="0" nodeType="clickEffect">
                                   <p:stCondLst>
                                     <p:cond delay="0"/>
                                   </p:stCondLst>
@@ -6863,6 +6721,374 @@
                                         <p:cTn id="51" dur="450" fill="hold"/>
                                         <p:tgtEl>
                                           <p:spTgt spid="18"/>
+                                        </p:tgtEl>
+                                        <p:attrNameLst>
+                                          <p:attrName>style.opacity</p:attrName>
+                                        </p:attrNameLst>
+                                      </p:cBhvr>
+                                      <p:tavLst>
+                                        <p:tav tm="0">
+                                          <p:val>
+                                            <p:fltVal val="0"/>
+                                          </p:val>
+                                        </p:tav>
+                                        <p:tav tm="100000">
+                                          <p:val>
+                                            <p:fltVal val="1"/>
+                                          </p:val>
+                                        </p:tav>
+                                      </p:tavLst>
+                                    </p:anim>
+                                  </p:childTnLst>
+                                </p:cTn>
+                              </p:par>
+                              <p:par>
+                                <p:cTn id="52" presetID="10" presetClass="entr" presetSubtype="0" fill="hold" grpId="0" nodeType="withEffect">
+                                  <p:stCondLst>
+                                    <p:cond delay="0"/>
+                                  </p:stCondLst>
+                                  <p:childTnLst>
+                                    <p:set>
+                                      <p:cBhvr>
+                                        <p:cTn id="53" dur="1" fill="hold">
+                                          <p:stCondLst>
+                                            <p:cond delay="0"/>
+                                          </p:stCondLst>
+                                        </p:cTn>
+                                        <p:tgtEl>
+                                          <p:spTgt spid="19"/>
+                                        </p:tgtEl>
+                                        <p:attrNameLst>
+                                          <p:attrName>style.visibility</p:attrName>
+                                        </p:attrNameLst>
+                                      </p:cBhvr>
+                                      <p:to>
+                                        <p:strVal val="visible"/>
+                                      </p:to>
+                                    </p:set>
+                                    <p:anim calcmode="lin" valueType="num">
+                                      <p:cBhvr additive="base">
+                                        <p:cTn id="54" dur="450" fill="hold"/>
+                                        <p:tgtEl>
+                                          <p:spTgt spid="19"/>
+                                        </p:tgtEl>
+                                        <p:attrNameLst>
+                                          <p:attrName>style.opacity</p:attrName>
+                                        </p:attrNameLst>
+                                      </p:cBhvr>
+                                      <p:tavLst>
+                                        <p:tav tm="0">
+                                          <p:val>
+                                            <p:fltVal val="0"/>
+                                          </p:val>
+                                        </p:tav>
+                                        <p:tav tm="100000">
+                                          <p:val>
+                                            <p:fltVal val="1"/>
+                                          </p:val>
+                                        </p:tav>
+                                      </p:tavLst>
+                                    </p:anim>
+                                  </p:childTnLst>
+                                </p:cTn>
+                              </p:par>
+                              <p:par>
+                                <p:cTn id="55" presetID="10" presetClass="entr" presetSubtype="0" fill="hold" grpId="0" nodeType="withEffect">
+                                  <p:stCondLst>
+                                    <p:cond delay="0"/>
+                                  </p:stCondLst>
+                                  <p:childTnLst>
+                                    <p:set>
+                                      <p:cBhvr>
+                                        <p:cTn id="56" dur="1" fill="hold">
+                                          <p:stCondLst>
+                                            <p:cond delay="0"/>
+                                          </p:stCondLst>
+                                        </p:cTn>
+                                        <p:tgtEl>
+                                          <p:spTgt spid="20"/>
+                                        </p:tgtEl>
+                                        <p:attrNameLst>
+                                          <p:attrName>style.visibility</p:attrName>
+                                        </p:attrNameLst>
+                                      </p:cBhvr>
+                                      <p:to>
+                                        <p:strVal val="visible"/>
+                                      </p:to>
+                                    </p:set>
+                                    <p:anim calcmode="lin" valueType="num">
+                                      <p:cBhvr additive="base">
+                                        <p:cTn id="57" dur="450" fill="hold"/>
+                                        <p:tgtEl>
+                                          <p:spTgt spid="20"/>
+                                        </p:tgtEl>
+                                        <p:attrNameLst>
+                                          <p:attrName>style.opacity</p:attrName>
+                                        </p:attrNameLst>
+                                      </p:cBhvr>
+                                      <p:tavLst>
+                                        <p:tav tm="0">
+                                          <p:val>
+                                            <p:fltVal val="0"/>
+                                          </p:val>
+                                        </p:tav>
+                                        <p:tav tm="100000">
+                                          <p:val>
+                                            <p:fltVal val="1"/>
+                                          </p:val>
+                                        </p:tav>
+                                      </p:tavLst>
+                                    </p:anim>
+                                  </p:childTnLst>
+                                </p:cTn>
+                              </p:par>
+                              <p:par>
+                                <p:cTn id="58" presetID="10" presetClass="entr" presetSubtype="0" fill="hold" grpId="0" nodeType="withEffect">
+                                  <p:stCondLst>
+                                    <p:cond delay="0"/>
+                                  </p:stCondLst>
+                                  <p:childTnLst>
+                                    <p:set>
+                                      <p:cBhvr>
+                                        <p:cTn id="59" dur="1" fill="hold">
+                                          <p:stCondLst>
+                                            <p:cond delay="0"/>
+                                          </p:stCondLst>
+                                        </p:cTn>
+                                        <p:tgtEl>
+                                          <p:spTgt spid="21"/>
+                                        </p:tgtEl>
+                                        <p:attrNameLst>
+                                          <p:attrName>style.visibility</p:attrName>
+                                        </p:attrNameLst>
+                                      </p:cBhvr>
+                                      <p:to>
+                                        <p:strVal val="visible"/>
+                                      </p:to>
+                                    </p:set>
+                                    <p:anim calcmode="lin" valueType="num">
+                                      <p:cBhvr additive="base">
+                                        <p:cTn id="60" dur="450" fill="hold"/>
+                                        <p:tgtEl>
+                                          <p:spTgt spid="21"/>
+                                        </p:tgtEl>
+                                        <p:attrNameLst>
+                                          <p:attrName>style.opacity</p:attrName>
+                                        </p:attrNameLst>
+                                      </p:cBhvr>
+                                      <p:tavLst>
+                                        <p:tav tm="0">
+                                          <p:val>
+                                            <p:fltVal val="0"/>
+                                          </p:val>
+                                        </p:tav>
+                                        <p:tav tm="100000">
+                                          <p:val>
+                                            <p:fltVal val="1"/>
+                                          </p:val>
+                                        </p:tav>
+                                      </p:tavLst>
+                                    </p:anim>
+                                  </p:childTnLst>
+                                </p:cTn>
+                              </p:par>
+                            </p:childTnLst>
+                          </p:cTn>
+                        </p:par>
+                      </p:childTnLst>
+                    </p:cTn>
+                  </p:par>
+                  <p:par>
+                    <p:cTn id="61" fill="hold">
+                      <p:stCondLst>
+                        <p:cond delay="indefinite"/>
+                      </p:stCondLst>
+                      <p:childTnLst>
+                        <p:par>
+                          <p:cTn id="62" fill="hold">
+                            <p:stCondLst>
+                              <p:cond delay="0"/>
+                            </p:stCondLst>
+                            <p:childTnLst>
+                              <p:par>
+                                <p:cTn id="63" presetID="10" presetClass="entr" presetSubtype="0" fill="hold" grpId="0" nodeType="clickEffect">
+                                  <p:stCondLst>
+                                    <p:cond delay="0"/>
+                                  </p:stCondLst>
+                                  <p:childTnLst>
+                                    <p:set>
+                                      <p:cBhvr>
+                                        <p:cTn id="64" dur="1" fill="hold">
+                                          <p:stCondLst>
+                                            <p:cond delay="0"/>
+                                          </p:stCondLst>
+                                        </p:cTn>
+                                        <p:tgtEl>
+                                          <p:spTgt spid="22"/>
+                                        </p:tgtEl>
+                                        <p:attrNameLst>
+                                          <p:attrName>style.visibility</p:attrName>
+                                        </p:attrNameLst>
+                                      </p:cBhvr>
+                                      <p:to>
+                                        <p:strVal val="visible"/>
+                                      </p:to>
+                                    </p:set>
+                                    <p:anim calcmode="lin" valueType="num">
+                                      <p:cBhvr additive="base">
+                                        <p:cTn id="65" dur="450" fill="hold"/>
+                                        <p:tgtEl>
+                                          <p:spTgt spid="22"/>
+                                        </p:tgtEl>
+                                        <p:attrNameLst>
+                                          <p:attrName>style.opacity</p:attrName>
+                                        </p:attrNameLst>
+                                      </p:cBhvr>
+                                      <p:tavLst>
+                                        <p:tav tm="0">
+                                          <p:val>
+                                            <p:fltVal val="0"/>
+                                          </p:val>
+                                        </p:tav>
+                                        <p:tav tm="100000">
+                                          <p:val>
+                                            <p:fltVal val="1"/>
+                                          </p:val>
+                                        </p:tav>
+                                      </p:tavLst>
+                                    </p:anim>
+                                  </p:childTnLst>
+                                </p:cTn>
+                              </p:par>
+                              <p:par>
+                                <p:cTn id="66" presetID="10" presetClass="entr" presetSubtype="0" fill="hold" grpId="0" nodeType="withEffect">
+                                  <p:stCondLst>
+                                    <p:cond delay="0"/>
+                                  </p:stCondLst>
+                                  <p:childTnLst>
+                                    <p:set>
+                                      <p:cBhvr>
+                                        <p:cTn id="67" dur="1" fill="hold">
+                                          <p:stCondLst>
+                                            <p:cond delay="0"/>
+                                          </p:stCondLst>
+                                        </p:cTn>
+                                        <p:tgtEl>
+                                          <p:spTgt spid="23"/>
+                                        </p:tgtEl>
+                                        <p:attrNameLst>
+                                          <p:attrName>style.visibility</p:attrName>
+                                        </p:attrNameLst>
+                                      </p:cBhvr>
+                                      <p:to>
+                                        <p:strVal val="visible"/>
+                                      </p:to>
+                                    </p:set>
+                                    <p:anim calcmode="lin" valueType="num">
+                                      <p:cBhvr additive="base">
+                                        <p:cTn id="68" dur="450" fill="hold"/>
+                                        <p:tgtEl>
+                                          <p:spTgt spid="23"/>
+                                        </p:tgtEl>
+                                        <p:attrNameLst>
+                                          <p:attrName>style.opacity</p:attrName>
+                                        </p:attrNameLst>
+                                      </p:cBhvr>
+                                      <p:tavLst>
+                                        <p:tav tm="0">
+                                          <p:val>
+                                            <p:fltVal val="0"/>
+                                          </p:val>
+                                        </p:tav>
+                                        <p:tav tm="100000">
+                                          <p:val>
+                                            <p:fltVal val="1"/>
+                                          </p:val>
+                                        </p:tav>
+                                      </p:tavLst>
+                                    </p:anim>
+                                  </p:childTnLst>
+                                </p:cTn>
+                              </p:par>
+                              <p:par>
+                                <p:cTn id="69" presetID="10" presetClass="entr" presetSubtype="0" fill="hold" grpId="0" nodeType="withEffect">
+                                  <p:stCondLst>
+                                    <p:cond delay="0"/>
+                                  </p:stCondLst>
+                                  <p:childTnLst>
+                                    <p:set>
+                                      <p:cBhvr>
+                                        <p:cTn id="70" dur="1" fill="hold">
+                                          <p:stCondLst>
+                                            <p:cond delay="0"/>
+                                          </p:stCondLst>
+                                        </p:cTn>
+                                        <p:tgtEl>
+                                          <p:spTgt spid="24"/>
+                                        </p:tgtEl>
+                                        <p:attrNameLst>
+                                          <p:attrName>style.visibility</p:attrName>
+                                        </p:attrNameLst>
+                                      </p:cBhvr>
+                                      <p:to>
+                                        <p:strVal val="visible"/>
+                                      </p:to>
+                                    </p:set>
+                                    <p:anim calcmode="lin" valueType="num">
+                                      <p:cBhvr additive="base">
+                                        <p:cTn id="71" dur="450" fill="hold"/>
+                                        <p:tgtEl>
+                                          <p:spTgt spid="24"/>
+                                        </p:tgtEl>
+                                        <p:attrNameLst>
+                                          <p:attrName>style.opacity</p:attrName>
+                                        </p:attrNameLst>
+                                      </p:cBhvr>
+                                      <p:tavLst>
+                                        <p:tav tm="0">
+                                          <p:val>
+                                            <p:fltVal val="0"/>
+                                          </p:val>
+                                        </p:tav>
+                                        <p:tav tm="100000">
+                                          <p:val>
+                                            <p:fltVal val="1"/>
+                                          </p:val>
+                                        </p:tav>
+                                      </p:tavLst>
+                                    </p:anim>
+                                  </p:childTnLst>
+                                </p:cTn>
+                              </p:par>
+                              <p:par>
+                                <p:cTn id="72" presetID="10" presetClass="entr" presetSubtype="0" fill="hold" grpId="0" nodeType="withEffect">
+                                  <p:stCondLst>
+                                    <p:cond delay="0"/>
+                                  </p:stCondLst>
+                                  <p:childTnLst>
+                                    <p:set>
+                                      <p:cBhvr>
+                                        <p:cTn id="73" dur="1" fill="hold">
+                                          <p:stCondLst>
+                                            <p:cond delay="0"/>
+                                          </p:stCondLst>
+                                        </p:cTn>
+                                        <p:tgtEl>
+                                          <p:spTgt spid="25"/>
+                                        </p:tgtEl>
+                                        <p:attrNameLst>
+                                          <p:attrName>style.visibility</p:attrName>
+                                        </p:attrNameLst>
+                                      </p:cBhvr>
+                                      <p:to>
+                                        <p:strVal val="visible"/>
+                                      </p:to>
+                                    </p:set>
+                                    <p:anim calcmode="lin" valueType="num">
+                                      <p:cBhvr additive="base">
+                                        <p:cTn id="74" dur="450" fill="hold"/>
+                                        <p:tgtEl>
+                                          <p:spTgt spid="25"/>
                                         </p:tgtEl>
                                         <p:attrNameLst>
                                           <p:attrName>style.opacity</p:attrName>
@@ -7042,7 +7268,7 @@
                 </a:solidFill>
                 <a:latin typeface="Courier New"/>
               </a:rPr>
-              <a:t>12 / 14</a:t>
+              <a:t>12 / 15</a:t>
             </a:r>
           </a:p>
         </p:txBody>
@@ -7077,7 +7303,7 @@
                 </a:solidFill>
                 <a:latin typeface="Georgia"/>
               </a:rPr>
-              <a:t>Copilot</a:t>
+              <a:t>Matrix</a:t>
             </a:r>
           </a:p>
         </p:txBody>
@@ -7156,7 +7382,7 @@
                 </a:solidFill>
                 <a:latin typeface="Helvetica"/>
               </a:rPr>
-              <a:t>The audit history is searchable in plain English — grounded in the real ledger.</a:t>
+              <a:t>Every BAA clause is mapped to the regulation it satisfies — on the record, on the page.</a:t>
             </a:r>
           </a:p>
         </p:txBody>
@@ -7235,7 +7461,7 @@
                 </a:solidFill>
                 <a:latin typeface="Helvetica"/>
               </a:rPr>
-              <a:t>The audit history is searchable in plain English — grounded in the real ledger.</a:t>
+              <a:t>Every BAA clause is mapped to the regulation it satisfies — on the record, on the page.</a:t>
             </a:r>
           </a:p>
         </p:txBody>
@@ -7248,8 +7474,8 @@
         </p:nvSpPr>
         <p:spPr>
           <a:xfrm>
-            <a:off x="1554480" y="2011680"/>
-            <a:ext cx="9052560" cy="411480"/>
+            <a:off x="749808" y="1828800"/>
+            <a:ext cx="4937760" cy="411480"/>
           </a:xfrm>
           <a:prstGeom prst="rect">
             <a:avLst/>
@@ -7262,7 +7488,7 @@
           </a:bodyPr>
           <a:lstStyle/>
           <a:p>
-            <a:pPr algn="ctr"/>
+            <a:pPr algn="l"/>
             <a:r>
               <a:rPr sz="2200" b="1" i="0">
                 <a:solidFill>
@@ -7270,7 +7496,7 @@
                 </a:solidFill>
                 <a:latin typeface="Helvetica"/>
               </a:rPr>
-              <a:t>Ask a question.</a:t>
+              <a:t>45 CFR §164.504(e)(2).</a:t>
             </a:r>
           </a:p>
         </p:txBody>
@@ -7283,8 +7509,8 @@
         </p:nvSpPr>
         <p:spPr>
           <a:xfrm>
-            <a:off x="1554480" y="2468880"/>
-            <a:ext cx="9052560" cy="548640"/>
+            <a:off x="749808" y="2286000"/>
+            <a:ext cx="4937760" cy="548640"/>
           </a:xfrm>
           <a:prstGeom prst="rect">
             <a:avLst/>
@@ -7297,7 +7523,7 @@
           </a:bodyPr>
           <a:lstStyle/>
           <a:p>
-            <a:pPr algn="ctr">
+            <a:pPr algn="l">
               <a:lnSpc>
                 <a:spcPct val="125000"/>
               </a:lnSpc>
@@ -7309,7 +7535,7 @@
                 </a:solidFill>
                 <a:latin typeface="Helvetica"/>
               </a:rPr>
-              <a:t>"Which BAAs expire in 30 days?"   "Show me ScriptGuard's signing history."</a:t>
+              <a:t>The required-elements checklist, mapped section by section.</a:t>
             </a:r>
           </a:p>
         </p:txBody>
@@ -7322,8 +7548,8 @@
         </p:nvSpPr>
         <p:spPr>
           <a:xfrm>
-            <a:off x="1554480" y="3429000"/>
-            <a:ext cx="9052560" cy="411480"/>
+            <a:off x="749808" y="2761488"/>
+            <a:ext cx="4937760" cy="274320"/>
           </a:xfrm>
           <a:prstGeom prst="rect">
             <a:avLst/>
@@ -7336,7 +7562,42 @@
           </a:bodyPr>
           <a:lstStyle/>
           <a:p>
-            <a:pPr algn="ctr"/>
+            <a:pPr algn="l"/>
+            <a:r>
+              <a:rPr sz="1000" b="0" i="1">
+                <a:solidFill>
+                  <a:srgbClr val="C99856"/>
+                </a:solidFill>
+                <a:latin typeface="Courier New"/>
+              </a:rPr>
+              <a:t>src/lib/baa/cfrMappings.ts</a:t>
+            </a:r>
+          </a:p>
+        </p:txBody>
+      </p:sp>
+      <p:sp>
+        <p:nvSpPr>
+          <p:cNvPr id="13" name="TextBox 12"/>
+          <p:cNvSpPr txBox="1"/>
+          <p:nvPr/>
+        </p:nvSpPr>
+        <p:spPr>
+          <a:xfrm>
+            <a:off x="6504127" y="2148840"/>
+            <a:ext cx="4937760" cy="411480"/>
+          </a:xfrm>
+          <a:prstGeom prst="rect">
+            <a:avLst/>
+          </a:prstGeom>
+          <a:noFill/>
+        </p:spPr>
+        <p:txBody>
+          <a:bodyPr wrap="square" lIns="0" rIns="0" tIns="0" bIns="0" anchor="t">
+            <a:spAutoFit/>
+          </a:bodyPr>
+          <a:lstStyle/>
+          <a:p>
+            <a:pPr algn="r"/>
             <a:r>
               <a:rPr sz="2200" b="1" i="0">
                 <a:solidFill>
@@ -7344,21 +7605,21 @@
                 </a:solidFill>
                 <a:latin typeface="Helvetica"/>
               </a:rPr>
-              <a:t>Gemini 2.0 Flash.</a:t>
+              <a:t>MSDH sections.</a:t>
             </a:r>
           </a:p>
         </p:txBody>
       </p:sp>
       <p:sp>
         <p:nvSpPr>
-          <p:cNvPr id="13" name="TextBox 12"/>
+          <p:cNvPr id="14" name="TextBox 13"/>
           <p:cNvSpPr txBox="1"/>
           <p:nvPr/>
         </p:nvSpPr>
         <p:spPr>
           <a:xfrm>
-            <a:off x="1554480" y="3886200"/>
-            <a:ext cx="9052560" cy="548640"/>
+            <a:off x="6504127" y="2606040"/>
+            <a:ext cx="4937760" cy="548640"/>
           </a:xfrm>
           <a:prstGeom prst="rect">
             <a:avLst/>
@@ -7371,7 +7632,7 @@
           </a:bodyPr>
           <a:lstStyle/>
           <a:p>
-            <a:pPr algn="ctr">
+            <a:pPr algn="r">
               <a:lnSpc>
                 <a:spcPct val="125000"/>
               </a:lnSpc>
@@ -7383,21 +7644,21 @@
                 </a:solidFill>
                 <a:latin typeface="Helvetica"/>
               </a:rPr>
-              <a:t>Streaming responses, grounded in audit logs — not model hallucination.</a:t>
+              <a:t>Mississippi-specific provisions cross-walked against state requirements.</a:t>
             </a:r>
           </a:p>
         </p:txBody>
       </p:sp>
       <p:sp>
         <p:nvSpPr>
-          <p:cNvPr id="14" name="TextBox 13"/>
+          <p:cNvPr id="15" name="TextBox 14"/>
           <p:cNvSpPr txBox="1"/>
           <p:nvPr/>
         </p:nvSpPr>
         <p:spPr>
           <a:xfrm>
-            <a:off x="1554480" y="4361688"/>
-            <a:ext cx="9052560" cy="274320"/>
+            <a:off x="6504127" y="3081528"/>
+            <a:ext cx="4937760" cy="274320"/>
           </a:xfrm>
           <a:prstGeom prst="rect">
             <a:avLst/>
@@ -7410,7 +7671,7 @@
           </a:bodyPr>
           <a:lstStyle/>
           <a:p>
-            <a:pPr algn="ctr"/>
+            <a:pPr algn="r"/>
             <a:r>
               <a:rPr sz="1000" b="0" i="1">
                 <a:solidFill>
@@ -7418,21 +7679,21 @@
                 </a:solidFill>
                 <a:latin typeface="Courier New"/>
               </a:rPr>
-              <a:t>src/lib/ai/gemini.ts</a:t>
+              <a:t>Compliance Matrix PDF — generated per BAA</a:t>
             </a:r>
           </a:p>
         </p:txBody>
       </p:sp>
       <p:sp>
         <p:nvSpPr>
-          <p:cNvPr id="15" name="TextBox 14"/>
+          <p:cNvPr id="16" name="TextBox 15"/>
           <p:cNvSpPr txBox="1"/>
           <p:nvPr/>
         </p:nvSpPr>
         <p:spPr>
           <a:xfrm>
-            <a:off x="1554480" y="4846320"/>
-            <a:ext cx="9052560" cy="411480"/>
+            <a:off x="749808" y="3429000"/>
+            <a:ext cx="4937760" cy="411480"/>
           </a:xfrm>
           <a:prstGeom prst="rect">
             <a:avLst/>
@@ -7445,7 +7706,7 @@
           </a:bodyPr>
           <a:lstStyle/>
           <a:p>
-            <a:pPr algn="ctr"/>
+            <a:pPr algn="l"/>
             <a:r>
               <a:rPr sz="2200" b="1" i="0">
                 <a:solidFill>
@@ -7453,21 +7714,21 @@
                 </a:solidFill>
                 <a:latin typeface="Helvetica"/>
               </a:rPr>
-              <a:t>RBAC enforced.</a:t>
+              <a:t>Evidence on demand.</a:t>
             </a:r>
           </a:p>
         </p:txBody>
       </p:sp>
       <p:sp>
         <p:nvSpPr>
-          <p:cNvPr id="16" name="TextBox 15"/>
+          <p:cNvPr id="17" name="TextBox 16"/>
           <p:cNvSpPr txBox="1"/>
           <p:nvPr/>
         </p:nvSpPr>
         <p:spPr>
           <a:xfrm>
-            <a:off x="1554480" y="5303520"/>
-            <a:ext cx="9052560" cy="548640"/>
+            <a:off x="749808" y="3886200"/>
+            <a:ext cx="4937760" cy="548640"/>
           </a:xfrm>
           <a:prstGeom prst="rect">
             <a:avLst/>
@@ -7480,7 +7741,7 @@
           </a:bodyPr>
           <a:lstStyle/>
           <a:p>
-            <a:pPr algn="ctr">
+            <a:pPr algn="l">
               <a:lnSpc>
                 <a:spcPct val="125000"/>
               </a:lnSpc>
@@ -7492,21 +7753,21 @@
                 </a:solidFill>
                 <a:latin typeface="Helvetica"/>
               </a:rPr>
-              <a:t>The model sees only what the signed-in user is permitted to see.</a:t>
+              <a:t>One export — ready for OCR, the state health department, or a prospect's security review.</a:t>
             </a:r>
           </a:p>
         </p:txBody>
       </p:sp>
       <p:sp>
         <p:nvSpPr>
-          <p:cNvPr id="17" name="TextBox 16"/>
+          <p:cNvPr id="18" name="TextBox 17"/>
           <p:cNvSpPr txBox="1"/>
           <p:nvPr/>
         </p:nvSpPr>
         <p:spPr>
           <a:xfrm>
-            <a:off x="1554480" y="5779008"/>
-            <a:ext cx="9052560" cy="274320"/>
+            <a:off x="749808" y="4361688"/>
+            <a:ext cx="4937760" cy="274320"/>
           </a:xfrm>
           <a:prstGeom prst="rect">
             <a:avLst/>
@@ -7519,7 +7780,7 @@
           </a:bodyPr>
           <a:lstStyle/>
           <a:p>
-            <a:pPr algn="ctr"/>
+            <a:pPr algn="l"/>
             <a:r>
               <a:rPr sz="1000" b="0" i="1">
                 <a:solidFill>
@@ -7527,7 +7788,7 @@
                 </a:solidFill>
                 <a:latin typeface="Courier New"/>
               </a:rPr>
-              <a:t>45 CFR §164.308(a)(4)</a:t>
+              <a:t>src/lib/pdf/ComplianceMatrixPDF.tsx</a:t>
             </a:r>
           </a:p>
         </p:txBody>
@@ -7856,39 +8117,14 @@
                                 </p:cTn>
                               </p:par>
                               <p:par>
-                                <p:cTn id="24" presetID="42" presetClass="path" presetSubtype="0" fill="hold" grpId="0" nodeType="withEffect">
+                                <p:cTn id="24" presetID="10" presetClass="entr" presetSubtype="0" fill="hold" grpId="0" nodeType="withEffect">
                                   <p:stCondLst>
                                     <p:cond delay="700"/>
                                   </p:stCondLst>
                                   <p:childTnLst>
-                                    <p:animMotion origin="layout" path="M 0 0 L 0.0000 -0.0200 E" pathEditMode="relative" rAng="0" ptsTypes="">
-                                      <p:cBhvr>
-                                        <p:cTn id="25" dur="450" fill="hold" accel="50000" decel="50000">
-                                          <p:stCondLst>
-                                            <p:cond delay="0"/>
-                                          </p:stCondLst>
-                                        </p:cTn>
-                                        <p:tgtEl>
-                                          <p:spTgt spid="10"/>
-                                        </p:tgtEl>
-                                        <p:attrNameLst>
-                                          <p:attrName>ppt_x</p:attrName>
-                                          <p:attrName>ppt_y</p:attrName>
-                                        </p:attrNameLst>
-                                      </p:cBhvr>
-                                    </p:animMotion>
-                                  </p:childTnLst>
-                                </p:cTn>
-                              </p:par>
-                              <p:par>
-                                <p:cTn id="26" presetID="10" presetClass="entr" presetSubtype="0" fill="hold" grpId="0" nodeType="withEffect">
-                                  <p:stCondLst>
-                                    <p:cond delay="700"/>
-                                  </p:stCondLst>
-                                  <p:childTnLst>
                                     <p:set>
                                       <p:cBhvr>
-                                        <p:cTn id="27" dur="1" fill="hold">
+                                        <p:cTn id="25" dur="1" fill="hold">
                                           <p:stCondLst>
                                             <p:cond delay="0"/>
                                           </p:stCondLst>
@@ -7906,7 +8142,7 @@
                                     </p:set>
                                     <p:anim calcmode="lin" valueType="num">
                                       <p:cBhvr additive="base">
-                                        <p:cTn id="28" dur="450" fill="hold"/>
+                                        <p:cTn id="26" dur="450" fill="hold"/>
                                         <p:tgtEl>
                                           <p:spTgt spid="11"/>
                                         </p:tgtEl>
@@ -7931,27 +8167,52 @@
                                 </p:cTn>
                               </p:par>
                               <p:par>
-                                <p:cTn id="29" presetID="42" presetClass="path" presetSubtype="0" fill="hold" grpId="0" nodeType="withEffect">
+                                <p:cTn id="27" presetID="10" presetClass="entr" presetSubtype="0" fill="hold" grpId="0" nodeType="withEffect">
                                   <p:stCondLst>
                                     <p:cond delay="700"/>
                                   </p:stCondLst>
                                   <p:childTnLst>
-                                    <p:animMotion origin="layout" path="M 0 0 L 0.0000 -0.0200 E" pathEditMode="relative" rAng="0" ptsTypes="">
-                                      <p:cBhvr>
-                                        <p:cTn id="30" dur="450" fill="hold" accel="50000" decel="50000">
-                                          <p:stCondLst>
-                                            <p:cond delay="0"/>
-                                          </p:stCondLst>
-                                        </p:cTn>
-                                        <p:tgtEl>
-                                          <p:spTgt spid="11"/>
-                                        </p:tgtEl>
-                                        <p:attrNameLst>
-                                          <p:attrName>ppt_x</p:attrName>
-                                          <p:attrName>ppt_y</p:attrName>
-                                        </p:attrNameLst>
-                                      </p:cBhvr>
-                                    </p:animMotion>
+                                    <p:set>
+                                      <p:cBhvr>
+                                        <p:cTn id="28" dur="1" fill="hold">
+                                          <p:stCondLst>
+                                            <p:cond delay="0"/>
+                                          </p:stCondLst>
+                                        </p:cTn>
+                                        <p:tgtEl>
+                                          <p:spTgt spid="12"/>
+                                        </p:tgtEl>
+                                        <p:attrNameLst>
+                                          <p:attrName>style.visibility</p:attrName>
+                                        </p:attrNameLst>
+                                      </p:cBhvr>
+                                      <p:to>
+                                        <p:strVal val="visible"/>
+                                      </p:to>
+                                    </p:set>
+                                    <p:anim calcmode="lin" valueType="num">
+                                      <p:cBhvr additive="base">
+                                        <p:cTn id="29" dur="450" fill="hold"/>
+                                        <p:tgtEl>
+                                          <p:spTgt spid="12"/>
+                                        </p:tgtEl>
+                                        <p:attrNameLst>
+                                          <p:attrName>style.opacity</p:attrName>
+                                        </p:attrNameLst>
+                                      </p:cBhvr>
+                                      <p:tavLst>
+                                        <p:tav tm="0">
+                                          <p:val>
+                                            <p:fltVal val="0"/>
+                                          </p:val>
+                                        </p:tav>
+                                        <p:tav tm="100000">
+                                          <p:val>
+                                            <p:fltVal val="1"/>
+                                          </p:val>
+                                        </p:tav>
+                                      </p:tavLst>
+                                    </p:anim>
                                   </p:childTnLst>
                                 </p:cTn>
                               </p:par>
@@ -7962,32 +8223,32 @@
                     </p:cTn>
                   </p:par>
                   <p:par>
-                    <p:cTn id="31" fill="hold">
+                    <p:cTn id="30" fill="hold">
                       <p:stCondLst>
                         <p:cond delay="indefinite"/>
                       </p:stCondLst>
                       <p:childTnLst>
                         <p:par>
-                          <p:cTn id="32" fill="hold">
+                          <p:cTn id="31" fill="hold">
                             <p:stCondLst>
                               <p:cond delay="0"/>
                             </p:stCondLst>
                             <p:childTnLst>
                               <p:par>
-                                <p:cTn id="33" presetID="10" presetClass="entr" presetSubtype="0" fill="hold" grpId="0" nodeType="clickEffect">
+                                <p:cTn id="32" presetID="10" presetClass="entr" presetSubtype="0" fill="hold" grpId="0" nodeType="clickEffect">
                                   <p:stCondLst>
                                     <p:cond delay="0"/>
                                   </p:stCondLst>
                                   <p:childTnLst>
                                     <p:set>
                                       <p:cBhvr>
-                                        <p:cTn id="34" dur="1" fill="hold">
-                                          <p:stCondLst>
-                                            <p:cond delay="0"/>
-                                          </p:stCondLst>
-                                        </p:cTn>
-                                        <p:tgtEl>
-                                          <p:spTgt spid="12"/>
+                                        <p:cTn id="33" dur="1" fill="hold">
+                                          <p:stCondLst>
+                                            <p:cond delay="0"/>
+                                          </p:stCondLst>
+                                        </p:cTn>
+                                        <p:tgtEl>
+                                          <p:spTgt spid="13"/>
                                         </p:tgtEl>
                                         <p:attrNameLst>
                                           <p:attrName>style.visibility</p:attrName>
@@ -7999,9 +8260,9 @@
                                     </p:set>
                                     <p:anim calcmode="lin" valueType="num">
                                       <p:cBhvr additive="base">
-                                        <p:cTn id="35" dur="450" fill="hold"/>
-                                        <p:tgtEl>
-                                          <p:spTgt spid="12"/>
+                                        <p:cTn id="34" dur="450" fill="hold"/>
+                                        <p:tgtEl>
+                                          <p:spTgt spid="13"/>
                                         </p:tgtEl>
                                         <p:attrNameLst>
                                           <p:attrName>style.opacity</p:attrName>
@@ -8024,27 +8285,52 @@
                                 </p:cTn>
                               </p:par>
                               <p:par>
-                                <p:cTn id="36" presetID="42" presetClass="path" presetSubtype="0" fill="hold" grpId="0" nodeType="withEffect">
+                                <p:cTn id="35" presetID="10" presetClass="entr" presetSubtype="0" fill="hold" grpId="0" nodeType="withEffect">
                                   <p:stCondLst>
                                     <p:cond delay="0"/>
                                   </p:stCondLst>
                                   <p:childTnLst>
-                                    <p:animMotion origin="layout" path="M 0 0 L 0.0000 -0.0200 E" pathEditMode="relative" rAng="0" ptsTypes="">
-                                      <p:cBhvr>
-                                        <p:cTn id="37" dur="450" fill="hold" accel="50000" decel="50000">
-                                          <p:stCondLst>
-                                            <p:cond delay="0"/>
-                                          </p:stCondLst>
-                                        </p:cTn>
-                                        <p:tgtEl>
-                                          <p:spTgt spid="12"/>
-                                        </p:tgtEl>
-                                        <p:attrNameLst>
-                                          <p:attrName>ppt_x</p:attrName>
-                                          <p:attrName>ppt_y</p:attrName>
-                                        </p:attrNameLst>
-                                      </p:cBhvr>
-                                    </p:animMotion>
+                                    <p:set>
+                                      <p:cBhvr>
+                                        <p:cTn id="36" dur="1" fill="hold">
+                                          <p:stCondLst>
+                                            <p:cond delay="0"/>
+                                          </p:stCondLst>
+                                        </p:cTn>
+                                        <p:tgtEl>
+                                          <p:spTgt spid="14"/>
+                                        </p:tgtEl>
+                                        <p:attrNameLst>
+                                          <p:attrName>style.visibility</p:attrName>
+                                        </p:attrNameLst>
+                                      </p:cBhvr>
+                                      <p:to>
+                                        <p:strVal val="visible"/>
+                                      </p:to>
+                                    </p:set>
+                                    <p:anim calcmode="lin" valueType="num">
+                                      <p:cBhvr additive="base">
+                                        <p:cTn id="37" dur="450" fill="hold"/>
+                                        <p:tgtEl>
+                                          <p:spTgt spid="14"/>
+                                        </p:tgtEl>
+                                        <p:attrNameLst>
+                                          <p:attrName>style.opacity</p:attrName>
+                                        </p:attrNameLst>
+                                      </p:cBhvr>
+                                      <p:tavLst>
+                                        <p:tav tm="0">
+                                          <p:val>
+                                            <p:fltVal val="0"/>
+                                          </p:val>
+                                        </p:tav>
+                                        <p:tav tm="100000">
+                                          <p:val>
+                                            <p:fltVal val="1"/>
+                                          </p:val>
+                                        </p:tav>
+                                      </p:tavLst>
+                                    </p:anim>
                                   </p:childTnLst>
                                 </p:cTn>
                               </p:par>
@@ -8062,7 +8348,7 @@
                                           </p:stCondLst>
                                         </p:cTn>
                                         <p:tgtEl>
-                                          <p:spTgt spid="13"/>
+                                          <p:spTgt spid="15"/>
                                         </p:tgtEl>
                                         <p:attrNameLst>
                                           <p:attrName>style.visibility</p:attrName>
@@ -8076,7 +8362,7 @@
                                       <p:cBhvr additive="base">
                                         <p:cTn id="40" dur="450" fill="hold"/>
                                         <p:tgtEl>
-                                          <p:spTgt spid="13"/>
+                                          <p:spTgt spid="15"/>
                                         </p:tgtEl>
                                         <p:attrNameLst>
                                           <p:attrName>style.opacity</p:attrName>
@@ -8098,37 +8384,30 @@
                                   </p:childTnLst>
                                 </p:cTn>
                               </p:par>
-                              <p:par>
-                                <p:cTn id="41" presetID="42" presetClass="path" presetSubtype="0" fill="hold" grpId="0" nodeType="withEffect">
+                            </p:childTnLst>
+                          </p:cTn>
+                        </p:par>
+                      </p:childTnLst>
+                    </p:cTn>
+                  </p:par>
+                  <p:par>
+                    <p:cTn id="41" fill="hold">
+                      <p:stCondLst>
+                        <p:cond delay="indefinite"/>
+                      </p:stCondLst>
+                      <p:childTnLst>
+                        <p:par>
+                          <p:cTn id="42" fill="hold">
+                            <p:stCondLst>
+                              <p:cond delay="0"/>
+                            </p:stCondLst>
+                            <p:childTnLst>
+                              <p:par>
+                                <p:cTn id="43" presetID="10" presetClass="entr" presetSubtype="0" fill="hold" grpId="0" nodeType="clickEffect">
                                   <p:stCondLst>
                                     <p:cond delay="0"/>
                                   </p:stCondLst>
                                   <p:childTnLst>
-                                    <p:animMotion origin="layout" path="M 0 0 L 0.0000 -0.0200 E" pathEditMode="relative" rAng="0" ptsTypes="">
-                                      <p:cBhvr>
-                                        <p:cTn id="42" dur="450" fill="hold" accel="50000" decel="50000">
-                                          <p:stCondLst>
-                                            <p:cond delay="0"/>
-                                          </p:stCondLst>
-                                        </p:cTn>
-                                        <p:tgtEl>
-                                          <p:spTgt spid="13"/>
-                                        </p:tgtEl>
-                                        <p:attrNameLst>
-                                          <p:attrName>ppt_x</p:attrName>
-                                          <p:attrName>ppt_y</p:attrName>
-                                        </p:attrNameLst>
-                                      </p:cBhvr>
-                                    </p:animMotion>
-                                  </p:childTnLst>
-                                </p:cTn>
-                              </p:par>
-                              <p:par>
-                                <p:cTn id="43" presetID="10" presetClass="entr" presetSubtype="0" fill="hold" grpId="0" nodeType="withEffect">
-                                  <p:stCondLst>
-                                    <p:cond delay="0"/>
-                                  </p:stCondLst>
-                                  <p:childTnLst>
                                     <p:set>
                                       <p:cBhvr>
                                         <p:cTn id="44" dur="1" fill="hold">
@@ -8137,7 +8416,7 @@
                                           </p:stCondLst>
                                         </p:cTn>
                                         <p:tgtEl>
-                                          <p:spTgt spid="14"/>
+                                          <p:spTgt spid="16"/>
                                         </p:tgtEl>
                                         <p:attrNameLst>
                                           <p:attrName>style.visibility</p:attrName>
@@ -8151,7 +8430,7 @@
                                       <p:cBhvr additive="base">
                                         <p:cTn id="45" dur="450" fill="hold"/>
                                         <p:tgtEl>
-                                          <p:spTgt spid="14"/>
+                                          <p:spTgt spid="16"/>
                                         </p:tgtEl>
                                         <p:attrNameLst>
                                           <p:attrName>style.opacity</p:attrName>
@@ -8174,63 +8453,20 @@
                                 </p:cTn>
                               </p:par>
                               <p:par>
-                                <p:cTn id="46" presetID="42" presetClass="path" presetSubtype="0" fill="hold" grpId="0" nodeType="withEffect">
+                                <p:cTn id="46" presetID="10" presetClass="entr" presetSubtype="0" fill="hold" grpId="0" nodeType="withEffect">
                                   <p:stCondLst>
                                     <p:cond delay="0"/>
                                   </p:stCondLst>
                                   <p:childTnLst>
-                                    <p:animMotion origin="layout" path="M 0 0 L 0.0000 -0.0200 E" pathEditMode="relative" rAng="0" ptsTypes="">
-                                      <p:cBhvr>
-                                        <p:cTn id="47" dur="450" fill="hold" accel="50000" decel="50000">
-                                          <p:stCondLst>
-                                            <p:cond delay="0"/>
-                                          </p:stCondLst>
-                                        </p:cTn>
-                                        <p:tgtEl>
-                                          <p:spTgt spid="14"/>
-                                        </p:tgtEl>
-                                        <p:attrNameLst>
-                                          <p:attrName>ppt_x</p:attrName>
-                                          <p:attrName>ppt_y</p:attrName>
-                                        </p:attrNameLst>
-                                      </p:cBhvr>
-                                    </p:animMotion>
-                                  </p:childTnLst>
-                                </p:cTn>
-                              </p:par>
-                            </p:childTnLst>
-                          </p:cTn>
-                        </p:par>
-                      </p:childTnLst>
-                    </p:cTn>
-                  </p:par>
-                  <p:par>
-                    <p:cTn id="48" fill="hold">
-                      <p:stCondLst>
-                        <p:cond delay="indefinite"/>
-                      </p:stCondLst>
-                      <p:childTnLst>
-                        <p:par>
-                          <p:cTn id="49" fill="hold">
-                            <p:stCondLst>
-                              <p:cond delay="0"/>
-                            </p:stCondLst>
-                            <p:childTnLst>
-                              <p:par>
-                                <p:cTn id="50" presetID="10" presetClass="entr" presetSubtype="0" fill="hold" grpId="0" nodeType="clickEffect">
-                                  <p:stCondLst>
-                                    <p:cond delay="0"/>
-                                  </p:stCondLst>
-                                  <p:childTnLst>
                                     <p:set>
                                       <p:cBhvr>
-                                        <p:cTn id="51" dur="1" fill="hold">
-                                          <p:stCondLst>
-                                            <p:cond delay="0"/>
-                                          </p:stCondLst>
-                                        </p:cTn>
-                                        <p:tgtEl>
-                                          <p:spTgt spid="15"/>
+                                        <p:cTn id="47" dur="1" fill="hold">
+                                          <p:stCondLst>
+                                            <p:cond delay="0"/>
+                                          </p:stCondLst>
+                                        </p:cTn>
+                                        <p:tgtEl>
+                                          <p:spTgt spid="17"/>
                                         </p:tgtEl>
                                         <p:attrNameLst>
                                           <p:attrName>style.visibility</p:attrName>
@@ -8242,9 +8478,9 @@
                                     </p:set>
                                     <p:anim calcmode="lin" valueType="num">
                                       <p:cBhvr additive="base">
-                                        <p:cTn id="52" dur="450" fill="hold"/>
-                                        <p:tgtEl>
-                                          <p:spTgt spid="15"/>
+                                        <p:cTn id="48" dur="450" fill="hold"/>
+                                        <p:tgtEl>
+                                          <p:spTgt spid="17"/>
                                         </p:tgtEl>
                                         <p:attrNameLst>
                                           <p:attrName>style.opacity</p:attrName>
@@ -8267,45 +8503,20 @@
                                 </p:cTn>
                               </p:par>
                               <p:par>
-                                <p:cTn id="53" presetID="42" presetClass="path" presetSubtype="0" fill="hold" grpId="0" nodeType="withEffect">
+                                <p:cTn id="49" presetID="10" presetClass="entr" presetSubtype="0" fill="hold" grpId="0" nodeType="withEffect">
                                   <p:stCondLst>
                                     <p:cond delay="0"/>
                                   </p:stCondLst>
                                   <p:childTnLst>
-                                    <p:animMotion origin="layout" path="M 0 0 L 0.0000 -0.0200 E" pathEditMode="relative" rAng="0" ptsTypes="">
-                                      <p:cBhvr>
-                                        <p:cTn id="54" dur="450" fill="hold" accel="50000" decel="50000">
-                                          <p:stCondLst>
-                                            <p:cond delay="0"/>
-                                          </p:stCondLst>
-                                        </p:cTn>
-                                        <p:tgtEl>
-                                          <p:spTgt spid="15"/>
-                                        </p:tgtEl>
-                                        <p:attrNameLst>
-                                          <p:attrName>ppt_x</p:attrName>
-                                          <p:attrName>ppt_y</p:attrName>
-                                        </p:attrNameLst>
-                                      </p:cBhvr>
-                                    </p:animMotion>
-                                  </p:childTnLst>
-                                </p:cTn>
-                              </p:par>
-                              <p:par>
-                                <p:cTn id="55" presetID="10" presetClass="entr" presetSubtype="0" fill="hold" grpId="0" nodeType="withEffect">
-                                  <p:stCondLst>
-                                    <p:cond delay="0"/>
-                                  </p:stCondLst>
-                                  <p:childTnLst>
                                     <p:set>
                                       <p:cBhvr>
-                                        <p:cTn id="56" dur="1" fill="hold">
-                                          <p:stCondLst>
-                                            <p:cond delay="0"/>
-                                          </p:stCondLst>
-                                        </p:cTn>
-                                        <p:tgtEl>
-                                          <p:spTgt spid="16"/>
+                                        <p:cTn id="50" dur="1" fill="hold">
+                                          <p:stCondLst>
+                                            <p:cond delay="0"/>
+                                          </p:stCondLst>
+                                        </p:cTn>
+                                        <p:tgtEl>
+                                          <p:spTgt spid="18"/>
                                         </p:tgtEl>
                                         <p:attrNameLst>
                                           <p:attrName>style.visibility</p:attrName>
@@ -8317,9 +8528,9 @@
                                     </p:set>
                                     <p:anim calcmode="lin" valueType="num">
                                       <p:cBhvr additive="base">
-                                        <p:cTn id="57" dur="450" fill="hold"/>
-                                        <p:tgtEl>
-                                          <p:spTgt spid="16"/>
+                                        <p:cTn id="51" dur="450" fill="hold"/>
+                                        <p:tgtEl>
+                                          <p:spTgt spid="18"/>
                                         </p:tgtEl>
                                         <p:attrNameLst>
                                           <p:attrName>style.opacity</p:attrName>
@@ -8338,106 +8549,6 @@
                                         </p:tav>
                                       </p:tavLst>
                                     </p:anim>
-                                  </p:childTnLst>
-                                </p:cTn>
-                              </p:par>
-                              <p:par>
-                                <p:cTn id="58" presetID="42" presetClass="path" presetSubtype="0" fill="hold" grpId="0" nodeType="withEffect">
-                                  <p:stCondLst>
-                                    <p:cond delay="0"/>
-                                  </p:stCondLst>
-                                  <p:childTnLst>
-                                    <p:animMotion origin="layout" path="M 0 0 L 0.0000 -0.0200 E" pathEditMode="relative" rAng="0" ptsTypes="">
-                                      <p:cBhvr>
-                                        <p:cTn id="59" dur="450" fill="hold" accel="50000" decel="50000">
-                                          <p:stCondLst>
-                                            <p:cond delay="0"/>
-                                          </p:stCondLst>
-                                        </p:cTn>
-                                        <p:tgtEl>
-                                          <p:spTgt spid="16"/>
-                                        </p:tgtEl>
-                                        <p:attrNameLst>
-                                          <p:attrName>ppt_x</p:attrName>
-                                          <p:attrName>ppt_y</p:attrName>
-                                        </p:attrNameLst>
-                                      </p:cBhvr>
-                                    </p:animMotion>
-                                  </p:childTnLst>
-                                </p:cTn>
-                              </p:par>
-                              <p:par>
-                                <p:cTn id="60" presetID="10" presetClass="entr" presetSubtype="0" fill="hold" grpId="0" nodeType="withEffect">
-                                  <p:stCondLst>
-                                    <p:cond delay="0"/>
-                                  </p:stCondLst>
-                                  <p:childTnLst>
-                                    <p:set>
-                                      <p:cBhvr>
-                                        <p:cTn id="61" dur="1" fill="hold">
-                                          <p:stCondLst>
-                                            <p:cond delay="0"/>
-                                          </p:stCondLst>
-                                        </p:cTn>
-                                        <p:tgtEl>
-                                          <p:spTgt spid="17"/>
-                                        </p:tgtEl>
-                                        <p:attrNameLst>
-                                          <p:attrName>style.visibility</p:attrName>
-                                        </p:attrNameLst>
-                                      </p:cBhvr>
-                                      <p:to>
-                                        <p:strVal val="visible"/>
-                                      </p:to>
-                                    </p:set>
-                                    <p:anim calcmode="lin" valueType="num">
-                                      <p:cBhvr additive="base">
-                                        <p:cTn id="62" dur="450" fill="hold"/>
-                                        <p:tgtEl>
-                                          <p:spTgt spid="17"/>
-                                        </p:tgtEl>
-                                        <p:attrNameLst>
-                                          <p:attrName>style.opacity</p:attrName>
-                                        </p:attrNameLst>
-                                      </p:cBhvr>
-                                      <p:tavLst>
-                                        <p:tav tm="0">
-                                          <p:val>
-                                            <p:fltVal val="0"/>
-                                          </p:val>
-                                        </p:tav>
-                                        <p:tav tm="100000">
-                                          <p:val>
-                                            <p:fltVal val="1"/>
-                                          </p:val>
-                                        </p:tav>
-                                      </p:tavLst>
-                                    </p:anim>
-                                  </p:childTnLst>
-                                </p:cTn>
-                              </p:par>
-                              <p:par>
-                                <p:cTn id="63" presetID="42" presetClass="path" presetSubtype="0" fill="hold" grpId="0" nodeType="withEffect">
-                                  <p:stCondLst>
-                                    <p:cond delay="0"/>
-                                  </p:stCondLst>
-                                  <p:childTnLst>
-                                    <p:animMotion origin="layout" path="M 0 0 L 0.0000 -0.0200 E" pathEditMode="relative" rAng="0" ptsTypes="">
-                                      <p:cBhvr>
-                                        <p:cTn id="64" dur="450" fill="hold" accel="50000" decel="50000">
-                                          <p:stCondLst>
-                                            <p:cond delay="0"/>
-                                          </p:stCondLst>
-                                        </p:cTn>
-                                        <p:tgtEl>
-                                          <p:spTgt spid="17"/>
-                                        </p:tgtEl>
-                                        <p:attrNameLst>
-                                          <p:attrName>ppt_x</p:attrName>
-                                          <p:attrName>ppt_y</p:attrName>
-                                        </p:attrNameLst>
-                                      </p:cBhvr>
-                                    </p:animMotion>
                                   </p:childTnLst>
                                 </p:cTn>
                               </p:par>
@@ -8599,7 +8710,7 @@
                 </a:solidFill>
                 <a:latin typeface="Courier New"/>
               </a:rPr>
-              <a:t>13 / 14</a:t>
+              <a:t>13 / 15</a:t>
             </a:r>
           </a:p>
         </p:txBody>
@@ -8634,7 +8745,7 @@
                 </a:solidFill>
                 <a:latin typeface="Georgia"/>
               </a:rPr>
-              <a:t>Architecture</a:t>
+              <a:t>Copilot</a:t>
             </a:r>
           </a:p>
         </p:txBody>
@@ -8713,7 +8824,7 @@
                 </a:solidFill>
                 <a:latin typeface="Helvetica"/>
               </a:rPr>
-              <a:t>A narrow, explainable AWS stack — every layer inside the BAA perimeter.</a:t>
+              <a:t>The audit history is searchable in plain English — grounded in the real ledger.</a:t>
             </a:r>
           </a:p>
         </p:txBody>
@@ -8792,7 +8903,7 @@
                 </a:solidFill>
                 <a:latin typeface="Helvetica"/>
               </a:rPr>
-              <a:t>A narrow, explainable AWS stack — every layer inside the BAA perimeter.</a:t>
+              <a:t>The audit history is searchable in plain English — grounded in the real ledger.</a:t>
             </a:r>
           </a:p>
         </p:txBody>
@@ -8805,8 +8916,8 @@
         </p:nvSpPr>
         <p:spPr>
           <a:xfrm>
-            <a:off x="749808" y="1783080"/>
-            <a:ext cx="10698480" cy="411480"/>
+            <a:off x="1554480" y="2011680"/>
+            <a:ext cx="9052560" cy="411480"/>
           </a:xfrm>
           <a:prstGeom prst="rect">
             <a:avLst/>
@@ -8819,7 +8930,7 @@
           </a:bodyPr>
           <a:lstStyle/>
           <a:p>
-            <a:pPr algn="l"/>
+            <a:pPr algn="ctr"/>
             <a:r>
               <a:rPr sz="2200" b="1" i="0">
                 <a:solidFill>
@@ -8827,7 +8938,7 @@
                 </a:solidFill>
                 <a:latin typeface="Helvetica"/>
               </a:rPr>
-              <a:t>Identity.</a:t>
+              <a:t>Ask a question.</a:t>
             </a:r>
           </a:p>
         </p:txBody>
@@ -8840,8 +8951,8 @@
         </p:nvSpPr>
         <p:spPr>
           <a:xfrm>
-            <a:off x="749808" y="2240280"/>
-            <a:ext cx="10698480" cy="548640"/>
+            <a:off x="1554480" y="2468880"/>
+            <a:ext cx="9052560" cy="548640"/>
           </a:xfrm>
           <a:prstGeom prst="rect">
             <a:avLst/>
@@ -8854,7 +8965,7 @@
           </a:bodyPr>
           <a:lstStyle/>
           <a:p>
-            <a:pPr algn="l">
+            <a:pPr algn="ctr">
               <a:lnSpc>
                 <a:spcPct val="125000"/>
               </a:lnSpc>
@@ -8866,7 +8977,7 @@
                 </a:solidFill>
                 <a:latin typeface="Helvetica"/>
               </a:rPr>
-              <a:t>Amazon Cognito — MFA-ready, custom-attribute RBAC.</a:t>
+              <a:t>"Which BAAs expire in 30 days?"   "Show me ScriptGuard's signing history."</a:t>
             </a:r>
           </a:p>
         </p:txBody>
@@ -8879,8 +8990,8 @@
         </p:nvSpPr>
         <p:spPr>
           <a:xfrm>
-            <a:off x="749808" y="2715768"/>
-            <a:ext cx="10698480" cy="274320"/>
+            <a:off x="1554480" y="3429000"/>
+            <a:ext cx="9052560" cy="411480"/>
           </a:xfrm>
           <a:prstGeom prst="rect">
             <a:avLst/>
@@ -8893,42 +9004,7 @@
           </a:bodyPr>
           <a:lstStyle/>
           <a:p>
-            <a:pPr algn="l"/>
-            <a:r>
-              <a:rPr sz="1000" b="0" i="1">
-                <a:solidFill>
-                  <a:srgbClr val="C99856"/>
-                </a:solidFill>
-                <a:latin typeface="Courier New"/>
-              </a:rPr>
-              <a:t>cdk/lib/hipaa-baa-stack.ts</a:t>
-            </a:r>
-          </a:p>
-        </p:txBody>
-      </p:sp>
-      <p:sp>
-        <p:nvSpPr>
-          <p:cNvPr id="13" name="TextBox 12"/>
-          <p:cNvSpPr txBox="1"/>
-          <p:nvPr/>
-        </p:nvSpPr>
-        <p:spPr>
-          <a:xfrm>
-            <a:off x="749808" y="2715768"/>
-            <a:ext cx="10698480" cy="411480"/>
-          </a:xfrm>
-          <a:prstGeom prst="rect">
-            <a:avLst/>
-          </a:prstGeom>
-          <a:noFill/>
-        </p:spPr>
-        <p:txBody>
-          <a:bodyPr wrap="square" lIns="0" rIns="0" tIns="0" bIns="0" anchor="t">
-            <a:spAutoFit/>
-          </a:bodyPr>
-          <a:lstStyle/>
-          <a:p>
-            <a:pPr algn="l"/>
+            <a:pPr algn="ctr"/>
             <a:r>
               <a:rPr sz="2200" b="1" i="0">
                 <a:solidFill>
@@ -8936,21 +9012,21 @@
                 </a:solidFill>
                 <a:latin typeface="Helvetica"/>
               </a:rPr>
-              <a:t>Data.</a:t>
+              <a:t>Gemini 2.0 Flash.</a:t>
             </a:r>
           </a:p>
         </p:txBody>
       </p:sp>
       <p:sp>
         <p:nvSpPr>
-          <p:cNvPr id="14" name="TextBox 13"/>
+          <p:cNvPr id="13" name="TextBox 12"/>
           <p:cNvSpPr txBox="1"/>
           <p:nvPr/>
         </p:nvSpPr>
         <p:spPr>
           <a:xfrm>
-            <a:off x="749808" y="3172968"/>
-            <a:ext cx="10698480" cy="548640"/>
+            <a:off x="1554480" y="3886200"/>
+            <a:ext cx="9052560" cy="548640"/>
           </a:xfrm>
           <a:prstGeom prst="rect">
             <a:avLst/>
@@ -8963,7 +9039,7 @@
           </a:bodyPr>
           <a:lstStyle/>
           <a:p>
-            <a:pPr algn="l">
+            <a:pPr algn="ctr">
               <a:lnSpc>
                 <a:spcPct val="125000"/>
               </a:lnSpc>
@@ -8975,21 +9051,21 @@
                 </a:solidFill>
                 <a:latin typeface="Helvetica"/>
               </a:rPr>
-              <a:t>DynamoDB (PITR + streams)   ·   S3 (versioned, encrypted).</a:t>
+              <a:t>Streaming responses, grounded in audit logs — not model hallucination.</a:t>
             </a:r>
           </a:p>
         </p:txBody>
       </p:sp>
       <p:sp>
         <p:nvSpPr>
-          <p:cNvPr id="15" name="TextBox 14"/>
+          <p:cNvPr id="14" name="TextBox 13"/>
           <p:cNvSpPr txBox="1"/>
           <p:nvPr/>
         </p:nvSpPr>
         <p:spPr>
           <a:xfrm>
-            <a:off x="749808" y="3648456"/>
-            <a:ext cx="10698480" cy="274320"/>
+            <a:off x="1554480" y="4361688"/>
+            <a:ext cx="9052560" cy="274320"/>
           </a:xfrm>
           <a:prstGeom prst="rect">
             <a:avLst/>
@@ -9002,7 +9078,7 @@
           </a:bodyPr>
           <a:lstStyle/>
           <a:p>
-            <a:pPr algn="l"/>
+            <a:pPr algn="ctr"/>
             <a:r>
               <a:rPr sz="1000" b="0" i="1">
                 <a:solidFill>
@@ -9010,21 +9086,21 @@
                 </a:solidFill>
                 <a:latin typeface="Courier New"/>
               </a:rPr>
-              <a:t>AWS Healthcare Lens HCL_SEC1 / SEC7</a:t>
+              <a:t>src/lib/ai/gemini.ts</a:t>
             </a:r>
           </a:p>
         </p:txBody>
       </p:sp>
       <p:sp>
         <p:nvSpPr>
-          <p:cNvPr id="16" name="TextBox 15"/>
+          <p:cNvPr id="15" name="TextBox 14"/>
           <p:cNvSpPr txBox="1"/>
           <p:nvPr/>
         </p:nvSpPr>
         <p:spPr>
           <a:xfrm>
-            <a:off x="749808" y="3648456"/>
-            <a:ext cx="10698480" cy="411480"/>
+            <a:off x="1554480" y="4846320"/>
+            <a:ext cx="9052560" cy="411480"/>
           </a:xfrm>
           <a:prstGeom prst="rect">
             <a:avLst/>
@@ -9037,7 +9113,7 @@
           </a:bodyPr>
           <a:lstStyle/>
           <a:p>
-            <a:pPr algn="l"/>
+            <a:pPr algn="ctr"/>
             <a:r>
               <a:rPr sz="2200" b="1" i="0">
                 <a:solidFill>
@@ -9045,21 +9121,21 @@
                 </a:solidFill>
                 <a:latin typeface="Helvetica"/>
               </a:rPr>
-              <a:t>Cryptography.</a:t>
+              <a:t>RBAC enforced.</a:t>
             </a:r>
           </a:p>
         </p:txBody>
       </p:sp>
       <p:sp>
         <p:nvSpPr>
-          <p:cNvPr id="17" name="TextBox 16"/>
+          <p:cNvPr id="16" name="TextBox 15"/>
           <p:cNvSpPr txBox="1"/>
           <p:nvPr/>
         </p:nvSpPr>
         <p:spPr>
           <a:xfrm>
-            <a:off x="749808" y="4105656"/>
-            <a:ext cx="10698480" cy="548640"/>
+            <a:off x="1554480" y="5303520"/>
+            <a:ext cx="9052560" cy="548640"/>
           </a:xfrm>
           <a:prstGeom prst="rect">
             <a:avLst/>
@@ -9072,7 +9148,7 @@
           </a:bodyPr>
           <a:lstStyle/>
           <a:p>
-            <a:pPr algn="l">
+            <a:pPr algn="ctr">
               <a:lnSpc>
                 <a:spcPct val="125000"/>
               </a:lnSpc>
@@ -9084,21 +9160,21 @@
                 </a:solidFill>
                 <a:latin typeface="Helvetica"/>
               </a:rPr>
-              <a:t>AWS KMS — FIPS 140-2 Level 3 HSM, ECC NIST P-256.</a:t>
+              <a:t>The model sees only what the signed-in user is permitted to see.</a:t>
             </a:r>
           </a:p>
         </p:txBody>
       </p:sp>
       <p:sp>
         <p:nvSpPr>
-          <p:cNvPr id="18" name="TextBox 17"/>
+          <p:cNvPr id="17" name="TextBox 16"/>
           <p:cNvSpPr txBox="1"/>
           <p:nvPr/>
         </p:nvSpPr>
         <p:spPr>
           <a:xfrm>
-            <a:off x="749808" y="4581144"/>
-            <a:ext cx="10698480" cy="411480"/>
+            <a:off x="1554480" y="5779008"/>
+            <a:ext cx="9052560" cy="274320"/>
           </a:xfrm>
           <a:prstGeom prst="rect">
             <a:avLst/>
@@ -9111,128 +9187,15 @@
           </a:bodyPr>
           <a:lstStyle/>
           <a:p>
-            <a:pPr algn="l"/>
+            <a:pPr algn="ctr"/>
             <a:r>
-              <a:rPr sz="2200" b="1" i="0">
+              <a:rPr sz="1000" b="0" i="1">
                 <a:solidFill>
-                  <a:srgbClr val="ECE6DA"/>
+                  <a:srgbClr val="C99856"/>
                 </a:solidFill>
-                <a:latin typeface="Helvetica"/>
+                <a:latin typeface="Courier New"/>
               </a:rPr>
-              <a:t>Delivery.</a:t>
-            </a:r>
-          </a:p>
-        </p:txBody>
-      </p:sp>
-      <p:sp>
-        <p:nvSpPr>
-          <p:cNvPr id="19" name="TextBox 18"/>
-          <p:cNvSpPr txBox="1"/>
-          <p:nvPr/>
-        </p:nvSpPr>
-        <p:spPr>
-          <a:xfrm>
-            <a:off x="749808" y="5038344"/>
-            <a:ext cx="10698480" cy="548640"/>
-          </a:xfrm>
-          <a:prstGeom prst="rect">
-            <a:avLst/>
-          </a:prstGeom>
-          <a:noFill/>
-        </p:spPr>
-        <p:txBody>
-          <a:bodyPr wrap="square" lIns="0" rIns="0" tIns="0" bIns="0" anchor="t">
-            <a:spAutoFit/>
-          </a:bodyPr>
-          <a:lstStyle/>
-          <a:p>
-            <a:pPr algn="l">
-              <a:lnSpc>
-                <a:spcPct val="125000"/>
-              </a:lnSpc>
-            </a:pPr>
-            <a:r>
-              <a:rPr sz="1300" b="0" i="0">
-                <a:solidFill>
-                  <a:srgbClr val="C7C0B2"/>
-                </a:solidFill>
-                <a:latin typeface="Helvetica"/>
-              </a:rPr>
-              <a:t>Amazon SES — email stays inside the AWS BAA perimeter.</a:t>
-            </a:r>
-          </a:p>
-        </p:txBody>
-      </p:sp>
-      <p:sp>
-        <p:nvSpPr>
-          <p:cNvPr id="20" name="TextBox 19"/>
-          <p:cNvSpPr txBox="1"/>
-          <p:nvPr/>
-        </p:nvSpPr>
-        <p:spPr>
-          <a:xfrm>
-            <a:off x="749808" y="5513832"/>
-            <a:ext cx="10698480" cy="411480"/>
-          </a:xfrm>
-          <a:prstGeom prst="rect">
-            <a:avLst/>
-          </a:prstGeom>
-          <a:noFill/>
-        </p:spPr>
-        <p:txBody>
-          <a:bodyPr wrap="square" lIns="0" rIns="0" tIns="0" bIns="0" anchor="t">
-            <a:spAutoFit/>
-          </a:bodyPr>
-          <a:lstStyle/>
-          <a:p>
-            <a:pPr algn="l"/>
-            <a:r>
-              <a:rPr sz="2200" b="1" i="0">
-                <a:solidFill>
-                  <a:srgbClr val="ECE6DA"/>
-                </a:solidFill>
-                <a:latin typeface="Helvetica"/>
-              </a:rPr>
-              <a:t>Intelligence.</a:t>
-            </a:r>
-          </a:p>
-        </p:txBody>
-      </p:sp>
-      <p:sp>
-        <p:nvSpPr>
-          <p:cNvPr id="21" name="TextBox 20"/>
-          <p:cNvSpPr txBox="1"/>
-          <p:nvPr/>
-        </p:nvSpPr>
-        <p:spPr>
-          <a:xfrm>
-            <a:off x="749808" y="5971032"/>
-            <a:ext cx="10698480" cy="548640"/>
-          </a:xfrm>
-          <a:prstGeom prst="rect">
-            <a:avLst/>
-          </a:prstGeom>
-          <a:noFill/>
-        </p:spPr>
-        <p:txBody>
-          <a:bodyPr wrap="square" lIns="0" rIns="0" tIns="0" bIns="0" anchor="t">
-            <a:spAutoFit/>
-          </a:bodyPr>
-          <a:lstStyle/>
-          <a:p>
-            <a:pPr algn="l">
-              <a:lnSpc>
-                <a:spcPct val="125000"/>
-              </a:lnSpc>
-            </a:pPr>
-            <a:r>
-              <a:rPr sz="1300" b="0" i="0">
-                <a:solidFill>
-                  <a:srgbClr val="C7C0B2"/>
-                </a:solidFill>
-                <a:latin typeface="Helvetica"/>
-              </a:rPr>
-              <a:t>Google Gemini — grounded, streamed, scoped.</a:t>
+              <a:t>45 CFR §164.308(a)(4)</a:t>
             </a:r>
           </a:p>
         </p:txBody>
@@ -9561,14 +9524,39 @@
                                 </p:cTn>
                               </p:par>
                               <p:par>
-                                <p:cTn id="24" presetID="10" presetClass="entr" presetSubtype="0" fill="hold" grpId="0" nodeType="withEffect">
+                                <p:cTn id="24" presetID="42" presetClass="path" presetSubtype="0" fill="hold" grpId="0" nodeType="withEffect">
                                   <p:stCondLst>
                                     <p:cond delay="700"/>
                                   </p:stCondLst>
                                   <p:childTnLst>
+                                    <p:animMotion origin="layout" path="M 0 0 L 0.0000 -0.0200 E" pathEditMode="relative" rAng="0" ptsTypes="">
+                                      <p:cBhvr>
+                                        <p:cTn id="25" dur="450" fill="hold" accel="50000" decel="50000">
+                                          <p:stCondLst>
+                                            <p:cond delay="0"/>
+                                          </p:stCondLst>
+                                        </p:cTn>
+                                        <p:tgtEl>
+                                          <p:spTgt spid="10"/>
+                                        </p:tgtEl>
+                                        <p:attrNameLst>
+                                          <p:attrName>ppt_x</p:attrName>
+                                          <p:attrName>ppt_y</p:attrName>
+                                        </p:attrNameLst>
+                                      </p:cBhvr>
+                                    </p:animMotion>
+                                  </p:childTnLst>
+                                </p:cTn>
+                              </p:par>
+                              <p:par>
+                                <p:cTn id="26" presetID="10" presetClass="entr" presetSubtype="0" fill="hold" grpId="0" nodeType="withEffect">
+                                  <p:stCondLst>
+                                    <p:cond delay="700"/>
+                                  </p:stCondLst>
+                                  <p:childTnLst>
                                     <p:set>
                                       <p:cBhvr>
-                                        <p:cTn id="25" dur="1" fill="hold">
+                                        <p:cTn id="27" dur="1" fill="hold">
                                           <p:stCondLst>
                                             <p:cond delay="0"/>
                                           </p:stCondLst>
@@ -9586,7 +9574,7 @@
                                     </p:set>
                                     <p:anim calcmode="lin" valueType="num">
                                       <p:cBhvr additive="base">
-                                        <p:cTn id="26" dur="450" fill="hold"/>
+                                        <p:cTn id="28" dur="450" fill="hold"/>
                                         <p:tgtEl>
                                           <p:spTgt spid="11"/>
                                         </p:tgtEl>
@@ -9611,52 +9599,27 @@
                                 </p:cTn>
                               </p:par>
                               <p:par>
-                                <p:cTn id="27" presetID="10" presetClass="entr" presetSubtype="0" fill="hold" grpId="0" nodeType="withEffect">
+                                <p:cTn id="29" presetID="42" presetClass="path" presetSubtype="0" fill="hold" grpId="0" nodeType="withEffect">
                                   <p:stCondLst>
                                     <p:cond delay="700"/>
                                   </p:stCondLst>
                                   <p:childTnLst>
-                                    <p:set>
-                                      <p:cBhvr>
-                                        <p:cTn id="28" dur="1" fill="hold">
-                                          <p:stCondLst>
-                                            <p:cond delay="0"/>
-                                          </p:stCondLst>
-                                        </p:cTn>
-                                        <p:tgtEl>
-                                          <p:spTgt spid="12"/>
-                                        </p:tgtEl>
-                                        <p:attrNameLst>
-                                          <p:attrName>style.visibility</p:attrName>
-                                        </p:attrNameLst>
-                                      </p:cBhvr>
-                                      <p:to>
-                                        <p:strVal val="visible"/>
-                                      </p:to>
-                                    </p:set>
-                                    <p:anim calcmode="lin" valueType="num">
-                                      <p:cBhvr additive="base">
-                                        <p:cTn id="29" dur="450" fill="hold"/>
-                                        <p:tgtEl>
-                                          <p:spTgt spid="12"/>
-                                        </p:tgtEl>
-                                        <p:attrNameLst>
-                                          <p:attrName>style.opacity</p:attrName>
-                                        </p:attrNameLst>
-                                      </p:cBhvr>
-                                      <p:tavLst>
-                                        <p:tav tm="0">
-                                          <p:val>
-                                            <p:fltVal val="0"/>
-                                          </p:val>
-                                        </p:tav>
-                                        <p:tav tm="100000">
-                                          <p:val>
-                                            <p:fltVal val="1"/>
-                                          </p:val>
-                                        </p:tav>
-                                      </p:tavLst>
-                                    </p:anim>
+                                    <p:animMotion origin="layout" path="M 0 0 L 0.0000 -0.0200 E" pathEditMode="relative" rAng="0" ptsTypes="">
+                                      <p:cBhvr>
+                                        <p:cTn id="30" dur="450" fill="hold" accel="50000" decel="50000">
+                                          <p:stCondLst>
+                                            <p:cond delay="0"/>
+                                          </p:stCondLst>
+                                        </p:cTn>
+                                        <p:tgtEl>
+                                          <p:spTgt spid="11"/>
+                                        </p:tgtEl>
+                                        <p:attrNameLst>
+                                          <p:attrName>ppt_x</p:attrName>
+                                          <p:attrName>ppt_y</p:attrName>
+                                        </p:attrNameLst>
+                                      </p:cBhvr>
+                                    </p:animMotion>
                                   </p:childTnLst>
                                 </p:cTn>
                               </p:par>
@@ -9667,32 +9630,32 @@
                     </p:cTn>
                   </p:par>
                   <p:par>
-                    <p:cTn id="30" fill="hold">
+                    <p:cTn id="31" fill="hold">
                       <p:stCondLst>
                         <p:cond delay="indefinite"/>
                       </p:stCondLst>
                       <p:childTnLst>
                         <p:par>
-                          <p:cTn id="31" fill="hold">
+                          <p:cTn id="32" fill="hold">
                             <p:stCondLst>
                               <p:cond delay="0"/>
                             </p:stCondLst>
                             <p:childTnLst>
                               <p:par>
-                                <p:cTn id="32" presetID="10" presetClass="entr" presetSubtype="0" fill="hold" grpId="0" nodeType="clickEffect">
+                                <p:cTn id="33" presetID="10" presetClass="entr" presetSubtype="0" fill="hold" grpId="0" nodeType="clickEffect">
                                   <p:stCondLst>
                                     <p:cond delay="0"/>
                                   </p:stCondLst>
                                   <p:childTnLst>
                                     <p:set>
                                       <p:cBhvr>
-                                        <p:cTn id="33" dur="1" fill="hold">
-                                          <p:stCondLst>
-                                            <p:cond delay="0"/>
-                                          </p:stCondLst>
-                                        </p:cTn>
-                                        <p:tgtEl>
-                                          <p:spTgt spid="13"/>
+                                        <p:cTn id="34" dur="1" fill="hold">
+                                          <p:stCondLst>
+                                            <p:cond delay="0"/>
+                                          </p:stCondLst>
+                                        </p:cTn>
+                                        <p:tgtEl>
+                                          <p:spTgt spid="12"/>
                                         </p:tgtEl>
                                         <p:attrNameLst>
                                           <p:attrName>style.visibility</p:attrName>
@@ -9704,9 +9667,9 @@
                                     </p:set>
                                     <p:anim calcmode="lin" valueType="num">
                                       <p:cBhvr additive="base">
-                                        <p:cTn id="34" dur="450" fill="hold"/>
-                                        <p:tgtEl>
-                                          <p:spTgt spid="13"/>
+                                        <p:cTn id="35" dur="450" fill="hold"/>
+                                        <p:tgtEl>
+                                          <p:spTgt spid="12"/>
                                         </p:tgtEl>
                                         <p:attrNameLst>
                                           <p:attrName>style.opacity</p:attrName>
@@ -9729,70 +9692,45 @@
                                 </p:cTn>
                               </p:par>
                               <p:par>
-                                <p:cTn id="35" presetID="10" presetClass="entr" presetSubtype="0" fill="hold" grpId="0" nodeType="withEffect">
+                                <p:cTn id="36" presetID="42" presetClass="path" presetSubtype="0" fill="hold" grpId="0" nodeType="withEffect">
                                   <p:stCondLst>
                                     <p:cond delay="0"/>
                                   </p:stCondLst>
                                   <p:childTnLst>
+                                    <p:animMotion origin="layout" path="M 0 0 L 0.0000 -0.0200 E" pathEditMode="relative" rAng="0" ptsTypes="">
+                                      <p:cBhvr>
+                                        <p:cTn id="37" dur="450" fill="hold" accel="50000" decel="50000">
+                                          <p:stCondLst>
+                                            <p:cond delay="0"/>
+                                          </p:stCondLst>
+                                        </p:cTn>
+                                        <p:tgtEl>
+                                          <p:spTgt spid="12"/>
+                                        </p:tgtEl>
+                                        <p:attrNameLst>
+                                          <p:attrName>ppt_x</p:attrName>
+                                          <p:attrName>ppt_y</p:attrName>
+                                        </p:attrNameLst>
+                                      </p:cBhvr>
+                                    </p:animMotion>
+                                  </p:childTnLst>
+                                </p:cTn>
+                              </p:par>
+                              <p:par>
+                                <p:cTn id="38" presetID="10" presetClass="entr" presetSubtype="0" fill="hold" grpId="0" nodeType="withEffect">
+                                  <p:stCondLst>
+                                    <p:cond delay="0"/>
+                                  </p:stCondLst>
+                                  <p:childTnLst>
                                     <p:set>
                                       <p:cBhvr>
-                                        <p:cTn id="36" dur="1" fill="hold">
-                                          <p:stCondLst>
-                                            <p:cond delay="0"/>
-                                          </p:stCondLst>
-                                        </p:cTn>
-                                        <p:tgtEl>
-                                          <p:spTgt spid="14"/>
-                                        </p:tgtEl>
-                                        <p:attrNameLst>
-                                          <p:attrName>style.visibility</p:attrName>
-                                        </p:attrNameLst>
-                                      </p:cBhvr>
-                                      <p:to>
-                                        <p:strVal val="visible"/>
-                                      </p:to>
-                                    </p:set>
-                                    <p:anim calcmode="lin" valueType="num">
-                                      <p:cBhvr additive="base">
-                                        <p:cTn id="37" dur="450" fill="hold"/>
-                                        <p:tgtEl>
-                                          <p:spTgt spid="14"/>
-                                        </p:tgtEl>
-                                        <p:attrNameLst>
-                                          <p:attrName>style.opacity</p:attrName>
-                                        </p:attrNameLst>
-                                      </p:cBhvr>
-                                      <p:tavLst>
-                                        <p:tav tm="0">
-                                          <p:val>
-                                            <p:fltVal val="0"/>
-                                          </p:val>
-                                        </p:tav>
-                                        <p:tav tm="100000">
-                                          <p:val>
-                                            <p:fltVal val="1"/>
-                                          </p:val>
-                                        </p:tav>
-                                      </p:tavLst>
-                                    </p:anim>
-                                  </p:childTnLst>
-                                </p:cTn>
-                              </p:par>
-                              <p:par>
-                                <p:cTn id="38" presetID="10" presetClass="entr" presetSubtype="0" fill="hold" grpId="0" nodeType="withEffect">
-                                  <p:stCondLst>
-                                    <p:cond delay="0"/>
-                                  </p:stCondLst>
-                                  <p:childTnLst>
-                                    <p:set>
-                                      <p:cBhvr>
                                         <p:cTn id="39" dur="1" fill="hold">
                                           <p:stCondLst>
                                             <p:cond delay="0"/>
                                           </p:stCondLst>
                                         </p:cTn>
                                         <p:tgtEl>
-                                          <p:spTgt spid="15"/>
+                                          <p:spTgt spid="13"/>
                                         </p:tgtEl>
                                         <p:attrNameLst>
                                           <p:attrName>style.visibility</p:attrName>
@@ -9806,7 +9744,7 @@
                                       <p:cBhvr additive="base">
                                         <p:cTn id="40" dur="450" fill="hold"/>
                                         <p:tgtEl>
-                                          <p:spTgt spid="15"/>
+                                          <p:spTgt spid="13"/>
                                         </p:tgtEl>
                                         <p:attrNameLst>
                                           <p:attrName>style.opacity</p:attrName>
@@ -9825,6 +9763,106 @@
                                         </p:tav>
                                       </p:tavLst>
                                     </p:anim>
+                                  </p:childTnLst>
+                                </p:cTn>
+                              </p:par>
+                              <p:par>
+                                <p:cTn id="41" presetID="42" presetClass="path" presetSubtype="0" fill="hold" grpId="0" nodeType="withEffect">
+                                  <p:stCondLst>
+                                    <p:cond delay="0"/>
+                                  </p:stCondLst>
+                                  <p:childTnLst>
+                                    <p:animMotion origin="layout" path="M 0 0 L 0.0000 -0.0200 E" pathEditMode="relative" rAng="0" ptsTypes="">
+                                      <p:cBhvr>
+                                        <p:cTn id="42" dur="450" fill="hold" accel="50000" decel="50000">
+                                          <p:stCondLst>
+                                            <p:cond delay="0"/>
+                                          </p:stCondLst>
+                                        </p:cTn>
+                                        <p:tgtEl>
+                                          <p:spTgt spid="13"/>
+                                        </p:tgtEl>
+                                        <p:attrNameLst>
+                                          <p:attrName>ppt_x</p:attrName>
+                                          <p:attrName>ppt_y</p:attrName>
+                                        </p:attrNameLst>
+                                      </p:cBhvr>
+                                    </p:animMotion>
+                                  </p:childTnLst>
+                                </p:cTn>
+                              </p:par>
+                              <p:par>
+                                <p:cTn id="43" presetID="10" presetClass="entr" presetSubtype="0" fill="hold" grpId="0" nodeType="withEffect">
+                                  <p:stCondLst>
+                                    <p:cond delay="0"/>
+                                  </p:stCondLst>
+                                  <p:childTnLst>
+                                    <p:set>
+                                      <p:cBhvr>
+                                        <p:cTn id="44" dur="1" fill="hold">
+                                          <p:stCondLst>
+                                            <p:cond delay="0"/>
+                                          </p:stCondLst>
+                                        </p:cTn>
+                                        <p:tgtEl>
+                                          <p:spTgt spid="14"/>
+                                        </p:tgtEl>
+                                        <p:attrNameLst>
+                                          <p:attrName>style.visibility</p:attrName>
+                                        </p:attrNameLst>
+                                      </p:cBhvr>
+                                      <p:to>
+                                        <p:strVal val="visible"/>
+                                      </p:to>
+                                    </p:set>
+                                    <p:anim calcmode="lin" valueType="num">
+                                      <p:cBhvr additive="base">
+                                        <p:cTn id="45" dur="450" fill="hold"/>
+                                        <p:tgtEl>
+                                          <p:spTgt spid="14"/>
+                                        </p:tgtEl>
+                                        <p:attrNameLst>
+                                          <p:attrName>style.opacity</p:attrName>
+                                        </p:attrNameLst>
+                                      </p:cBhvr>
+                                      <p:tavLst>
+                                        <p:tav tm="0">
+                                          <p:val>
+                                            <p:fltVal val="0"/>
+                                          </p:val>
+                                        </p:tav>
+                                        <p:tav tm="100000">
+                                          <p:val>
+                                            <p:fltVal val="1"/>
+                                          </p:val>
+                                        </p:tav>
+                                      </p:tavLst>
+                                    </p:anim>
+                                  </p:childTnLst>
+                                </p:cTn>
+                              </p:par>
+                              <p:par>
+                                <p:cTn id="46" presetID="42" presetClass="path" presetSubtype="0" fill="hold" grpId="0" nodeType="withEffect">
+                                  <p:stCondLst>
+                                    <p:cond delay="0"/>
+                                  </p:stCondLst>
+                                  <p:childTnLst>
+                                    <p:animMotion origin="layout" path="M 0 0 L 0.0000 -0.0200 E" pathEditMode="relative" rAng="0" ptsTypes="">
+                                      <p:cBhvr>
+                                        <p:cTn id="47" dur="450" fill="hold" accel="50000" decel="50000">
+                                          <p:stCondLst>
+                                            <p:cond delay="0"/>
+                                          </p:stCondLst>
+                                        </p:cTn>
+                                        <p:tgtEl>
+                                          <p:spTgt spid="14"/>
+                                        </p:tgtEl>
+                                        <p:attrNameLst>
+                                          <p:attrName>ppt_x</p:attrName>
+                                          <p:attrName>ppt_y</p:attrName>
+                                        </p:attrNameLst>
+                                      </p:cBhvr>
+                                    </p:animMotion>
                                   </p:childTnLst>
                                 </p:cTn>
                               </p:par>
@@ -9835,32 +9873,32 @@
                     </p:cTn>
                   </p:par>
                   <p:par>
-                    <p:cTn id="41" fill="hold">
+                    <p:cTn id="48" fill="hold">
                       <p:stCondLst>
                         <p:cond delay="indefinite"/>
                       </p:stCondLst>
                       <p:childTnLst>
                         <p:par>
-                          <p:cTn id="42" fill="hold">
+                          <p:cTn id="49" fill="hold">
                             <p:stCondLst>
                               <p:cond delay="0"/>
                             </p:stCondLst>
                             <p:childTnLst>
                               <p:par>
-                                <p:cTn id="43" presetID="10" presetClass="entr" presetSubtype="0" fill="hold" grpId="0" nodeType="clickEffect">
+                                <p:cTn id="50" presetID="10" presetClass="entr" presetSubtype="0" fill="hold" grpId="0" nodeType="clickEffect">
                                   <p:stCondLst>
                                     <p:cond delay="0"/>
                                   </p:stCondLst>
                                   <p:childTnLst>
                                     <p:set>
                                       <p:cBhvr>
-                                        <p:cTn id="44" dur="1" fill="hold">
-                                          <p:stCondLst>
-                                            <p:cond delay="0"/>
-                                          </p:stCondLst>
-                                        </p:cTn>
-                                        <p:tgtEl>
-                                          <p:spTgt spid="16"/>
+                                        <p:cTn id="51" dur="1" fill="hold">
+                                          <p:stCondLst>
+                                            <p:cond delay="0"/>
+                                          </p:stCondLst>
+                                        </p:cTn>
+                                        <p:tgtEl>
+                                          <p:spTgt spid="15"/>
                                         </p:tgtEl>
                                         <p:attrNameLst>
                                           <p:attrName>style.visibility</p:attrName>
@@ -9872,9 +9910,9 @@
                                     </p:set>
                                     <p:anim calcmode="lin" valueType="num">
                                       <p:cBhvr additive="base">
-                                        <p:cTn id="45" dur="450" fill="hold"/>
-                                        <p:tgtEl>
-                                          <p:spTgt spid="16"/>
+                                        <p:cTn id="52" dur="450" fill="hold"/>
+                                        <p:tgtEl>
+                                          <p:spTgt spid="15"/>
                                         </p:tgtEl>
                                         <p:attrNameLst>
                                           <p:attrName>style.opacity</p:attrName>
@@ -9897,20 +9935,45 @@
                                 </p:cTn>
                               </p:par>
                               <p:par>
-                                <p:cTn id="46" presetID="10" presetClass="entr" presetSubtype="0" fill="hold" grpId="0" nodeType="withEffect">
+                                <p:cTn id="53" presetID="42" presetClass="path" presetSubtype="0" fill="hold" grpId="0" nodeType="withEffect">
                                   <p:stCondLst>
                                     <p:cond delay="0"/>
                                   </p:stCondLst>
                                   <p:childTnLst>
+                                    <p:animMotion origin="layout" path="M 0 0 L 0.0000 -0.0200 E" pathEditMode="relative" rAng="0" ptsTypes="">
+                                      <p:cBhvr>
+                                        <p:cTn id="54" dur="450" fill="hold" accel="50000" decel="50000">
+                                          <p:stCondLst>
+                                            <p:cond delay="0"/>
+                                          </p:stCondLst>
+                                        </p:cTn>
+                                        <p:tgtEl>
+                                          <p:spTgt spid="15"/>
+                                        </p:tgtEl>
+                                        <p:attrNameLst>
+                                          <p:attrName>ppt_x</p:attrName>
+                                          <p:attrName>ppt_y</p:attrName>
+                                        </p:attrNameLst>
+                                      </p:cBhvr>
+                                    </p:animMotion>
+                                  </p:childTnLst>
+                                </p:cTn>
+                              </p:par>
+                              <p:par>
+                                <p:cTn id="55" presetID="10" presetClass="entr" presetSubtype="0" fill="hold" grpId="0" nodeType="withEffect">
+                                  <p:stCondLst>
+                                    <p:cond delay="0"/>
+                                  </p:stCondLst>
+                                  <p:childTnLst>
                                     <p:set>
                                       <p:cBhvr>
-                                        <p:cTn id="47" dur="1" fill="hold">
-                                          <p:stCondLst>
-                                            <p:cond delay="0"/>
-                                          </p:stCondLst>
-                                        </p:cTn>
-                                        <p:tgtEl>
-                                          <p:spTgt spid="17"/>
+                                        <p:cTn id="56" dur="1" fill="hold">
+                                          <p:stCondLst>
+                                            <p:cond delay="0"/>
+                                          </p:stCondLst>
+                                        </p:cTn>
+                                        <p:tgtEl>
+                                          <p:spTgt spid="16"/>
                                         </p:tgtEl>
                                         <p:attrNameLst>
                                           <p:attrName>style.visibility</p:attrName>
@@ -9922,9 +9985,9 @@
                                     </p:set>
                                     <p:anim calcmode="lin" valueType="num">
                                       <p:cBhvr additive="base">
-                                        <p:cTn id="48" dur="450" fill="hold"/>
-                                        <p:tgtEl>
-                                          <p:spTgt spid="17"/>
+                                        <p:cTn id="57" dur="450" fill="hold"/>
+                                        <p:tgtEl>
+                                          <p:spTgt spid="16"/>
                                         </p:tgtEl>
                                         <p:attrNameLst>
                                           <p:attrName>style.opacity</p:attrName>
@@ -9946,39 +10009,46 @@
                                   </p:childTnLst>
                                 </p:cTn>
                               </p:par>
-                            </p:childTnLst>
-                          </p:cTn>
-                        </p:par>
-                      </p:childTnLst>
-                    </p:cTn>
-                  </p:par>
-                  <p:par>
-                    <p:cTn id="49" fill="hold">
-                      <p:stCondLst>
-                        <p:cond delay="indefinite"/>
-                      </p:stCondLst>
-                      <p:childTnLst>
-                        <p:par>
-                          <p:cTn id="50" fill="hold">
-                            <p:stCondLst>
-                              <p:cond delay="0"/>
-                            </p:stCondLst>
-                            <p:childTnLst>
-                              <p:par>
-                                <p:cTn id="51" presetID="10" presetClass="entr" presetSubtype="0" fill="hold" grpId="0" nodeType="clickEffect">
+                              <p:par>
+                                <p:cTn id="58" presetID="42" presetClass="path" presetSubtype="0" fill="hold" grpId="0" nodeType="withEffect">
                                   <p:stCondLst>
                                     <p:cond delay="0"/>
                                   </p:stCondLst>
                                   <p:childTnLst>
+                                    <p:animMotion origin="layout" path="M 0 0 L 0.0000 -0.0200 E" pathEditMode="relative" rAng="0" ptsTypes="">
+                                      <p:cBhvr>
+                                        <p:cTn id="59" dur="450" fill="hold" accel="50000" decel="50000">
+                                          <p:stCondLst>
+                                            <p:cond delay="0"/>
+                                          </p:stCondLst>
+                                        </p:cTn>
+                                        <p:tgtEl>
+                                          <p:spTgt spid="16"/>
+                                        </p:tgtEl>
+                                        <p:attrNameLst>
+                                          <p:attrName>ppt_x</p:attrName>
+                                          <p:attrName>ppt_y</p:attrName>
+                                        </p:attrNameLst>
+                                      </p:cBhvr>
+                                    </p:animMotion>
+                                  </p:childTnLst>
+                                </p:cTn>
+                              </p:par>
+                              <p:par>
+                                <p:cTn id="60" presetID="10" presetClass="entr" presetSubtype="0" fill="hold" grpId="0" nodeType="withEffect">
+                                  <p:stCondLst>
+                                    <p:cond delay="0"/>
+                                  </p:stCondLst>
+                                  <p:childTnLst>
                                     <p:set>
                                       <p:cBhvr>
-                                        <p:cTn id="52" dur="1" fill="hold">
-                                          <p:stCondLst>
-                                            <p:cond delay="0"/>
-                                          </p:stCondLst>
-                                        </p:cTn>
-                                        <p:tgtEl>
-                                          <p:spTgt spid="18"/>
+                                        <p:cTn id="61" dur="1" fill="hold">
+                                          <p:stCondLst>
+                                            <p:cond delay="0"/>
+                                          </p:stCondLst>
+                                        </p:cTn>
+                                        <p:tgtEl>
+                                          <p:spTgt spid="17"/>
                                         </p:tgtEl>
                                         <p:attrNameLst>
                                           <p:attrName>style.visibility</p:attrName>
@@ -9990,9 +10060,9 @@
                                     </p:set>
                                     <p:anim calcmode="lin" valueType="num">
                                       <p:cBhvr additive="base">
-                                        <p:cTn id="53" dur="450" fill="hold"/>
-                                        <p:tgtEl>
-                                          <p:spTgt spid="18"/>
+                                        <p:cTn id="62" dur="450" fill="hold"/>
+                                        <p:tgtEl>
+                                          <p:spTgt spid="17"/>
                                         </p:tgtEl>
                                         <p:attrNameLst>
                                           <p:attrName>style.opacity</p:attrName>
@@ -10015,170 +10085,27 @@
                                 </p:cTn>
                               </p:par>
                               <p:par>
-                                <p:cTn id="54" presetID="10" presetClass="entr" presetSubtype="0" fill="hold" grpId="0" nodeType="withEffect">
+                                <p:cTn id="63" presetID="42" presetClass="path" presetSubtype="0" fill="hold" grpId="0" nodeType="withEffect">
                                   <p:stCondLst>
                                     <p:cond delay="0"/>
                                   </p:stCondLst>
                                   <p:childTnLst>
-                                    <p:set>
-                                      <p:cBhvr>
-                                        <p:cTn id="55" dur="1" fill="hold">
-                                          <p:stCondLst>
-                                            <p:cond delay="0"/>
-                                          </p:stCondLst>
-                                        </p:cTn>
-                                        <p:tgtEl>
-                                          <p:spTgt spid="19"/>
-                                        </p:tgtEl>
-                                        <p:attrNameLst>
-                                          <p:attrName>style.visibility</p:attrName>
-                                        </p:attrNameLst>
-                                      </p:cBhvr>
-                                      <p:to>
-                                        <p:strVal val="visible"/>
-                                      </p:to>
-                                    </p:set>
-                                    <p:anim calcmode="lin" valueType="num">
-                                      <p:cBhvr additive="base">
-                                        <p:cTn id="56" dur="450" fill="hold"/>
-                                        <p:tgtEl>
-                                          <p:spTgt spid="19"/>
-                                        </p:tgtEl>
-                                        <p:attrNameLst>
-                                          <p:attrName>style.opacity</p:attrName>
-                                        </p:attrNameLst>
-                                      </p:cBhvr>
-                                      <p:tavLst>
-                                        <p:tav tm="0">
-                                          <p:val>
-                                            <p:fltVal val="0"/>
-                                          </p:val>
-                                        </p:tav>
-                                        <p:tav tm="100000">
-                                          <p:val>
-                                            <p:fltVal val="1"/>
-                                          </p:val>
-                                        </p:tav>
-                                      </p:tavLst>
-                                    </p:anim>
-                                  </p:childTnLst>
-                                </p:cTn>
-                              </p:par>
-                            </p:childTnLst>
-                          </p:cTn>
-                        </p:par>
-                      </p:childTnLst>
-                    </p:cTn>
-                  </p:par>
-                  <p:par>
-                    <p:cTn id="57" fill="hold">
-                      <p:stCondLst>
-                        <p:cond delay="indefinite"/>
-                      </p:stCondLst>
-                      <p:childTnLst>
-                        <p:par>
-                          <p:cTn id="58" fill="hold">
-                            <p:stCondLst>
-                              <p:cond delay="0"/>
-                            </p:stCondLst>
-                            <p:childTnLst>
-                              <p:par>
-                                <p:cTn id="59" presetID="10" presetClass="entr" presetSubtype="0" fill="hold" grpId="0" nodeType="clickEffect">
-                                  <p:stCondLst>
-                                    <p:cond delay="0"/>
-                                  </p:stCondLst>
-                                  <p:childTnLst>
-                                    <p:set>
-                                      <p:cBhvr>
-                                        <p:cTn id="60" dur="1" fill="hold">
-                                          <p:stCondLst>
-                                            <p:cond delay="0"/>
-                                          </p:stCondLst>
-                                        </p:cTn>
-                                        <p:tgtEl>
-                                          <p:spTgt spid="20"/>
-                                        </p:tgtEl>
-                                        <p:attrNameLst>
-                                          <p:attrName>style.visibility</p:attrName>
-                                        </p:attrNameLst>
-                                      </p:cBhvr>
-                                      <p:to>
-                                        <p:strVal val="visible"/>
-                                      </p:to>
-                                    </p:set>
-                                    <p:anim calcmode="lin" valueType="num">
-                                      <p:cBhvr additive="base">
-                                        <p:cTn id="61" dur="450" fill="hold"/>
-                                        <p:tgtEl>
-                                          <p:spTgt spid="20"/>
-                                        </p:tgtEl>
-                                        <p:attrNameLst>
-                                          <p:attrName>style.opacity</p:attrName>
-                                        </p:attrNameLst>
-                                      </p:cBhvr>
-                                      <p:tavLst>
-                                        <p:tav tm="0">
-                                          <p:val>
-                                            <p:fltVal val="0"/>
-                                          </p:val>
-                                        </p:tav>
-                                        <p:tav tm="100000">
-                                          <p:val>
-                                            <p:fltVal val="1"/>
-                                          </p:val>
-                                        </p:tav>
-                                      </p:tavLst>
-                                    </p:anim>
-                                  </p:childTnLst>
-                                </p:cTn>
-                              </p:par>
-                              <p:par>
-                                <p:cTn id="62" presetID="10" presetClass="entr" presetSubtype="0" fill="hold" grpId="0" nodeType="withEffect">
-                                  <p:stCondLst>
-                                    <p:cond delay="0"/>
-                                  </p:stCondLst>
-                                  <p:childTnLst>
-                                    <p:set>
-                                      <p:cBhvr>
-                                        <p:cTn id="63" dur="1" fill="hold">
-                                          <p:stCondLst>
-                                            <p:cond delay="0"/>
-                                          </p:stCondLst>
-                                        </p:cTn>
-                                        <p:tgtEl>
-                                          <p:spTgt spid="21"/>
-                                        </p:tgtEl>
-                                        <p:attrNameLst>
-                                          <p:attrName>style.visibility</p:attrName>
-                                        </p:attrNameLst>
-                                      </p:cBhvr>
-                                      <p:to>
-                                        <p:strVal val="visible"/>
-                                      </p:to>
-                                    </p:set>
-                                    <p:anim calcmode="lin" valueType="num">
-                                      <p:cBhvr additive="base">
-                                        <p:cTn id="64" dur="450" fill="hold"/>
-                                        <p:tgtEl>
-                                          <p:spTgt spid="21"/>
-                                        </p:tgtEl>
-                                        <p:attrNameLst>
-                                          <p:attrName>style.opacity</p:attrName>
-                                        </p:attrNameLst>
-                                      </p:cBhvr>
-                                      <p:tavLst>
-                                        <p:tav tm="0">
-                                          <p:val>
-                                            <p:fltVal val="0"/>
-                                          </p:val>
-                                        </p:tav>
-                                        <p:tav tm="100000">
-                                          <p:val>
-                                            <p:fltVal val="1"/>
-                                          </p:val>
-                                        </p:tav>
-                                      </p:tavLst>
-                                    </p:anim>
+                                    <p:animMotion origin="layout" path="M 0 0 L 0.0000 -0.0200 E" pathEditMode="relative" rAng="0" ptsTypes="">
+                                      <p:cBhvr>
+                                        <p:cTn id="64" dur="450" fill="hold" accel="50000" decel="50000">
+                                          <p:stCondLst>
+                                            <p:cond delay="0"/>
+                                          </p:stCondLst>
+                                        </p:cTn>
+                                        <p:tgtEl>
+                                          <p:spTgt spid="17"/>
+                                        </p:tgtEl>
+                                        <p:attrNameLst>
+                                          <p:attrName>ppt_x</p:attrName>
+                                          <p:attrName>ppt_y</p:attrName>
+                                        </p:attrNameLst>
+                                      </p:cBhvr>
+                                    </p:animMotion>
                                   </p:childTnLst>
                                 </p:cTn>
                               </p:par>
@@ -10340,7 +10267,1748 @@
                 </a:solidFill>
                 <a:latin typeface="Courier New"/>
               </a:rPr>
-              <a:t>14 / 14</a:t>
+              <a:t>14 / 15</a:t>
+            </a:r>
+          </a:p>
+        </p:txBody>
+      </p:sp>
+      <p:sp>
+        <p:nvSpPr>
+          <p:cNvPr id="5" name="TextBox 4"/>
+          <p:cNvSpPr txBox="1"/>
+          <p:nvPr/>
+        </p:nvSpPr>
+        <p:spPr>
+          <a:xfrm>
+            <a:off x="731520" y="2286000"/>
+            <a:ext cx="10725912" cy="1828800"/>
+          </a:xfrm>
+          <a:prstGeom prst="rect">
+            <a:avLst/>
+          </a:prstGeom>
+          <a:noFill/>
+        </p:spPr>
+        <p:txBody>
+          <a:bodyPr wrap="square" lIns="0" rIns="0" tIns="0" bIns="0" anchor="ctr">
+            <a:spAutoFit/>
+          </a:bodyPr>
+          <a:lstStyle/>
+          <a:p>
+            <a:pPr algn="ctr"/>
+            <a:r>
+              <a:rPr sz="8800" b="0" i="0">
+                <a:solidFill>
+                  <a:srgbClr val="ECE6DA"/>
+                </a:solidFill>
+                <a:latin typeface="Georgia"/>
+              </a:rPr>
+              <a:t>Architecture</a:t>
+            </a:r>
+          </a:p>
+        </p:txBody>
+      </p:sp>
+      <p:sp>
+        <p:nvSpPr>
+          <p:cNvPr id="6" name="Rectangle 5"/>
+          <p:cNvSpPr/>
+          <p:nvPr/>
+        </p:nvSpPr>
+        <p:spPr>
+          <a:xfrm>
+            <a:off x="5641848" y="4160520"/>
+            <a:ext cx="914400" cy="19050"/>
+          </a:xfrm>
+          <a:prstGeom prst="rect">
+            <a:avLst/>
+          </a:prstGeom>
+          <a:solidFill>
+            <a:srgbClr val="C99856"/>
+          </a:solidFill>
+          <a:ln>
+            <a:noFill/>
+          </a:ln>
+          <a:effectLst/>
+        </p:spPr>
+        <p:style>
+          <a:lnRef idx="1">
+            <a:schemeClr val="accent1"/>
+          </a:lnRef>
+          <a:fillRef idx="3">
+            <a:schemeClr val="accent1"/>
+          </a:fillRef>
+          <a:effectRef idx="2">
+            <a:schemeClr val="accent1"/>
+          </a:effectRef>
+          <a:fontRef idx="minor">
+            <a:schemeClr val="lt1"/>
+          </a:fontRef>
+        </p:style>
+        <p:txBody>
+          <a:bodyPr rtlCol="0" anchor="ctr"/>
+          <a:lstStyle/>
+          <a:p>
+            <a:pPr algn="ctr"/>
+          </a:p>
+        </p:txBody>
+      </p:sp>
+      <p:sp>
+        <p:nvSpPr>
+          <p:cNvPr id="7" name="TextBox 6"/>
+          <p:cNvSpPr txBox="1"/>
+          <p:nvPr/>
+        </p:nvSpPr>
+        <p:spPr>
+          <a:xfrm>
+            <a:off x="731520" y="4407408"/>
+            <a:ext cx="10725912" cy="548640"/>
+          </a:xfrm>
+          <a:prstGeom prst="rect">
+            <a:avLst/>
+          </a:prstGeom>
+          <a:noFill/>
+        </p:spPr>
+        <p:txBody>
+          <a:bodyPr wrap="square" lIns="0" rIns="0" tIns="0" bIns="0" anchor="t">
+            <a:spAutoFit/>
+          </a:bodyPr>
+          <a:lstStyle/>
+          <a:p>
+            <a:pPr algn="ctr"/>
+            <a:r>
+              <a:rPr sz="1500" b="0" i="1">
+                <a:solidFill>
+                  <a:srgbClr val="8A8E96"/>
+                </a:solidFill>
+                <a:latin typeface="Helvetica"/>
+              </a:rPr>
+              <a:t>A narrow, explainable AWS stack — every layer inside the BAA perimeter.</a:t>
+            </a:r>
+          </a:p>
+        </p:txBody>
+      </p:sp>
+      <p:sp>
+        <p:nvSpPr>
+          <p:cNvPr id="8" name="Rectangle 7"/>
+          <p:cNvSpPr/>
+          <p:nvPr/>
+        </p:nvSpPr>
+        <p:spPr>
+          <a:xfrm>
+            <a:off x="749808" y="1188720"/>
+            <a:ext cx="502920" cy="19050"/>
+          </a:xfrm>
+          <a:prstGeom prst="rect">
+            <a:avLst/>
+          </a:prstGeom>
+          <a:solidFill>
+            <a:srgbClr val="C99856"/>
+          </a:solidFill>
+          <a:ln>
+            <a:noFill/>
+          </a:ln>
+          <a:effectLst/>
+        </p:spPr>
+        <p:style>
+          <a:lnRef idx="1">
+            <a:schemeClr val="accent1"/>
+          </a:lnRef>
+          <a:fillRef idx="3">
+            <a:schemeClr val="accent1"/>
+          </a:fillRef>
+          <a:effectRef idx="2">
+            <a:schemeClr val="accent1"/>
+          </a:effectRef>
+          <a:fontRef idx="minor">
+            <a:schemeClr val="lt1"/>
+          </a:fontRef>
+        </p:style>
+        <p:txBody>
+          <a:bodyPr rtlCol="0" anchor="ctr"/>
+          <a:lstStyle/>
+          <a:p>
+            <a:pPr algn="ctr"/>
+          </a:p>
+        </p:txBody>
+      </p:sp>
+      <p:sp>
+        <p:nvSpPr>
+          <p:cNvPr id="9" name="TextBox 8"/>
+          <p:cNvSpPr txBox="1"/>
+          <p:nvPr/>
+        </p:nvSpPr>
+        <p:spPr>
+          <a:xfrm>
+            <a:off x="731520" y="1353312"/>
+            <a:ext cx="10725912" cy="411480"/>
+          </a:xfrm>
+          <a:prstGeom prst="rect">
+            <a:avLst/>
+          </a:prstGeom>
+          <a:noFill/>
+        </p:spPr>
+        <p:txBody>
+          <a:bodyPr wrap="square" lIns="0" rIns="0" tIns="0" bIns="0" anchor="t">
+            <a:spAutoFit/>
+          </a:bodyPr>
+          <a:lstStyle/>
+          <a:p>
+            <a:pPr algn="l"/>
+            <a:r>
+              <a:rPr sz="1200" b="0" i="1">
+                <a:solidFill>
+                  <a:srgbClr val="8A8E96"/>
+                </a:solidFill>
+                <a:latin typeface="Helvetica"/>
+              </a:rPr>
+              <a:t>A narrow, explainable AWS stack — every layer inside the BAA perimeter.</a:t>
+            </a:r>
+          </a:p>
+        </p:txBody>
+      </p:sp>
+      <p:sp>
+        <p:nvSpPr>
+          <p:cNvPr id="10" name="TextBox 9"/>
+          <p:cNvSpPr txBox="1"/>
+          <p:nvPr/>
+        </p:nvSpPr>
+        <p:spPr>
+          <a:xfrm>
+            <a:off x="749808" y="1783080"/>
+            <a:ext cx="10698480" cy="411480"/>
+          </a:xfrm>
+          <a:prstGeom prst="rect">
+            <a:avLst/>
+          </a:prstGeom>
+          <a:noFill/>
+        </p:spPr>
+        <p:txBody>
+          <a:bodyPr wrap="square" lIns="0" rIns="0" tIns="0" bIns="0" anchor="t">
+            <a:spAutoFit/>
+          </a:bodyPr>
+          <a:lstStyle/>
+          <a:p>
+            <a:pPr algn="l"/>
+            <a:r>
+              <a:rPr sz="2200" b="1" i="0">
+                <a:solidFill>
+                  <a:srgbClr val="ECE6DA"/>
+                </a:solidFill>
+                <a:latin typeface="Helvetica"/>
+              </a:rPr>
+              <a:t>Identity.</a:t>
+            </a:r>
+          </a:p>
+        </p:txBody>
+      </p:sp>
+      <p:sp>
+        <p:nvSpPr>
+          <p:cNvPr id="11" name="TextBox 10"/>
+          <p:cNvSpPr txBox="1"/>
+          <p:nvPr/>
+        </p:nvSpPr>
+        <p:spPr>
+          <a:xfrm>
+            <a:off x="749808" y="2240280"/>
+            <a:ext cx="10698480" cy="548640"/>
+          </a:xfrm>
+          <a:prstGeom prst="rect">
+            <a:avLst/>
+          </a:prstGeom>
+          <a:noFill/>
+        </p:spPr>
+        <p:txBody>
+          <a:bodyPr wrap="square" lIns="0" rIns="0" tIns="0" bIns="0" anchor="t">
+            <a:spAutoFit/>
+          </a:bodyPr>
+          <a:lstStyle/>
+          <a:p>
+            <a:pPr algn="l">
+              <a:lnSpc>
+                <a:spcPct val="125000"/>
+              </a:lnSpc>
+            </a:pPr>
+            <a:r>
+              <a:rPr sz="1300" b="0" i="0">
+                <a:solidFill>
+                  <a:srgbClr val="C7C0B2"/>
+                </a:solidFill>
+                <a:latin typeface="Helvetica"/>
+              </a:rPr>
+              <a:t>Amazon Cognito — MFA-ready, custom-attribute RBAC.</a:t>
+            </a:r>
+          </a:p>
+        </p:txBody>
+      </p:sp>
+      <p:sp>
+        <p:nvSpPr>
+          <p:cNvPr id="12" name="TextBox 11"/>
+          <p:cNvSpPr txBox="1"/>
+          <p:nvPr/>
+        </p:nvSpPr>
+        <p:spPr>
+          <a:xfrm>
+            <a:off x="749808" y="2715768"/>
+            <a:ext cx="10698480" cy="274320"/>
+          </a:xfrm>
+          <a:prstGeom prst="rect">
+            <a:avLst/>
+          </a:prstGeom>
+          <a:noFill/>
+        </p:spPr>
+        <p:txBody>
+          <a:bodyPr wrap="square" lIns="0" rIns="0" tIns="0" bIns="0" anchor="t">
+            <a:spAutoFit/>
+          </a:bodyPr>
+          <a:lstStyle/>
+          <a:p>
+            <a:pPr algn="l"/>
+            <a:r>
+              <a:rPr sz="1000" b="0" i="1">
+                <a:solidFill>
+                  <a:srgbClr val="C99856"/>
+                </a:solidFill>
+                <a:latin typeface="Courier New"/>
+              </a:rPr>
+              <a:t>cdk/lib/hipaa-baa-stack.ts</a:t>
+            </a:r>
+          </a:p>
+        </p:txBody>
+      </p:sp>
+      <p:sp>
+        <p:nvSpPr>
+          <p:cNvPr id="13" name="TextBox 12"/>
+          <p:cNvSpPr txBox="1"/>
+          <p:nvPr/>
+        </p:nvSpPr>
+        <p:spPr>
+          <a:xfrm>
+            <a:off x="749808" y="2715768"/>
+            <a:ext cx="10698480" cy="411480"/>
+          </a:xfrm>
+          <a:prstGeom prst="rect">
+            <a:avLst/>
+          </a:prstGeom>
+          <a:noFill/>
+        </p:spPr>
+        <p:txBody>
+          <a:bodyPr wrap="square" lIns="0" rIns="0" tIns="0" bIns="0" anchor="t">
+            <a:spAutoFit/>
+          </a:bodyPr>
+          <a:lstStyle/>
+          <a:p>
+            <a:pPr algn="l"/>
+            <a:r>
+              <a:rPr sz="2200" b="1" i="0">
+                <a:solidFill>
+                  <a:srgbClr val="ECE6DA"/>
+                </a:solidFill>
+                <a:latin typeface="Helvetica"/>
+              </a:rPr>
+              <a:t>Data.</a:t>
+            </a:r>
+          </a:p>
+        </p:txBody>
+      </p:sp>
+      <p:sp>
+        <p:nvSpPr>
+          <p:cNvPr id="14" name="TextBox 13"/>
+          <p:cNvSpPr txBox="1"/>
+          <p:nvPr/>
+        </p:nvSpPr>
+        <p:spPr>
+          <a:xfrm>
+            <a:off x="749808" y="3172968"/>
+            <a:ext cx="10698480" cy="548640"/>
+          </a:xfrm>
+          <a:prstGeom prst="rect">
+            <a:avLst/>
+          </a:prstGeom>
+          <a:noFill/>
+        </p:spPr>
+        <p:txBody>
+          <a:bodyPr wrap="square" lIns="0" rIns="0" tIns="0" bIns="0" anchor="t">
+            <a:spAutoFit/>
+          </a:bodyPr>
+          <a:lstStyle/>
+          <a:p>
+            <a:pPr algn="l">
+              <a:lnSpc>
+                <a:spcPct val="125000"/>
+              </a:lnSpc>
+            </a:pPr>
+            <a:r>
+              <a:rPr sz="1300" b="0" i="0">
+                <a:solidFill>
+                  <a:srgbClr val="C7C0B2"/>
+                </a:solidFill>
+                <a:latin typeface="Helvetica"/>
+              </a:rPr>
+              <a:t>DynamoDB (PITR + streams)   ·   S3 (versioned, encrypted).</a:t>
+            </a:r>
+          </a:p>
+        </p:txBody>
+      </p:sp>
+      <p:sp>
+        <p:nvSpPr>
+          <p:cNvPr id="15" name="TextBox 14"/>
+          <p:cNvSpPr txBox="1"/>
+          <p:nvPr/>
+        </p:nvSpPr>
+        <p:spPr>
+          <a:xfrm>
+            <a:off x="749808" y="3648456"/>
+            <a:ext cx="10698480" cy="274320"/>
+          </a:xfrm>
+          <a:prstGeom prst="rect">
+            <a:avLst/>
+          </a:prstGeom>
+          <a:noFill/>
+        </p:spPr>
+        <p:txBody>
+          <a:bodyPr wrap="square" lIns="0" rIns="0" tIns="0" bIns="0" anchor="t">
+            <a:spAutoFit/>
+          </a:bodyPr>
+          <a:lstStyle/>
+          <a:p>
+            <a:pPr algn="l"/>
+            <a:r>
+              <a:rPr sz="1000" b="0" i="1">
+                <a:solidFill>
+                  <a:srgbClr val="C99856"/>
+                </a:solidFill>
+                <a:latin typeface="Courier New"/>
+              </a:rPr>
+              <a:t>AWS Healthcare Lens HCL_SEC1 / SEC7</a:t>
+            </a:r>
+          </a:p>
+        </p:txBody>
+      </p:sp>
+      <p:sp>
+        <p:nvSpPr>
+          <p:cNvPr id="16" name="TextBox 15"/>
+          <p:cNvSpPr txBox="1"/>
+          <p:nvPr/>
+        </p:nvSpPr>
+        <p:spPr>
+          <a:xfrm>
+            <a:off x="749808" y="3648456"/>
+            <a:ext cx="10698480" cy="411480"/>
+          </a:xfrm>
+          <a:prstGeom prst="rect">
+            <a:avLst/>
+          </a:prstGeom>
+          <a:noFill/>
+        </p:spPr>
+        <p:txBody>
+          <a:bodyPr wrap="square" lIns="0" rIns="0" tIns="0" bIns="0" anchor="t">
+            <a:spAutoFit/>
+          </a:bodyPr>
+          <a:lstStyle/>
+          <a:p>
+            <a:pPr algn="l"/>
+            <a:r>
+              <a:rPr sz="2200" b="1" i="0">
+                <a:solidFill>
+                  <a:srgbClr val="ECE6DA"/>
+                </a:solidFill>
+                <a:latin typeface="Helvetica"/>
+              </a:rPr>
+              <a:t>Cryptography.</a:t>
+            </a:r>
+          </a:p>
+        </p:txBody>
+      </p:sp>
+      <p:sp>
+        <p:nvSpPr>
+          <p:cNvPr id="17" name="TextBox 16"/>
+          <p:cNvSpPr txBox="1"/>
+          <p:nvPr/>
+        </p:nvSpPr>
+        <p:spPr>
+          <a:xfrm>
+            <a:off x="749808" y="4105656"/>
+            <a:ext cx="10698480" cy="548640"/>
+          </a:xfrm>
+          <a:prstGeom prst="rect">
+            <a:avLst/>
+          </a:prstGeom>
+          <a:noFill/>
+        </p:spPr>
+        <p:txBody>
+          <a:bodyPr wrap="square" lIns="0" rIns="0" tIns="0" bIns="0" anchor="t">
+            <a:spAutoFit/>
+          </a:bodyPr>
+          <a:lstStyle/>
+          <a:p>
+            <a:pPr algn="l">
+              <a:lnSpc>
+                <a:spcPct val="125000"/>
+              </a:lnSpc>
+            </a:pPr>
+            <a:r>
+              <a:rPr sz="1300" b="0" i="0">
+                <a:solidFill>
+                  <a:srgbClr val="C7C0B2"/>
+                </a:solidFill>
+                <a:latin typeface="Helvetica"/>
+              </a:rPr>
+              <a:t>AWS KMS — FIPS 140-2 Level 3 HSM, ECC NIST P-256.</a:t>
+            </a:r>
+          </a:p>
+        </p:txBody>
+      </p:sp>
+      <p:sp>
+        <p:nvSpPr>
+          <p:cNvPr id="18" name="TextBox 17"/>
+          <p:cNvSpPr txBox="1"/>
+          <p:nvPr/>
+        </p:nvSpPr>
+        <p:spPr>
+          <a:xfrm>
+            <a:off x="749808" y="4581144"/>
+            <a:ext cx="10698480" cy="411480"/>
+          </a:xfrm>
+          <a:prstGeom prst="rect">
+            <a:avLst/>
+          </a:prstGeom>
+          <a:noFill/>
+        </p:spPr>
+        <p:txBody>
+          <a:bodyPr wrap="square" lIns="0" rIns="0" tIns="0" bIns="0" anchor="t">
+            <a:spAutoFit/>
+          </a:bodyPr>
+          <a:lstStyle/>
+          <a:p>
+            <a:pPr algn="l"/>
+            <a:r>
+              <a:rPr sz="2200" b="1" i="0">
+                <a:solidFill>
+                  <a:srgbClr val="ECE6DA"/>
+                </a:solidFill>
+                <a:latin typeface="Helvetica"/>
+              </a:rPr>
+              <a:t>Delivery.</a:t>
+            </a:r>
+          </a:p>
+        </p:txBody>
+      </p:sp>
+      <p:sp>
+        <p:nvSpPr>
+          <p:cNvPr id="19" name="TextBox 18"/>
+          <p:cNvSpPr txBox="1"/>
+          <p:nvPr/>
+        </p:nvSpPr>
+        <p:spPr>
+          <a:xfrm>
+            <a:off x="749808" y="5038344"/>
+            <a:ext cx="10698480" cy="548640"/>
+          </a:xfrm>
+          <a:prstGeom prst="rect">
+            <a:avLst/>
+          </a:prstGeom>
+          <a:noFill/>
+        </p:spPr>
+        <p:txBody>
+          <a:bodyPr wrap="square" lIns="0" rIns="0" tIns="0" bIns="0" anchor="t">
+            <a:spAutoFit/>
+          </a:bodyPr>
+          <a:lstStyle/>
+          <a:p>
+            <a:pPr algn="l">
+              <a:lnSpc>
+                <a:spcPct val="125000"/>
+              </a:lnSpc>
+            </a:pPr>
+            <a:r>
+              <a:rPr sz="1300" b="0" i="0">
+                <a:solidFill>
+                  <a:srgbClr val="C7C0B2"/>
+                </a:solidFill>
+                <a:latin typeface="Helvetica"/>
+              </a:rPr>
+              <a:t>Amazon SES — email stays inside the AWS BAA perimeter.</a:t>
+            </a:r>
+          </a:p>
+        </p:txBody>
+      </p:sp>
+      <p:sp>
+        <p:nvSpPr>
+          <p:cNvPr id="20" name="TextBox 19"/>
+          <p:cNvSpPr txBox="1"/>
+          <p:nvPr/>
+        </p:nvSpPr>
+        <p:spPr>
+          <a:xfrm>
+            <a:off x="749808" y="5513832"/>
+            <a:ext cx="10698480" cy="411480"/>
+          </a:xfrm>
+          <a:prstGeom prst="rect">
+            <a:avLst/>
+          </a:prstGeom>
+          <a:noFill/>
+        </p:spPr>
+        <p:txBody>
+          <a:bodyPr wrap="square" lIns="0" rIns="0" tIns="0" bIns="0" anchor="t">
+            <a:spAutoFit/>
+          </a:bodyPr>
+          <a:lstStyle/>
+          <a:p>
+            <a:pPr algn="l"/>
+            <a:r>
+              <a:rPr sz="2200" b="1" i="0">
+                <a:solidFill>
+                  <a:srgbClr val="ECE6DA"/>
+                </a:solidFill>
+                <a:latin typeface="Helvetica"/>
+              </a:rPr>
+              <a:t>Intelligence.</a:t>
+            </a:r>
+          </a:p>
+        </p:txBody>
+      </p:sp>
+      <p:sp>
+        <p:nvSpPr>
+          <p:cNvPr id="21" name="TextBox 20"/>
+          <p:cNvSpPr txBox="1"/>
+          <p:nvPr/>
+        </p:nvSpPr>
+        <p:spPr>
+          <a:xfrm>
+            <a:off x="749808" y="5971032"/>
+            <a:ext cx="10698480" cy="548640"/>
+          </a:xfrm>
+          <a:prstGeom prst="rect">
+            <a:avLst/>
+          </a:prstGeom>
+          <a:noFill/>
+        </p:spPr>
+        <p:txBody>
+          <a:bodyPr wrap="square" lIns="0" rIns="0" tIns="0" bIns="0" anchor="t">
+            <a:spAutoFit/>
+          </a:bodyPr>
+          <a:lstStyle/>
+          <a:p>
+            <a:pPr algn="l">
+              <a:lnSpc>
+                <a:spcPct val="125000"/>
+              </a:lnSpc>
+            </a:pPr>
+            <a:r>
+              <a:rPr sz="1300" b="0" i="0">
+                <a:solidFill>
+                  <a:srgbClr val="C7C0B2"/>
+                </a:solidFill>
+                <a:latin typeface="Helvetica"/>
+              </a:rPr>
+              <a:t>Google Gemini — grounded, streamed, scoped.</a:t>
+            </a:r>
+          </a:p>
+        </p:txBody>
+      </p:sp>
+    </p:spTree>
+  </p:cSld>
+  <p:clrMapOvr>
+    <a:masterClrMapping/>
+  </p:clrMapOvr>
+  <p:timing>
+    <p:tnLst>
+      <p:par>
+        <p:cTn id="1" dur="indefinite" restart="never" nodeType="tmRoot">
+          <p:childTnLst>
+            <p:seq concurrent="1" nextAc="seek">
+              <p:cTn id="2" dur="indefinite" nodeType="mainSeq">
+                <p:childTnLst>
+                  <p:par>
+                    <p:cTn id="3" fill="hold">
+                      <p:stCondLst>
+                        <p:cond delay="indefinite"/>
+                      </p:stCondLst>
+                      <p:childTnLst>
+                        <p:par>
+                          <p:cTn id="4" fill="hold">
+                            <p:stCondLst>
+                              <p:cond delay="0"/>
+                            </p:stCondLst>
+                            <p:childTnLst>
+                              <p:par>
+                                <p:cTn id="5" presetID="42" presetClass="path" presetSubtype="0" fill="hold" grpId="0" nodeType="clickEffect">
+                                  <p:stCondLst>
+                                    <p:cond delay="0"/>
+                                  </p:stCondLst>
+                                  <p:childTnLst>
+                                    <p:animMotion origin="layout" path="M 0 0 L -0.3800 -0.3500 E" pathEditMode="relative" rAng="0" ptsTypes="">
+                                      <p:cBhvr>
+                                        <p:cTn id="6" dur="550" fill="hold" accel="50000" decel="50000">
+                                          <p:stCondLst>
+                                            <p:cond delay="0"/>
+                                          </p:stCondLst>
+                                        </p:cTn>
+                                        <p:tgtEl>
+                                          <p:spTgt spid="5"/>
+                                        </p:tgtEl>
+                                        <p:attrNameLst>
+                                          <p:attrName>ppt_x</p:attrName>
+                                          <p:attrName>ppt_y</p:attrName>
+                                        </p:attrNameLst>
+                                      </p:cBhvr>
+                                    </p:animMotion>
+                                  </p:childTnLst>
+                                </p:cTn>
+                              </p:par>
+                              <p:par>
+                                <p:cTn id="7" presetID="6" presetClass="emph" presetSubtype="0" fill="hold" grpId="0" nodeType="withEffect">
+                                  <p:stCondLst>
+                                    <p:cond delay="0"/>
+                                  </p:stCondLst>
+                                  <p:childTnLst>
+                                    <p:animScale>
+                                      <p:cBhvr>
+                                        <p:cTn id="8" dur="550" fill="hold" accel="50000" decel="50000">
+                                          <p:stCondLst>
+                                            <p:cond delay="0"/>
+                                          </p:stCondLst>
+                                        </p:cTn>
+                                        <p:tgtEl>
+                                          <p:spTgt spid="5"/>
+                                        </p:tgtEl>
+                                      </p:cBhvr>
+                                      <p:from x="100000" y="100000"/>
+                                      <p:to x="34000" y="34000"/>
+                                    </p:animScale>
+                                  </p:childTnLst>
+                                </p:cTn>
+                              </p:par>
+                              <p:par>
+                                <p:cTn id="9" presetID="10" presetClass="exit" presetSubtype="0" fill="hold" grpId="0" nodeType="withEffect">
+                                  <p:stCondLst>
+                                    <p:cond delay="0"/>
+                                  </p:stCondLst>
+                                  <p:childTnLst>
+                                    <p:set>
+                                      <p:cBhvr>
+                                        <p:cTn id="10" dur="1" fill="hold">
+                                          <p:stCondLst>
+                                            <p:cond delay="0"/>
+                                          </p:stCondLst>
+                                        </p:cTn>
+                                        <p:tgtEl>
+                                          <p:spTgt spid="6"/>
+                                        </p:tgtEl>
+                                        <p:attrNameLst>
+                                          <p:attrName>style.visibility</p:attrName>
+                                        </p:attrNameLst>
+                                      </p:cBhvr>
+                                      <p:to>
+                                        <p:strVal val="hidden"/>
+                                      </p:to>
+                                    </p:set>
+                                    <p:anim calcmode="lin" valueType="num">
+                                      <p:cBhvr additive="base">
+                                        <p:cTn id="11" dur="300" fill="hold"/>
+                                        <p:tgtEl>
+                                          <p:spTgt spid="6"/>
+                                        </p:tgtEl>
+                                        <p:attrNameLst>
+                                          <p:attrName>style.opacity</p:attrName>
+                                        </p:attrNameLst>
+                                      </p:cBhvr>
+                                      <p:tavLst>
+                                        <p:tav tm="0">
+                                          <p:val>
+                                            <p:fltVal val="1"/>
+                                          </p:val>
+                                        </p:tav>
+                                        <p:tav tm="100000">
+                                          <p:val>
+                                            <p:fltVal val="0"/>
+                                          </p:val>
+                                        </p:tav>
+                                      </p:tavLst>
+                                    </p:anim>
+                                  </p:childTnLst>
+                                </p:cTn>
+                              </p:par>
+                              <p:par>
+                                <p:cTn id="12" presetID="10" presetClass="exit" presetSubtype="0" fill="hold" grpId="0" nodeType="withEffect">
+                                  <p:stCondLst>
+                                    <p:cond delay="0"/>
+                                  </p:stCondLst>
+                                  <p:childTnLst>
+                                    <p:set>
+                                      <p:cBhvr>
+                                        <p:cTn id="13" dur="1" fill="hold">
+                                          <p:stCondLst>
+                                            <p:cond delay="0"/>
+                                          </p:stCondLst>
+                                        </p:cTn>
+                                        <p:tgtEl>
+                                          <p:spTgt spid="7"/>
+                                        </p:tgtEl>
+                                        <p:attrNameLst>
+                                          <p:attrName>style.visibility</p:attrName>
+                                        </p:attrNameLst>
+                                      </p:cBhvr>
+                                      <p:to>
+                                        <p:strVal val="hidden"/>
+                                      </p:to>
+                                    </p:set>
+                                    <p:anim calcmode="lin" valueType="num">
+                                      <p:cBhvr additive="base">
+                                        <p:cTn id="14" dur="300" fill="hold"/>
+                                        <p:tgtEl>
+                                          <p:spTgt spid="7"/>
+                                        </p:tgtEl>
+                                        <p:attrNameLst>
+                                          <p:attrName>style.opacity</p:attrName>
+                                        </p:attrNameLst>
+                                      </p:cBhvr>
+                                      <p:tavLst>
+                                        <p:tav tm="0">
+                                          <p:val>
+                                            <p:fltVal val="1"/>
+                                          </p:val>
+                                        </p:tav>
+                                        <p:tav tm="100000">
+                                          <p:val>
+                                            <p:fltVal val="0"/>
+                                          </p:val>
+                                        </p:tav>
+                                      </p:tavLst>
+                                    </p:anim>
+                                  </p:childTnLst>
+                                </p:cTn>
+                              </p:par>
+                              <p:par>
+                                <p:cTn id="15" presetID="10" presetClass="entr" presetSubtype="0" fill="hold" grpId="0" nodeType="withEffect">
+                                  <p:stCondLst>
+                                    <p:cond delay="350"/>
+                                  </p:stCondLst>
+                                  <p:childTnLst>
+                                    <p:set>
+                                      <p:cBhvr>
+                                        <p:cTn id="16" dur="1" fill="hold">
+                                          <p:stCondLst>
+                                            <p:cond delay="0"/>
+                                          </p:stCondLst>
+                                        </p:cTn>
+                                        <p:tgtEl>
+                                          <p:spTgt spid="8"/>
+                                        </p:tgtEl>
+                                        <p:attrNameLst>
+                                          <p:attrName>style.visibility</p:attrName>
+                                        </p:attrNameLst>
+                                      </p:cBhvr>
+                                      <p:to>
+                                        <p:strVal val="visible"/>
+                                      </p:to>
+                                    </p:set>
+                                    <p:anim calcmode="lin" valueType="num">
+                                      <p:cBhvr additive="base">
+                                        <p:cTn id="17" dur="200" fill="hold"/>
+                                        <p:tgtEl>
+                                          <p:spTgt spid="8"/>
+                                        </p:tgtEl>
+                                        <p:attrNameLst>
+                                          <p:attrName>style.opacity</p:attrName>
+                                        </p:attrNameLst>
+                                      </p:cBhvr>
+                                      <p:tavLst>
+                                        <p:tav tm="0">
+                                          <p:val>
+                                            <p:fltVal val="0"/>
+                                          </p:val>
+                                        </p:tav>
+                                        <p:tav tm="100000">
+                                          <p:val>
+                                            <p:fltVal val="1"/>
+                                          </p:val>
+                                        </p:tav>
+                                      </p:tavLst>
+                                    </p:anim>
+                                  </p:childTnLst>
+                                </p:cTn>
+                              </p:par>
+                              <p:par>
+                                <p:cTn id="18" presetID="10" presetClass="entr" presetSubtype="0" fill="hold" grpId="0" nodeType="withEffect">
+                                  <p:stCondLst>
+                                    <p:cond delay="350"/>
+                                  </p:stCondLst>
+                                  <p:childTnLst>
+                                    <p:set>
+                                      <p:cBhvr>
+                                        <p:cTn id="19" dur="1" fill="hold">
+                                          <p:stCondLst>
+                                            <p:cond delay="0"/>
+                                          </p:stCondLst>
+                                        </p:cTn>
+                                        <p:tgtEl>
+                                          <p:spTgt spid="9"/>
+                                        </p:tgtEl>
+                                        <p:attrNameLst>
+                                          <p:attrName>style.visibility</p:attrName>
+                                        </p:attrNameLst>
+                                      </p:cBhvr>
+                                      <p:to>
+                                        <p:strVal val="visible"/>
+                                      </p:to>
+                                    </p:set>
+                                    <p:anim calcmode="lin" valueType="num">
+                                      <p:cBhvr additive="base">
+                                        <p:cTn id="20" dur="200" fill="hold"/>
+                                        <p:tgtEl>
+                                          <p:spTgt spid="9"/>
+                                        </p:tgtEl>
+                                        <p:attrNameLst>
+                                          <p:attrName>style.opacity</p:attrName>
+                                        </p:attrNameLst>
+                                      </p:cBhvr>
+                                      <p:tavLst>
+                                        <p:tav tm="0">
+                                          <p:val>
+                                            <p:fltVal val="0"/>
+                                          </p:val>
+                                        </p:tav>
+                                        <p:tav tm="100000">
+                                          <p:val>
+                                            <p:fltVal val="1"/>
+                                          </p:val>
+                                        </p:tav>
+                                      </p:tavLst>
+                                    </p:anim>
+                                  </p:childTnLst>
+                                </p:cTn>
+                              </p:par>
+                              <p:par>
+                                <p:cTn id="21" presetID="10" presetClass="entr" presetSubtype="0" fill="hold" grpId="0" nodeType="withEffect">
+                                  <p:stCondLst>
+                                    <p:cond delay="700"/>
+                                  </p:stCondLst>
+                                  <p:childTnLst>
+                                    <p:set>
+                                      <p:cBhvr>
+                                        <p:cTn id="22" dur="1" fill="hold">
+                                          <p:stCondLst>
+                                            <p:cond delay="0"/>
+                                          </p:stCondLst>
+                                        </p:cTn>
+                                        <p:tgtEl>
+                                          <p:spTgt spid="10"/>
+                                        </p:tgtEl>
+                                        <p:attrNameLst>
+                                          <p:attrName>style.visibility</p:attrName>
+                                        </p:attrNameLst>
+                                      </p:cBhvr>
+                                      <p:to>
+                                        <p:strVal val="visible"/>
+                                      </p:to>
+                                    </p:set>
+                                    <p:anim calcmode="lin" valueType="num">
+                                      <p:cBhvr additive="base">
+                                        <p:cTn id="23" dur="450" fill="hold"/>
+                                        <p:tgtEl>
+                                          <p:spTgt spid="10"/>
+                                        </p:tgtEl>
+                                        <p:attrNameLst>
+                                          <p:attrName>style.opacity</p:attrName>
+                                        </p:attrNameLst>
+                                      </p:cBhvr>
+                                      <p:tavLst>
+                                        <p:tav tm="0">
+                                          <p:val>
+                                            <p:fltVal val="0"/>
+                                          </p:val>
+                                        </p:tav>
+                                        <p:tav tm="100000">
+                                          <p:val>
+                                            <p:fltVal val="1"/>
+                                          </p:val>
+                                        </p:tav>
+                                      </p:tavLst>
+                                    </p:anim>
+                                  </p:childTnLst>
+                                </p:cTn>
+                              </p:par>
+                              <p:par>
+                                <p:cTn id="24" presetID="10" presetClass="entr" presetSubtype="0" fill="hold" grpId="0" nodeType="withEffect">
+                                  <p:stCondLst>
+                                    <p:cond delay="700"/>
+                                  </p:stCondLst>
+                                  <p:childTnLst>
+                                    <p:set>
+                                      <p:cBhvr>
+                                        <p:cTn id="25" dur="1" fill="hold">
+                                          <p:stCondLst>
+                                            <p:cond delay="0"/>
+                                          </p:stCondLst>
+                                        </p:cTn>
+                                        <p:tgtEl>
+                                          <p:spTgt spid="11"/>
+                                        </p:tgtEl>
+                                        <p:attrNameLst>
+                                          <p:attrName>style.visibility</p:attrName>
+                                        </p:attrNameLst>
+                                      </p:cBhvr>
+                                      <p:to>
+                                        <p:strVal val="visible"/>
+                                      </p:to>
+                                    </p:set>
+                                    <p:anim calcmode="lin" valueType="num">
+                                      <p:cBhvr additive="base">
+                                        <p:cTn id="26" dur="450" fill="hold"/>
+                                        <p:tgtEl>
+                                          <p:spTgt spid="11"/>
+                                        </p:tgtEl>
+                                        <p:attrNameLst>
+                                          <p:attrName>style.opacity</p:attrName>
+                                        </p:attrNameLst>
+                                      </p:cBhvr>
+                                      <p:tavLst>
+                                        <p:tav tm="0">
+                                          <p:val>
+                                            <p:fltVal val="0"/>
+                                          </p:val>
+                                        </p:tav>
+                                        <p:tav tm="100000">
+                                          <p:val>
+                                            <p:fltVal val="1"/>
+                                          </p:val>
+                                        </p:tav>
+                                      </p:tavLst>
+                                    </p:anim>
+                                  </p:childTnLst>
+                                </p:cTn>
+                              </p:par>
+                              <p:par>
+                                <p:cTn id="27" presetID="10" presetClass="entr" presetSubtype="0" fill="hold" grpId="0" nodeType="withEffect">
+                                  <p:stCondLst>
+                                    <p:cond delay="700"/>
+                                  </p:stCondLst>
+                                  <p:childTnLst>
+                                    <p:set>
+                                      <p:cBhvr>
+                                        <p:cTn id="28" dur="1" fill="hold">
+                                          <p:stCondLst>
+                                            <p:cond delay="0"/>
+                                          </p:stCondLst>
+                                        </p:cTn>
+                                        <p:tgtEl>
+                                          <p:spTgt spid="12"/>
+                                        </p:tgtEl>
+                                        <p:attrNameLst>
+                                          <p:attrName>style.visibility</p:attrName>
+                                        </p:attrNameLst>
+                                      </p:cBhvr>
+                                      <p:to>
+                                        <p:strVal val="visible"/>
+                                      </p:to>
+                                    </p:set>
+                                    <p:anim calcmode="lin" valueType="num">
+                                      <p:cBhvr additive="base">
+                                        <p:cTn id="29" dur="450" fill="hold"/>
+                                        <p:tgtEl>
+                                          <p:spTgt spid="12"/>
+                                        </p:tgtEl>
+                                        <p:attrNameLst>
+                                          <p:attrName>style.opacity</p:attrName>
+                                        </p:attrNameLst>
+                                      </p:cBhvr>
+                                      <p:tavLst>
+                                        <p:tav tm="0">
+                                          <p:val>
+                                            <p:fltVal val="0"/>
+                                          </p:val>
+                                        </p:tav>
+                                        <p:tav tm="100000">
+                                          <p:val>
+                                            <p:fltVal val="1"/>
+                                          </p:val>
+                                        </p:tav>
+                                      </p:tavLst>
+                                    </p:anim>
+                                  </p:childTnLst>
+                                </p:cTn>
+                              </p:par>
+                            </p:childTnLst>
+                          </p:cTn>
+                        </p:par>
+                      </p:childTnLst>
+                    </p:cTn>
+                  </p:par>
+                  <p:par>
+                    <p:cTn id="30" fill="hold">
+                      <p:stCondLst>
+                        <p:cond delay="indefinite"/>
+                      </p:stCondLst>
+                      <p:childTnLst>
+                        <p:par>
+                          <p:cTn id="31" fill="hold">
+                            <p:stCondLst>
+                              <p:cond delay="0"/>
+                            </p:stCondLst>
+                            <p:childTnLst>
+                              <p:par>
+                                <p:cTn id="32" presetID="10" presetClass="entr" presetSubtype="0" fill="hold" grpId="0" nodeType="clickEffect">
+                                  <p:stCondLst>
+                                    <p:cond delay="0"/>
+                                  </p:stCondLst>
+                                  <p:childTnLst>
+                                    <p:set>
+                                      <p:cBhvr>
+                                        <p:cTn id="33" dur="1" fill="hold">
+                                          <p:stCondLst>
+                                            <p:cond delay="0"/>
+                                          </p:stCondLst>
+                                        </p:cTn>
+                                        <p:tgtEl>
+                                          <p:spTgt spid="13"/>
+                                        </p:tgtEl>
+                                        <p:attrNameLst>
+                                          <p:attrName>style.visibility</p:attrName>
+                                        </p:attrNameLst>
+                                      </p:cBhvr>
+                                      <p:to>
+                                        <p:strVal val="visible"/>
+                                      </p:to>
+                                    </p:set>
+                                    <p:anim calcmode="lin" valueType="num">
+                                      <p:cBhvr additive="base">
+                                        <p:cTn id="34" dur="450" fill="hold"/>
+                                        <p:tgtEl>
+                                          <p:spTgt spid="13"/>
+                                        </p:tgtEl>
+                                        <p:attrNameLst>
+                                          <p:attrName>style.opacity</p:attrName>
+                                        </p:attrNameLst>
+                                      </p:cBhvr>
+                                      <p:tavLst>
+                                        <p:tav tm="0">
+                                          <p:val>
+                                            <p:fltVal val="0"/>
+                                          </p:val>
+                                        </p:tav>
+                                        <p:tav tm="100000">
+                                          <p:val>
+                                            <p:fltVal val="1"/>
+                                          </p:val>
+                                        </p:tav>
+                                      </p:tavLst>
+                                    </p:anim>
+                                  </p:childTnLst>
+                                </p:cTn>
+                              </p:par>
+                              <p:par>
+                                <p:cTn id="35" presetID="10" presetClass="entr" presetSubtype="0" fill="hold" grpId="0" nodeType="withEffect">
+                                  <p:stCondLst>
+                                    <p:cond delay="0"/>
+                                  </p:stCondLst>
+                                  <p:childTnLst>
+                                    <p:set>
+                                      <p:cBhvr>
+                                        <p:cTn id="36" dur="1" fill="hold">
+                                          <p:stCondLst>
+                                            <p:cond delay="0"/>
+                                          </p:stCondLst>
+                                        </p:cTn>
+                                        <p:tgtEl>
+                                          <p:spTgt spid="14"/>
+                                        </p:tgtEl>
+                                        <p:attrNameLst>
+                                          <p:attrName>style.visibility</p:attrName>
+                                        </p:attrNameLst>
+                                      </p:cBhvr>
+                                      <p:to>
+                                        <p:strVal val="visible"/>
+                                      </p:to>
+                                    </p:set>
+                                    <p:anim calcmode="lin" valueType="num">
+                                      <p:cBhvr additive="base">
+                                        <p:cTn id="37" dur="450" fill="hold"/>
+                                        <p:tgtEl>
+                                          <p:spTgt spid="14"/>
+                                        </p:tgtEl>
+                                        <p:attrNameLst>
+                                          <p:attrName>style.opacity</p:attrName>
+                                        </p:attrNameLst>
+                                      </p:cBhvr>
+                                      <p:tavLst>
+                                        <p:tav tm="0">
+                                          <p:val>
+                                            <p:fltVal val="0"/>
+                                          </p:val>
+                                        </p:tav>
+                                        <p:tav tm="100000">
+                                          <p:val>
+                                            <p:fltVal val="1"/>
+                                          </p:val>
+                                        </p:tav>
+                                      </p:tavLst>
+                                    </p:anim>
+                                  </p:childTnLst>
+                                </p:cTn>
+                              </p:par>
+                              <p:par>
+                                <p:cTn id="38" presetID="10" presetClass="entr" presetSubtype="0" fill="hold" grpId="0" nodeType="withEffect">
+                                  <p:stCondLst>
+                                    <p:cond delay="0"/>
+                                  </p:stCondLst>
+                                  <p:childTnLst>
+                                    <p:set>
+                                      <p:cBhvr>
+                                        <p:cTn id="39" dur="1" fill="hold">
+                                          <p:stCondLst>
+                                            <p:cond delay="0"/>
+                                          </p:stCondLst>
+                                        </p:cTn>
+                                        <p:tgtEl>
+                                          <p:spTgt spid="15"/>
+                                        </p:tgtEl>
+                                        <p:attrNameLst>
+                                          <p:attrName>style.visibility</p:attrName>
+                                        </p:attrNameLst>
+                                      </p:cBhvr>
+                                      <p:to>
+                                        <p:strVal val="visible"/>
+                                      </p:to>
+                                    </p:set>
+                                    <p:anim calcmode="lin" valueType="num">
+                                      <p:cBhvr additive="base">
+                                        <p:cTn id="40" dur="450" fill="hold"/>
+                                        <p:tgtEl>
+                                          <p:spTgt spid="15"/>
+                                        </p:tgtEl>
+                                        <p:attrNameLst>
+                                          <p:attrName>style.opacity</p:attrName>
+                                        </p:attrNameLst>
+                                      </p:cBhvr>
+                                      <p:tavLst>
+                                        <p:tav tm="0">
+                                          <p:val>
+                                            <p:fltVal val="0"/>
+                                          </p:val>
+                                        </p:tav>
+                                        <p:tav tm="100000">
+                                          <p:val>
+                                            <p:fltVal val="1"/>
+                                          </p:val>
+                                        </p:tav>
+                                      </p:tavLst>
+                                    </p:anim>
+                                  </p:childTnLst>
+                                </p:cTn>
+                              </p:par>
+                            </p:childTnLst>
+                          </p:cTn>
+                        </p:par>
+                      </p:childTnLst>
+                    </p:cTn>
+                  </p:par>
+                  <p:par>
+                    <p:cTn id="41" fill="hold">
+                      <p:stCondLst>
+                        <p:cond delay="indefinite"/>
+                      </p:stCondLst>
+                      <p:childTnLst>
+                        <p:par>
+                          <p:cTn id="42" fill="hold">
+                            <p:stCondLst>
+                              <p:cond delay="0"/>
+                            </p:stCondLst>
+                            <p:childTnLst>
+                              <p:par>
+                                <p:cTn id="43" presetID="10" presetClass="entr" presetSubtype="0" fill="hold" grpId="0" nodeType="clickEffect">
+                                  <p:stCondLst>
+                                    <p:cond delay="0"/>
+                                  </p:stCondLst>
+                                  <p:childTnLst>
+                                    <p:set>
+                                      <p:cBhvr>
+                                        <p:cTn id="44" dur="1" fill="hold">
+                                          <p:stCondLst>
+                                            <p:cond delay="0"/>
+                                          </p:stCondLst>
+                                        </p:cTn>
+                                        <p:tgtEl>
+                                          <p:spTgt spid="16"/>
+                                        </p:tgtEl>
+                                        <p:attrNameLst>
+                                          <p:attrName>style.visibility</p:attrName>
+                                        </p:attrNameLst>
+                                      </p:cBhvr>
+                                      <p:to>
+                                        <p:strVal val="visible"/>
+                                      </p:to>
+                                    </p:set>
+                                    <p:anim calcmode="lin" valueType="num">
+                                      <p:cBhvr additive="base">
+                                        <p:cTn id="45" dur="450" fill="hold"/>
+                                        <p:tgtEl>
+                                          <p:spTgt spid="16"/>
+                                        </p:tgtEl>
+                                        <p:attrNameLst>
+                                          <p:attrName>style.opacity</p:attrName>
+                                        </p:attrNameLst>
+                                      </p:cBhvr>
+                                      <p:tavLst>
+                                        <p:tav tm="0">
+                                          <p:val>
+                                            <p:fltVal val="0"/>
+                                          </p:val>
+                                        </p:tav>
+                                        <p:tav tm="100000">
+                                          <p:val>
+                                            <p:fltVal val="1"/>
+                                          </p:val>
+                                        </p:tav>
+                                      </p:tavLst>
+                                    </p:anim>
+                                  </p:childTnLst>
+                                </p:cTn>
+                              </p:par>
+                              <p:par>
+                                <p:cTn id="46" presetID="10" presetClass="entr" presetSubtype="0" fill="hold" grpId="0" nodeType="withEffect">
+                                  <p:stCondLst>
+                                    <p:cond delay="0"/>
+                                  </p:stCondLst>
+                                  <p:childTnLst>
+                                    <p:set>
+                                      <p:cBhvr>
+                                        <p:cTn id="47" dur="1" fill="hold">
+                                          <p:stCondLst>
+                                            <p:cond delay="0"/>
+                                          </p:stCondLst>
+                                        </p:cTn>
+                                        <p:tgtEl>
+                                          <p:spTgt spid="17"/>
+                                        </p:tgtEl>
+                                        <p:attrNameLst>
+                                          <p:attrName>style.visibility</p:attrName>
+                                        </p:attrNameLst>
+                                      </p:cBhvr>
+                                      <p:to>
+                                        <p:strVal val="visible"/>
+                                      </p:to>
+                                    </p:set>
+                                    <p:anim calcmode="lin" valueType="num">
+                                      <p:cBhvr additive="base">
+                                        <p:cTn id="48" dur="450" fill="hold"/>
+                                        <p:tgtEl>
+                                          <p:spTgt spid="17"/>
+                                        </p:tgtEl>
+                                        <p:attrNameLst>
+                                          <p:attrName>style.opacity</p:attrName>
+                                        </p:attrNameLst>
+                                      </p:cBhvr>
+                                      <p:tavLst>
+                                        <p:tav tm="0">
+                                          <p:val>
+                                            <p:fltVal val="0"/>
+                                          </p:val>
+                                        </p:tav>
+                                        <p:tav tm="100000">
+                                          <p:val>
+                                            <p:fltVal val="1"/>
+                                          </p:val>
+                                        </p:tav>
+                                      </p:tavLst>
+                                    </p:anim>
+                                  </p:childTnLst>
+                                </p:cTn>
+                              </p:par>
+                            </p:childTnLst>
+                          </p:cTn>
+                        </p:par>
+                      </p:childTnLst>
+                    </p:cTn>
+                  </p:par>
+                  <p:par>
+                    <p:cTn id="49" fill="hold">
+                      <p:stCondLst>
+                        <p:cond delay="indefinite"/>
+                      </p:stCondLst>
+                      <p:childTnLst>
+                        <p:par>
+                          <p:cTn id="50" fill="hold">
+                            <p:stCondLst>
+                              <p:cond delay="0"/>
+                            </p:stCondLst>
+                            <p:childTnLst>
+                              <p:par>
+                                <p:cTn id="51" presetID="10" presetClass="entr" presetSubtype="0" fill="hold" grpId="0" nodeType="clickEffect">
+                                  <p:stCondLst>
+                                    <p:cond delay="0"/>
+                                  </p:stCondLst>
+                                  <p:childTnLst>
+                                    <p:set>
+                                      <p:cBhvr>
+                                        <p:cTn id="52" dur="1" fill="hold">
+                                          <p:stCondLst>
+                                            <p:cond delay="0"/>
+                                          </p:stCondLst>
+                                        </p:cTn>
+                                        <p:tgtEl>
+                                          <p:spTgt spid="18"/>
+                                        </p:tgtEl>
+                                        <p:attrNameLst>
+                                          <p:attrName>style.visibility</p:attrName>
+                                        </p:attrNameLst>
+                                      </p:cBhvr>
+                                      <p:to>
+                                        <p:strVal val="visible"/>
+                                      </p:to>
+                                    </p:set>
+                                    <p:anim calcmode="lin" valueType="num">
+                                      <p:cBhvr additive="base">
+                                        <p:cTn id="53" dur="450" fill="hold"/>
+                                        <p:tgtEl>
+                                          <p:spTgt spid="18"/>
+                                        </p:tgtEl>
+                                        <p:attrNameLst>
+                                          <p:attrName>style.opacity</p:attrName>
+                                        </p:attrNameLst>
+                                      </p:cBhvr>
+                                      <p:tavLst>
+                                        <p:tav tm="0">
+                                          <p:val>
+                                            <p:fltVal val="0"/>
+                                          </p:val>
+                                        </p:tav>
+                                        <p:tav tm="100000">
+                                          <p:val>
+                                            <p:fltVal val="1"/>
+                                          </p:val>
+                                        </p:tav>
+                                      </p:tavLst>
+                                    </p:anim>
+                                  </p:childTnLst>
+                                </p:cTn>
+                              </p:par>
+                              <p:par>
+                                <p:cTn id="54" presetID="10" presetClass="entr" presetSubtype="0" fill="hold" grpId="0" nodeType="withEffect">
+                                  <p:stCondLst>
+                                    <p:cond delay="0"/>
+                                  </p:stCondLst>
+                                  <p:childTnLst>
+                                    <p:set>
+                                      <p:cBhvr>
+                                        <p:cTn id="55" dur="1" fill="hold">
+                                          <p:stCondLst>
+                                            <p:cond delay="0"/>
+                                          </p:stCondLst>
+                                        </p:cTn>
+                                        <p:tgtEl>
+                                          <p:spTgt spid="19"/>
+                                        </p:tgtEl>
+                                        <p:attrNameLst>
+                                          <p:attrName>style.visibility</p:attrName>
+                                        </p:attrNameLst>
+                                      </p:cBhvr>
+                                      <p:to>
+                                        <p:strVal val="visible"/>
+                                      </p:to>
+                                    </p:set>
+                                    <p:anim calcmode="lin" valueType="num">
+                                      <p:cBhvr additive="base">
+                                        <p:cTn id="56" dur="450" fill="hold"/>
+                                        <p:tgtEl>
+                                          <p:spTgt spid="19"/>
+                                        </p:tgtEl>
+                                        <p:attrNameLst>
+                                          <p:attrName>style.opacity</p:attrName>
+                                        </p:attrNameLst>
+                                      </p:cBhvr>
+                                      <p:tavLst>
+                                        <p:tav tm="0">
+                                          <p:val>
+                                            <p:fltVal val="0"/>
+                                          </p:val>
+                                        </p:tav>
+                                        <p:tav tm="100000">
+                                          <p:val>
+                                            <p:fltVal val="1"/>
+                                          </p:val>
+                                        </p:tav>
+                                      </p:tavLst>
+                                    </p:anim>
+                                  </p:childTnLst>
+                                </p:cTn>
+                              </p:par>
+                            </p:childTnLst>
+                          </p:cTn>
+                        </p:par>
+                      </p:childTnLst>
+                    </p:cTn>
+                  </p:par>
+                  <p:par>
+                    <p:cTn id="57" fill="hold">
+                      <p:stCondLst>
+                        <p:cond delay="indefinite"/>
+                      </p:stCondLst>
+                      <p:childTnLst>
+                        <p:par>
+                          <p:cTn id="58" fill="hold">
+                            <p:stCondLst>
+                              <p:cond delay="0"/>
+                            </p:stCondLst>
+                            <p:childTnLst>
+                              <p:par>
+                                <p:cTn id="59" presetID="10" presetClass="entr" presetSubtype="0" fill="hold" grpId="0" nodeType="clickEffect">
+                                  <p:stCondLst>
+                                    <p:cond delay="0"/>
+                                  </p:stCondLst>
+                                  <p:childTnLst>
+                                    <p:set>
+                                      <p:cBhvr>
+                                        <p:cTn id="60" dur="1" fill="hold">
+                                          <p:stCondLst>
+                                            <p:cond delay="0"/>
+                                          </p:stCondLst>
+                                        </p:cTn>
+                                        <p:tgtEl>
+                                          <p:spTgt spid="20"/>
+                                        </p:tgtEl>
+                                        <p:attrNameLst>
+                                          <p:attrName>style.visibility</p:attrName>
+                                        </p:attrNameLst>
+                                      </p:cBhvr>
+                                      <p:to>
+                                        <p:strVal val="visible"/>
+                                      </p:to>
+                                    </p:set>
+                                    <p:anim calcmode="lin" valueType="num">
+                                      <p:cBhvr additive="base">
+                                        <p:cTn id="61" dur="450" fill="hold"/>
+                                        <p:tgtEl>
+                                          <p:spTgt spid="20"/>
+                                        </p:tgtEl>
+                                        <p:attrNameLst>
+                                          <p:attrName>style.opacity</p:attrName>
+                                        </p:attrNameLst>
+                                      </p:cBhvr>
+                                      <p:tavLst>
+                                        <p:tav tm="0">
+                                          <p:val>
+                                            <p:fltVal val="0"/>
+                                          </p:val>
+                                        </p:tav>
+                                        <p:tav tm="100000">
+                                          <p:val>
+                                            <p:fltVal val="1"/>
+                                          </p:val>
+                                        </p:tav>
+                                      </p:tavLst>
+                                    </p:anim>
+                                  </p:childTnLst>
+                                </p:cTn>
+                              </p:par>
+                              <p:par>
+                                <p:cTn id="62" presetID="10" presetClass="entr" presetSubtype="0" fill="hold" grpId="0" nodeType="withEffect">
+                                  <p:stCondLst>
+                                    <p:cond delay="0"/>
+                                  </p:stCondLst>
+                                  <p:childTnLst>
+                                    <p:set>
+                                      <p:cBhvr>
+                                        <p:cTn id="63" dur="1" fill="hold">
+                                          <p:stCondLst>
+                                            <p:cond delay="0"/>
+                                          </p:stCondLst>
+                                        </p:cTn>
+                                        <p:tgtEl>
+                                          <p:spTgt spid="21"/>
+                                        </p:tgtEl>
+                                        <p:attrNameLst>
+                                          <p:attrName>style.visibility</p:attrName>
+                                        </p:attrNameLst>
+                                      </p:cBhvr>
+                                      <p:to>
+                                        <p:strVal val="visible"/>
+                                      </p:to>
+                                    </p:set>
+                                    <p:anim calcmode="lin" valueType="num">
+                                      <p:cBhvr additive="base">
+                                        <p:cTn id="64" dur="450" fill="hold"/>
+                                        <p:tgtEl>
+                                          <p:spTgt spid="21"/>
+                                        </p:tgtEl>
+                                        <p:attrNameLst>
+                                          <p:attrName>style.opacity</p:attrName>
+                                        </p:attrNameLst>
+                                      </p:cBhvr>
+                                      <p:tavLst>
+                                        <p:tav tm="0">
+                                          <p:val>
+                                            <p:fltVal val="0"/>
+                                          </p:val>
+                                        </p:tav>
+                                        <p:tav tm="100000">
+                                          <p:val>
+                                            <p:fltVal val="1"/>
+                                          </p:val>
+                                        </p:tav>
+                                      </p:tavLst>
+                                    </p:anim>
+                                  </p:childTnLst>
+                                </p:cTn>
+                              </p:par>
+                            </p:childTnLst>
+                          </p:cTn>
+                        </p:par>
+                      </p:childTnLst>
+                    </p:cTn>
+                  </p:par>
+                </p:childTnLst>
+              </p:cTn>
+              <p:prevCondLst>
+                <p:cond evt="onPrev" delay="0">
+                  <p:tgtEl>
+                    <p:sldTgt/>
+                  </p:tgtEl>
+                </p:cond>
+              </p:prevCondLst>
+              <p:nextCondLst>
+                <p:cond evt="onNext" delay="0">
+                  <p:tgtEl>
+                    <p:sldTgt/>
+                  </p:tgtEl>
+                </p:cond>
+              </p:nextCondLst>
+            </p:seq>
+          </p:childTnLst>
+        </p:cTn>
+      </p:par>
+    </p:tnLst>
+  </p:timing>
+</p:sld>
+</file>
+
+<file path=ppt/slides/slide15.xml><?xml version="1.0" encoding="utf-8"?>
+<p:sld xmlns:a="http://schemas.openxmlformats.org/drawingml/2006/main" xmlns:p="http://schemas.openxmlformats.org/presentationml/2006/main" xmlns:r="http://schemas.openxmlformats.org/officeDocument/2006/relationships">
+  <p:cSld>
+    <p:bg>
+      <p:bgPr>
+        <a:solidFill>
+          <a:srgbClr val="0B0E11"/>
+        </a:solidFill>
+        <a:effectLst/>
+      </p:bgPr>
+    </p:bg>
+    <p:spTree>
+      <p:nvGrpSpPr>
+        <p:cNvPr id="1" name=""/>
+        <p:cNvGrpSpPr/>
+        <p:nvPr/>
+      </p:nvGrpSpPr>
+      <p:grpSpPr/>
+      <p:sp>
+        <p:nvSpPr>
+          <p:cNvPr id="2" name="Rectangle 1"/>
+          <p:cNvSpPr/>
+          <p:nvPr/>
+        </p:nvSpPr>
+        <p:spPr>
+          <a:xfrm>
+            <a:off x="731520" y="6419088"/>
+            <a:ext cx="10725912" cy="6350"/>
+          </a:xfrm>
+          <a:prstGeom prst="rect">
+            <a:avLst/>
+          </a:prstGeom>
+          <a:solidFill>
+            <a:srgbClr val="262B31"/>
+          </a:solidFill>
+          <a:ln>
+            <a:noFill/>
+          </a:ln>
+          <a:effectLst/>
+        </p:spPr>
+        <p:style>
+          <a:lnRef idx="1">
+            <a:schemeClr val="accent1"/>
+          </a:lnRef>
+          <a:fillRef idx="3">
+            <a:schemeClr val="accent1"/>
+          </a:fillRef>
+          <a:effectRef idx="2">
+            <a:schemeClr val="accent1"/>
+          </a:effectRef>
+          <a:fontRef idx="minor">
+            <a:schemeClr val="lt1"/>
+          </a:fontRef>
+        </p:style>
+        <p:txBody>
+          <a:bodyPr rtlCol="0" anchor="ctr"/>
+          <a:lstStyle/>
+          <a:p>
+            <a:pPr algn="ctr"/>
+          </a:p>
+        </p:txBody>
+      </p:sp>
+      <p:sp>
+        <p:nvSpPr>
+          <p:cNvPr id="3" name="TextBox 2"/>
+          <p:cNvSpPr txBox="1"/>
+          <p:nvPr/>
+        </p:nvSpPr>
+        <p:spPr>
+          <a:xfrm>
+            <a:off x="731520" y="6510528"/>
+            <a:ext cx="5486400" cy="228600"/>
+          </a:xfrm>
+          <a:prstGeom prst="rect">
+            <a:avLst/>
+          </a:prstGeom>
+          <a:noFill/>
+        </p:spPr>
+        <p:txBody>
+          <a:bodyPr wrap="square" lIns="0" rIns="0" tIns="0" bIns="0" anchor="t">
+            <a:spAutoFit/>
+          </a:bodyPr>
+          <a:lstStyle/>
+          <a:p>
+            <a:pPr algn="l"/>
+            <a:r>
+              <a:rPr sz="900" b="0" i="0">
+                <a:solidFill>
+                  <a:srgbClr val="5A5F67"/>
+                </a:solidFill>
+                <a:latin typeface="Helvetica"/>
+              </a:rPr>
+              <a:t>HIPAApotamus   ·   Feature walkthrough</a:t>
+            </a:r>
+          </a:p>
+        </p:txBody>
+      </p:sp>
+      <p:sp>
+        <p:nvSpPr>
+          <p:cNvPr id="4" name="TextBox 3"/>
+          <p:cNvSpPr txBox="1"/>
+          <p:nvPr/>
+        </p:nvSpPr>
+        <p:spPr>
+          <a:xfrm>
+            <a:off x="6400800" y="6510528"/>
+            <a:ext cx="5056632" cy="228600"/>
+          </a:xfrm>
+          <a:prstGeom prst="rect">
+            <a:avLst/>
+          </a:prstGeom>
+          <a:noFill/>
+        </p:spPr>
+        <p:txBody>
+          <a:bodyPr wrap="square" lIns="0" rIns="0" tIns="0" bIns="0" anchor="t">
+            <a:spAutoFit/>
+          </a:bodyPr>
+          <a:lstStyle/>
+          <a:p>
+            <a:pPr algn="r"/>
+            <a:r>
+              <a:rPr sz="900" b="0" i="0">
+                <a:solidFill>
+                  <a:srgbClr val="5A5F67"/>
+                </a:solidFill>
+                <a:latin typeface="Courier New"/>
+              </a:rPr>
+              <a:t>15 / 15</a:t>
             </a:r>
           </a:p>
         </p:txBody>
@@ -11454,7 +13122,7 @@
                 </a:solidFill>
                 <a:latin typeface="Courier New"/>
               </a:rPr>
-              <a:t>02 / 14</a:t>
+              <a:t>02 / 15</a:t>
             </a:r>
           </a:p>
         </p:txBody>
@@ -13473,7 +15141,7 @@
                 </a:solidFill>
                 <a:latin typeface="Courier New"/>
               </a:rPr>
-              <a:t>03 / 14</a:t>
+              <a:t>03 / 15</a:t>
             </a:r>
           </a:p>
         </p:txBody>
@@ -15308,7 +16976,7 @@
                 </a:solidFill>
                 <a:latin typeface="Courier New"/>
               </a:rPr>
-              <a:t>04 / 14</a:t>
+              <a:t>04 / 15</a:t>
             </a:r>
           </a:p>
         </p:txBody>
@@ -17217,7 +18885,7 @@
                 </a:solidFill>
                 <a:latin typeface="Courier New"/>
               </a:rPr>
-              <a:t>05 / 14</a:t>
+              <a:t>05 / 15</a:t>
             </a:r>
           </a:p>
         </p:txBody>
@@ -18936,7 +20604,7 @@
                 </a:solidFill>
                 <a:latin typeface="Courier New"/>
               </a:rPr>
-              <a:t>06 / 14</a:t>
+              <a:t>06 / 15</a:t>
             </a:r>
           </a:p>
         </p:txBody>
@@ -20603,7 +22271,7 @@
                 </a:solidFill>
                 <a:latin typeface="Courier New"/>
               </a:rPr>
-              <a:t>07 / 14</a:t>
+              <a:t>07 / 15</a:t>
             </a:r>
           </a:p>
         </p:txBody>
@@ -22237,7 +23905,7 @@
                 </a:solidFill>
                 <a:latin typeface="Courier New"/>
               </a:rPr>
-              <a:t>08 / 14</a:t>
+              <a:t>08 / 15</a:t>
             </a:r>
           </a:p>
         </p:txBody>
@@ -24256,7 +25924,7 @@
                 </a:solidFill>
                 <a:latin typeface="Courier New"/>
               </a:rPr>
-              <a:t>09 / 14</a:t>
+              <a:t>09 / 15</a:t>
             </a:r>
           </a:p>
         </p:txBody>
